--- a/OpenCanpasC/OCC_シューティングゲーム制作体験.pptx
+++ b/OpenCanpasC/OCC_シューティングゲーム制作体験.pptx
@@ -7,34 +7,35 @@
   <p:sldIdLst>
     <p:sldId id="256" r:id="rId2"/>
     <p:sldId id="257" r:id="rId3"/>
-    <p:sldId id="258" r:id="rId4"/>
-    <p:sldId id="259" r:id="rId5"/>
-    <p:sldId id="260" r:id="rId6"/>
-    <p:sldId id="261" r:id="rId7"/>
-    <p:sldId id="262" r:id="rId8"/>
-    <p:sldId id="263" r:id="rId9"/>
-    <p:sldId id="264" r:id="rId10"/>
-    <p:sldId id="265" r:id="rId11"/>
-    <p:sldId id="266" r:id="rId12"/>
-    <p:sldId id="267" r:id="rId13"/>
-    <p:sldId id="268" r:id="rId14"/>
-    <p:sldId id="271" r:id="rId15"/>
-    <p:sldId id="272" r:id="rId16"/>
-    <p:sldId id="269" r:id="rId17"/>
-    <p:sldId id="270" r:id="rId18"/>
-    <p:sldId id="273" r:id="rId19"/>
-    <p:sldId id="274" r:id="rId20"/>
-    <p:sldId id="275" r:id="rId21"/>
-    <p:sldId id="276" r:id="rId22"/>
-    <p:sldId id="277" r:id="rId23"/>
-    <p:sldId id="278" r:id="rId24"/>
-    <p:sldId id="279" r:id="rId25"/>
-    <p:sldId id="280" r:id="rId26"/>
-    <p:sldId id="281" r:id="rId27"/>
-    <p:sldId id="282" r:id="rId28"/>
-    <p:sldId id="283" r:id="rId29"/>
-    <p:sldId id="285" r:id="rId30"/>
-    <p:sldId id="284" r:id="rId31"/>
+    <p:sldId id="286" r:id="rId4"/>
+    <p:sldId id="258" r:id="rId5"/>
+    <p:sldId id="259" r:id="rId6"/>
+    <p:sldId id="260" r:id="rId7"/>
+    <p:sldId id="261" r:id="rId8"/>
+    <p:sldId id="262" r:id="rId9"/>
+    <p:sldId id="263" r:id="rId10"/>
+    <p:sldId id="264" r:id="rId11"/>
+    <p:sldId id="265" r:id="rId12"/>
+    <p:sldId id="266" r:id="rId13"/>
+    <p:sldId id="267" r:id="rId14"/>
+    <p:sldId id="268" r:id="rId15"/>
+    <p:sldId id="271" r:id="rId16"/>
+    <p:sldId id="272" r:id="rId17"/>
+    <p:sldId id="269" r:id="rId18"/>
+    <p:sldId id="270" r:id="rId19"/>
+    <p:sldId id="273" r:id="rId20"/>
+    <p:sldId id="274" r:id="rId21"/>
+    <p:sldId id="275" r:id="rId22"/>
+    <p:sldId id="276" r:id="rId23"/>
+    <p:sldId id="277" r:id="rId24"/>
+    <p:sldId id="278" r:id="rId25"/>
+    <p:sldId id="279" r:id="rId26"/>
+    <p:sldId id="280" r:id="rId27"/>
+    <p:sldId id="281" r:id="rId28"/>
+    <p:sldId id="282" r:id="rId29"/>
+    <p:sldId id="283" r:id="rId30"/>
+    <p:sldId id="285" r:id="rId31"/>
+    <p:sldId id="284" r:id="rId32"/>
   </p:sldIdLst>
   <p:sldSz cx="12192000" cy="6858000"/>
   <p:notesSz cx="6858000" cy="9144000"/>
@@ -3851,7 +3852,7 @@
         <p:spPr>
           <a:xfrm>
             <a:off x="567542" y="1216429"/>
-            <a:ext cx="9417963" cy="830997"/>
+            <a:ext cx="6032421" cy="461665"/>
           </a:xfrm>
           <a:prstGeom prst="rect">
             <a:avLst/>
@@ -3865,19 +3866,8 @@
           <a:lstStyle/>
           <a:p>
             <a:r>
-              <a:rPr lang="en-US" altLang="ja-JP" sz="2400" dirty="0"/>
-              <a:t>Unity</a:t>
-            </a:r>
-            <a:r>
               <a:rPr lang="ja-JP" altLang="en-US" sz="2400" dirty="0"/>
-              <a:t>の画面に戻ってゲームを実行しましょう。</a:t>
-            </a:r>
-            <a:endParaRPr lang="en-US" altLang="ja-JP" sz="2400" dirty="0"/>
-          </a:p>
-          <a:p>
-            <a:r>
-              <a:rPr lang="ja-JP" altLang="en-US" sz="2400" dirty="0"/>
-              <a:t>上キーを押すと、機体が上に移動するようになっているはずです。</a:t>
+              <a:t>画面を参考にプログラムを書きましょう。</a:t>
             </a:r>
             <a:endParaRPr lang="en-US" altLang="ja-JP" sz="2400" dirty="0"/>
           </a:p>
@@ -3885,10 +3875,10 @@
       </p:sp>
       <p:pic>
         <p:nvPicPr>
-          <p:cNvPr id="10" name="図 9">
-            <a:extLst>
-              <a:ext uri="{FF2B5EF4-FFF2-40B4-BE49-F238E27FC236}">
-                <a16:creationId xmlns:a16="http://schemas.microsoft.com/office/drawing/2014/main" id="{2D4E479B-7120-48BB-8CD6-B398F0901E6F}"/>
+          <p:cNvPr id="3" name="図 2">
+            <a:extLst>
+              <a:ext uri="{FF2B5EF4-FFF2-40B4-BE49-F238E27FC236}">
+                <a16:creationId xmlns:a16="http://schemas.microsoft.com/office/drawing/2014/main" id="{5B247A15-19C1-4C4A-B3DA-5A8A8F4A9867}"/>
               </a:ext>
             </a:extLst>
           </p:cNvPr>
@@ -3905,8 +3895,8 @@
         </p:blipFill>
         <p:spPr>
           <a:xfrm>
-            <a:off x="567542" y="2187127"/>
-            <a:ext cx="8923591" cy="3805292"/>
+            <a:off x="567542" y="1817794"/>
+            <a:ext cx="6908525" cy="1606085"/>
           </a:xfrm>
           <a:prstGeom prst="rect">
             <a:avLst/>
@@ -3915,64 +3905,10 @@
       </p:pic>
       <p:sp>
         <p:nvSpPr>
-          <p:cNvPr id="11" name="矢印: 右 10">
-            <a:extLst>
-              <a:ext uri="{FF2B5EF4-FFF2-40B4-BE49-F238E27FC236}">
-                <a16:creationId xmlns:a16="http://schemas.microsoft.com/office/drawing/2014/main" id="{EFFE8A12-7CDA-4139-A07D-FC2F1886D1CD}"/>
-              </a:ext>
-            </a:extLst>
-          </p:cNvPr>
-          <p:cNvSpPr/>
-          <p:nvPr/>
-        </p:nvSpPr>
-        <p:spPr>
-          <a:xfrm rot="13245323">
-            <a:off x="6578186" y="2547838"/>
-            <a:ext cx="660400" cy="502574"/>
-          </a:xfrm>
-          <a:prstGeom prst="rightArrow">
-            <a:avLst/>
-          </a:prstGeom>
-          <a:solidFill>
-            <a:srgbClr val="FF0000"/>
-          </a:solidFill>
-          <a:ln>
-            <a:solidFill>
-              <a:schemeClr val="tx1"/>
-            </a:solidFill>
-          </a:ln>
-        </p:spPr>
-        <p:style>
-          <a:lnRef idx="2">
-            <a:schemeClr val="accent1">
-              <a:shade val="50000"/>
-            </a:schemeClr>
-          </a:lnRef>
-          <a:fillRef idx="1">
-            <a:schemeClr val="accent1"/>
-          </a:fillRef>
-          <a:effectRef idx="0">
-            <a:schemeClr val="accent1"/>
-          </a:effectRef>
-          <a:fontRef idx="minor">
-            <a:schemeClr val="lt1"/>
-          </a:fontRef>
-        </p:style>
-        <p:txBody>
-          <a:bodyPr rtlCol="0" anchor="ctr"/>
-          <a:lstStyle/>
-          <a:p>
-            <a:pPr algn="ctr"/>
-            <a:endParaRPr kumimoji="1" lang="ja-JP" altLang="en-US"/>
-          </a:p>
-        </p:txBody>
-      </p:sp>
-      <p:sp>
-        <p:nvSpPr>
-          <p:cNvPr id="12" name="テキスト ボックス 11">
-            <a:extLst>
-              <a:ext uri="{FF2B5EF4-FFF2-40B4-BE49-F238E27FC236}">
-                <a16:creationId xmlns:a16="http://schemas.microsoft.com/office/drawing/2014/main" id="{78F93749-84E8-45DA-8993-541ACF3C8D3E}"/>
+          <p:cNvPr id="7" name="テキスト ボックス 6">
+            <a:extLst>
+              <a:ext uri="{FF2B5EF4-FFF2-40B4-BE49-F238E27FC236}">
+                <a16:creationId xmlns:a16="http://schemas.microsoft.com/office/drawing/2014/main" id="{C0E3D302-38B9-4EF7-BA41-5E832C6C0CF6}"/>
               </a:ext>
             </a:extLst>
           </p:cNvPr>
@@ -3981,8 +3917,8 @@
         </p:nvSpPr>
         <p:spPr>
           <a:xfrm>
-            <a:off x="567542" y="6132120"/>
-            <a:ext cx="9417963" cy="461665"/>
+            <a:off x="8255275" y="1979137"/>
+            <a:ext cx="3570208" cy="461665"/>
           </a:xfrm>
           <a:prstGeom prst="rect">
             <a:avLst/>
@@ -3996,17 +3932,166 @@
           <a:lstStyle/>
           <a:p>
             <a:r>
+              <a:rPr lang="ja-JP" altLang="en-US" sz="2400" b="1" dirty="0">
+                <a:solidFill>
+                  <a:srgbClr val="7030A0"/>
+                </a:solidFill>
+              </a:rPr>
+              <a:t>もしも上矢印を押したら</a:t>
+            </a:r>
+            <a:endParaRPr lang="en-US" altLang="ja-JP" sz="2400" b="1" dirty="0">
+              <a:solidFill>
+                <a:srgbClr val="7030A0"/>
+              </a:solidFill>
+            </a:endParaRPr>
+          </a:p>
+        </p:txBody>
+      </p:sp>
+      <p:sp>
+        <p:nvSpPr>
+          <p:cNvPr id="8" name="テキスト ボックス 7">
+            <a:extLst>
+              <a:ext uri="{FF2B5EF4-FFF2-40B4-BE49-F238E27FC236}">
+                <a16:creationId xmlns:a16="http://schemas.microsoft.com/office/drawing/2014/main" id="{E0E0CB4D-1DDB-46A5-9F28-363AB8BD0C44}"/>
+              </a:ext>
+            </a:extLst>
+          </p:cNvPr>
+          <p:cNvSpPr txBox="1"/>
+          <p:nvPr/>
+        </p:nvSpPr>
+        <p:spPr>
+          <a:xfrm>
+            <a:off x="8303365" y="2440802"/>
+            <a:ext cx="3474028" cy="461665"/>
+          </a:xfrm>
+          <a:prstGeom prst="rect">
+            <a:avLst/>
+          </a:prstGeom>
+          <a:noFill/>
+        </p:spPr>
+        <p:txBody>
+          <a:bodyPr wrap="none" rtlCol="0">
+            <a:spAutoFit/>
+          </a:bodyPr>
+          <a:lstStyle/>
+          <a:p>
+            <a:r>
+              <a:rPr lang="en-US" altLang="ja-JP" sz="2400" b="1" dirty="0">
+                <a:solidFill>
+                  <a:srgbClr val="7030A0"/>
+                </a:solidFill>
+              </a:rPr>
+              <a:t>Y</a:t>
+            </a:r>
+            <a:r>
+              <a:rPr lang="ja-JP" altLang="en-US" sz="2400" b="1" dirty="0">
+                <a:solidFill>
+                  <a:srgbClr val="7030A0"/>
+                </a:solidFill>
+              </a:rPr>
+              <a:t>軸（縦軸）に移動する</a:t>
+            </a:r>
+            <a:endParaRPr lang="en-US" altLang="ja-JP" sz="2400" b="1" dirty="0">
+              <a:solidFill>
+                <a:srgbClr val="7030A0"/>
+              </a:solidFill>
+            </a:endParaRPr>
+          </a:p>
+        </p:txBody>
+      </p:sp>
+      <p:sp>
+        <p:nvSpPr>
+          <p:cNvPr id="9" name="テキスト ボックス 8">
+            <a:extLst>
+              <a:ext uri="{FF2B5EF4-FFF2-40B4-BE49-F238E27FC236}">
+                <a16:creationId xmlns:a16="http://schemas.microsoft.com/office/drawing/2014/main" id="{C6B4C171-AA5F-4E9C-A45B-52BDC18F6A4B}"/>
+              </a:ext>
+            </a:extLst>
+          </p:cNvPr>
+          <p:cNvSpPr txBox="1"/>
+          <p:nvPr/>
+        </p:nvSpPr>
+        <p:spPr>
+          <a:xfrm>
+            <a:off x="567542" y="3775245"/>
+            <a:ext cx="7471917" cy="1569660"/>
+          </a:xfrm>
+          <a:prstGeom prst="rect">
+            <a:avLst/>
+          </a:prstGeom>
+          <a:noFill/>
+        </p:spPr>
+        <p:txBody>
+          <a:bodyPr wrap="none" rtlCol="0">
+            <a:spAutoFit/>
+          </a:bodyPr>
+          <a:lstStyle/>
+          <a:p>
+            <a:r>
               <a:rPr lang="ja-JP" altLang="en-US" sz="2400" dirty="0"/>
-              <a:t>これを繰り返しながら、一緒にゲームを完成させていきましょう。</a:t>
+              <a:t>このようにプログラミングとは、</a:t>
             </a:r>
             <a:endParaRPr lang="en-US" altLang="ja-JP" sz="2400" dirty="0"/>
+          </a:p>
+          <a:p>
+            <a:r>
+              <a:rPr lang="ja-JP" altLang="en-US" sz="2400" b="1" dirty="0">
+                <a:solidFill>
+                  <a:srgbClr val="FF0000"/>
+                </a:solidFill>
+              </a:rPr>
+              <a:t>やりたいことをルールに則って書いていきます。</a:t>
+            </a:r>
+            <a:endParaRPr lang="en-US" altLang="ja-JP" sz="2400" b="1" dirty="0">
+              <a:solidFill>
+                <a:srgbClr val="FF0000"/>
+              </a:solidFill>
+            </a:endParaRPr>
+          </a:p>
+          <a:p>
+            <a:endParaRPr lang="en-US" altLang="ja-JP" sz="2400" b="1" dirty="0">
+              <a:solidFill>
+                <a:srgbClr val="FF0000"/>
+              </a:solidFill>
+            </a:endParaRPr>
+          </a:p>
+          <a:p>
+            <a:r>
+              <a:rPr lang="ja-JP" altLang="en-US" sz="2400" dirty="0"/>
+              <a:t>書き終わったら、</a:t>
+            </a:r>
+            <a:r>
+              <a:rPr lang="en-US" altLang="ja-JP" sz="2400" b="1" dirty="0">
+                <a:solidFill>
+                  <a:srgbClr val="FF0000"/>
+                </a:solidFill>
+              </a:rPr>
+              <a:t>CTRL + S</a:t>
+            </a:r>
+            <a:r>
+              <a:rPr lang="ja-JP" altLang="en-US" sz="2400" b="1" dirty="0">
+                <a:solidFill>
+                  <a:srgbClr val="FF0000"/>
+                </a:solidFill>
+              </a:rPr>
+              <a:t>キーで保存</a:t>
+            </a:r>
+            <a:r>
+              <a:rPr lang="ja-JP" altLang="en-US" sz="2400" dirty="0"/>
+              <a:t>しましょう。</a:t>
+            </a:r>
+            <a:endParaRPr lang="en-US" altLang="ja-JP" sz="2400" b="1" dirty="0">
+              <a:solidFill>
+                <a:srgbClr val="FF0000"/>
+              </a:solidFill>
+            </a:endParaRPr>
           </a:p>
         </p:txBody>
       </p:sp>
     </p:spTree>
     <p:extLst>
       <p:ext uri="{BB962C8B-B14F-4D97-AF65-F5344CB8AC3E}">
-        <p14:creationId xmlns:p14="http://schemas.microsoft.com/office/powerpoint/2010/main" val="1126555491"/>
+        <p14:creationId xmlns:p14="http://schemas.microsoft.com/office/powerpoint/2010/main" val="3616531251"/>
       </p:ext>
     </p:extLst>
   </p:cSld>
@@ -4083,7 +4168,7 @@
         <p:spPr>
           <a:xfrm>
             <a:off x="567542" y="1216429"/>
-            <a:ext cx="7571303" cy="461665"/>
+            <a:ext cx="9417963" cy="830997"/>
           </a:xfrm>
           <a:prstGeom prst="rect">
             <a:avLst/>
@@ -4097,8 +4182,19 @@
           <a:lstStyle/>
           <a:p>
             <a:r>
+              <a:rPr lang="en-US" altLang="ja-JP" sz="2400" dirty="0"/>
+              <a:t>Unity</a:t>
+            </a:r>
+            <a:r>
               <a:rPr lang="ja-JP" altLang="en-US" sz="2400" dirty="0"/>
-              <a:t>続けてほかの移動方向もプログラミングしましょう。</a:t>
+              <a:t>の画面に戻ってゲームを実行しましょう。</a:t>
+            </a:r>
+            <a:endParaRPr lang="en-US" altLang="ja-JP" sz="2400" dirty="0"/>
+          </a:p>
+          <a:p>
+            <a:r>
+              <a:rPr lang="ja-JP" altLang="en-US" sz="2400" dirty="0"/>
+              <a:t>上キーを押すと、機体が上に移動するようになっているはずです。</a:t>
             </a:r>
             <a:endParaRPr lang="en-US" altLang="ja-JP" sz="2400" dirty="0"/>
           </a:p>
@@ -4106,10 +4202,10 @@
       </p:sp>
       <p:pic>
         <p:nvPicPr>
-          <p:cNvPr id="3" name="図 2">
-            <a:extLst>
-              <a:ext uri="{FF2B5EF4-FFF2-40B4-BE49-F238E27FC236}">
-                <a16:creationId xmlns:a16="http://schemas.microsoft.com/office/drawing/2014/main" id="{D3AAD260-DA30-4414-967E-4912FA4B299C}"/>
+          <p:cNvPr id="10" name="図 9">
+            <a:extLst>
+              <a:ext uri="{FF2B5EF4-FFF2-40B4-BE49-F238E27FC236}">
+                <a16:creationId xmlns:a16="http://schemas.microsoft.com/office/drawing/2014/main" id="{2D4E479B-7120-48BB-8CD6-B398F0901E6F}"/>
               </a:ext>
             </a:extLst>
           </p:cNvPr>
@@ -4126,8 +4222,8 @@
         </p:blipFill>
         <p:spPr>
           <a:xfrm>
-            <a:off x="567542" y="1817794"/>
-            <a:ext cx="5782482" cy="4067743"/>
+            <a:off x="567542" y="2187127"/>
+            <a:ext cx="8923591" cy="3805292"/>
           </a:xfrm>
           <a:prstGeom prst="rect">
             <a:avLst/>
@@ -4136,10 +4232,10 @@
       </p:pic>
       <p:sp>
         <p:nvSpPr>
-          <p:cNvPr id="5" name="正方形/長方形 4">
-            <a:extLst>
-              <a:ext uri="{FF2B5EF4-FFF2-40B4-BE49-F238E27FC236}">
-                <a16:creationId xmlns:a16="http://schemas.microsoft.com/office/drawing/2014/main" id="{4ED5C020-E651-4908-BC16-24299871799F}"/>
+          <p:cNvPr id="11" name="矢印: 右 10">
+            <a:extLst>
+              <a:ext uri="{FF2B5EF4-FFF2-40B4-BE49-F238E27FC236}">
+                <a16:creationId xmlns:a16="http://schemas.microsoft.com/office/drawing/2014/main" id="{EFFE8A12-7CDA-4139-A07D-FC2F1886D1CD}"/>
               </a:ext>
             </a:extLst>
           </p:cNvPr>
@@ -4147,17 +4243,19 @@
           <p:nvPr/>
         </p:nvSpPr>
         <p:spPr>
-          <a:xfrm>
-            <a:off x="2328333" y="2946400"/>
-            <a:ext cx="4241800" cy="3048000"/>
-          </a:xfrm>
-          <a:prstGeom prst="rect">
-            <a:avLst/>
-          </a:prstGeom>
-          <a:noFill/>
-          <a:ln w="38100">
+          <a:xfrm rot="13245323">
+            <a:off x="6578186" y="2547838"/>
+            <a:ext cx="660400" cy="502574"/>
+          </a:xfrm>
+          <a:prstGeom prst="rightArrow">
+            <a:avLst/>
+          </a:prstGeom>
+          <a:solidFill>
+            <a:srgbClr val="FF0000"/>
+          </a:solidFill>
+          <a:ln>
             <a:solidFill>
-              <a:srgbClr val="FF0000"/>
+              <a:schemeClr val="tx1"/>
             </a:solidFill>
           </a:ln>
         </p:spPr>
@@ -4188,10 +4286,10 @@
       </p:sp>
       <p:sp>
         <p:nvSpPr>
-          <p:cNvPr id="13" name="テキスト ボックス 12">
-            <a:extLst>
-              <a:ext uri="{FF2B5EF4-FFF2-40B4-BE49-F238E27FC236}">
-                <a16:creationId xmlns:a16="http://schemas.microsoft.com/office/drawing/2014/main" id="{88CB7038-171E-41F5-A1A2-111BF49D82D8}"/>
+          <p:cNvPr id="12" name="テキスト ボックス 11">
+            <a:extLst>
+              <a:ext uri="{FF2B5EF4-FFF2-40B4-BE49-F238E27FC236}">
+                <a16:creationId xmlns:a16="http://schemas.microsoft.com/office/drawing/2014/main" id="{78F93749-84E8-45DA-8993-541ACF3C8D3E}"/>
               </a:ext>
             </a:extLst>
           </p:cNvPr>
@@ -4200,8 +4298,8 @@
         </p:nvSpPr>
         <p:spPr>
           <a:xfrm>
-            <a:off x="567541" y="6135213"/>
-            <a:ext cx="8802410" cy="461665"/>
+            <a:off x="567542" y="6132120"/>
+            <a:ext cx="9417963" cy="461665"/>
           </a:xfrm>
           <a:prstGeom prst="rect">
             <a:avLst/>
@@ -4215,25 +4313,17 @@
           <a:lstStyle/>
           <a:p>
             <a:r>
-              <a:rPr lang="ja-JP" altLang="en-US" sz="2400" b="1" dirty="0">
-                <a:solidFill>
-                  <a:srgbClr val="00B050"/>
-                </a:solidFill>
-              </a:rPr>
-              <a:t>コピー＆ペーストを上手に使うと、早く書くことができます。</a:t>
-            </a:r>
-            <a:endParaRPr lang="en-US" altLang="ja-JP" sz="2400" b="1" dirty="0">
-              <a:solidFill>
-                <a:srgbClr val="00B050"/>
-              </a:solidFill>
-            </a:endParaRPr>
+              <a:rPr lang="ja-JP" altLang="en-US" sz="2400" dirty="0"/>
+              <a:t>これを繰り返しながら、一緒にゲームを完成させていきましょう。</a:t>
+            </a:r>
+            <a:endParaRPr lang="en-US" altLang="ja-JP" sz="2400" dirty="0"/>
           </a:p>
         </p:txBody>
       </p:sp>
     </p:spTree>
     <p:extLst>
       <p:ext uri="{BB962C8B-B14F-4D97-AF65-F5344CB8AC3E}">
-        <p14:creationId xmlns:p14="http://schemas.microsoft.com/office/powerpoint/2010/main" val="1192386086"/>
+        <p14:creationId xmlns:p14="http://schemas.microsoft.com/office/powerpoint/2010/main" val="1126555491"/>
       </p:ext>
     </p:extLst>
   </p:cSld>
@@ -4310,7 +4400,7 @@
         <p:spPr>
           <a:xfrm>
             <a:off x="567542" y="1216429"/>
-            <a:ext cx="8802410" cy="461665"/>
+            <a:ext cx="7571303" cy="461665"/>
           </a:xfrm>
           <a:prstGeom prst="rect">
             <a:avLst/>
@@ -4324,16 +4414,8 @@
           <a:lstStyle/>
           <a:p>
             <a:r>
-              <a:rPr lang="ja-JP" altLang="en-US" sz="2400" b="1" dirty="0">
-                <a:solidFill>
-                  <a:srgbClr val="FF0000"/>
-                </a:solidFill>
-              </a:rPr>
-              <a:t>書き終わったらプログラムを保存</a:t>
-            </a:r>
-            <a:r>
               <a:rPr lang="ja-JP" altLang="en-US" sz="2400" dirty="0"/>
-              <a:t>して、動作確認しましょう。</a:t>
+              <a:t>続けてほかの移動方向もプログラミングしましょう。</a:t>
             </a:r>
             <a:endParaRPr lang="en-US" altLang="ja-JP" sz="2400" dirty="0"/>
           </a:p>
@@ -4341,10 +4423,10 @@
       </p:sp>
       <p:pic>
         <p:nvPicPr>
-          <p:cNvPr id="10" name="図 9">
-            <a:extLst>
-              <a:ext uri="{FF2B5EF4-FFF2-40B4-BE49-F238E27FC236}">
-                <a16:creationId xmlns:a16="http://schemas.microsoft.com/office/drawing/2014/main" id="{2D4E479B-7120-48BB-8CD6-B398F0901E6F}"/>
+          <p:cNvPr id="3" name="図 2">
+            <a:extLst>
+              <a:ext uri="{FF2B5EF4-FFF2-40B4-BE49-F238E27FC236}">
+                <a16:creationId xmlns:a16="http://schemas.microsoft.com/office/drawing/2014/main" id="{D3AAD260-DA30-4414-967E-4912FA4B299C}"/>
               </a:ext>
             </a:extLst>
           </p:cNvPr>
@@ -4361,8 +4443,8 @@
         </p:blipFill>
         <p:spPr>
           <a:xfrm>
-            <a:off x="567542" y="2187127"/>
-            <a:ext cx="8923591" cy="3805292"/>
+            <a:off x="567542" y="1817794"/>
+            <a:ext cx="5782482" cy="4067743"/>
           </a:xfrm>
           <a:prstGeom prst="rect">
             <a:avLst/>
@@ -4371,10 +4453,10 @@
       </p:pic>
       <p:sp>
         <p:nvSpPr>
-          <p:cNvPr id="11" name="矢印: 右 10">
-            <a:extLst>
-              <a:ext uri="{FF2B5EF4-FFF2-40B4-BE49-F238E27FC236}">
-                <a16:creationId xmlns:a16="http://schemas.microsoft.com/office/drawing/2014/main" id="{EFFE8A12-7CDA-4139-A07D-FC2F1886D1CD}"/>
+          <p:cNvPr id="5" name="正方形/長方形 4">
+            <a:extLst>
+              <a:ext uri="{FF2B5EF4-FFF2-40B4-BE49-F238E27FC236}">
+                <a16:creationId xmlns:a16="http://schemas.microsoft.com/office/drawing/2014/main" id="{4ED5C020-E651-4908-BC16-24299871799F}"/>
               </a:ext>
             </a:extLst>
           </p:cNvPr>
@@ -4382,19 +4464,17 @@
           <p:nvPr/>
         </p:nvSpPr>
         <p:spPr>
-          <a:xfrm rot="13245323">
-            <a:off x="6578186" y="2547838"/>
-            <a:ext cx="660400" cy="502574"/>
-          </a:xfrm>
-          <a:prstGeom prst="rightArrow">
-            <a:avLst/>
-          </a:prstGeom>
-          <a:solidFill>
-            <a:srgbClr val="FF0000"/>
-          </a:solidFill>
-          <a:ln>
+          <a:xfrm>
+            <a:off x="2328333" y="2946400"/>
+            <a:ext cx="4241800" cy="3048000"/>
+          </a:xfrm>
+          <a:prstGeom prst="rect">
+            <a:avLst/>
+          </a:prstGeom>
+          <a:noFill/>
+          <a:ln w="38100">
             <a:solidFill>
-              <a:schemeClr val="tx1"/>
+              <a:srgbClr val="FF0000"/>
             </a:solidFill>
           </a:ln>
         </p:spPr>
@@ -4425,10 +4505,10 @@
       </p:sp>
       <p:sp>
         <p:nvSpPr>
-          <p:cNvPr id="12" name="テキスト ボックス 11">
-            <a:extLst>
-              <a:ext uri="{FF2B5EF4-FFF2-40B4-BE49-F238E27FC236}">
-                <a16:creationId xmlns:a16="http://schemas.microsoft.com/office/drawing/2014/main" id="{78F93749-84E8-45DA-8993-541ACF3C8D3E}"/>
+          <p:cNvPr id="13" name="テキスト ボックス 12">
+            <a:extLst>
+              <a:ext uri="{FF2B5EF4-FFF2-40B4-BE49-F238E27FC236}">
+                <a16:creationId xmlns:a16="http://schemas.microsoft.com/office/drawing/2014/main" id="{88CB7038-171E-41F5-A1A2-111BF49D82D8}"/>
               </a:ext>
             </a:extLst>
           </p:cNvPr>
@@ -4437,8 +4517,8 @@
         </p:nvSpPr>
         <p:spPr>
           <a:xfrm>
-            <a:off x="567542" y="6132120"/>
-            <a:ext cx="4932761" cy="461665"/>
+            <a:off x="567541" y="6135213"/>
+            <a:ext cx="8802410" cy="461665"/>
           </a:xfrm>
           <a:prstGeom prst="rect">
             <a:avLst/>
@@ -4452,25 +4532,25 @@
           <a:lstStyle/>
           <a:p>
             <a:r>
-              <a:rPr lang="ja-JP" altLang="en-US" sz="2400" dirty="0"/>
-              <a:t>上下左右に移動できれば</a:t>
-            </a:r>
-            <a:r>
-              <a:rPr lang="en-US" altLang="ja-JP" sz="2400" dirty="0"/>
-              <a:t>OK</a:t>
-            </a:r>
-            <a:r>
-              <a:rPr lang="ja-JP" altLang="en-US" sz="2400" dirty="0"/>
-              <a:t>です！</a:t>
-            </a:r>
-            <a:endParaRPr lang="en-US" altLang="ja-JP" sz="2400" dirty="0"/>
+              <a:rPr lang="ja-JP" altLang="en-US" sz="2400" b="1" dirty="0">
+                <a:solidFill>
+                  <a:srgbClr val="00B050"/>
+                </a:solidFill>
+              </a:rPr>
+              <a:t>コピー＆ペーストを上手に使うと、早く書くことができます。</a:t>
+            </a:r>
+            <a:endParaRPr lang="en-US" altLang="ja-JP" sz="2400" b="1" dirty="0">
+              <a:solidFill>
+                <a:srgbClr val="00B050"/>
+              </a:solidFill>
+            </a:endParaRPr>
           </a:p>
         </p:txBody>
       </p:sp>
     </p:spTree>
     <p:extLst>
       <p:ext uri="{BB962C8B-B14F-4D97-AF65-F5344CB8AC3E}">
-        <p14:creationId xmlns:p14="http://schemas.microsoft.com/office/powerpoint/2010/main" val="2730967313"/>
+        <p14:creationId xmlns:p14="http://schemas.microsoft.com/office/powerpoint/2010/main" val="1192386086"/>
       </p:ext>
     </p:extLst>
   </p:cSld>
@@ -4547,7 +4627,7 @@
         <p:spPr>
           <a:xfrm>
             <a:off x="567542" y="1216429"/>
-            <a:ext cx="6838732" cy="461665"/>
+            <a:ext cx="8802410" cy="461665"/>
           </a:xfrm>
           <a:prstGeom prst="rect">
             <a:avLst/>
@@ -4561,16 +4641,16 @@
           <a:lstStyle/>
           <a:p>
             <a:r>
+              <a:rPr lang="ja-JP" altLang="en-US" sz="2400" b="1" dirty="0">
+                <a:solidFill>
+                  <a:srgbClr val="FF0000"/>
+                </a:solidFill>
+              </a:rPr>
+              <a:t>書き終わったらプログラムを保存</a:t>
+            </a:r>
+            <a:r>
               <a:rPr lang="ja-JP" altLang="en-US" sz="2400" dirty="0"/>
-              <a:t>次に</a:t>
-            </a:r>
-            <a:r>
-              <a:rPr lang="en-US" altLang="ja-JP" sz="2400" dirty="0"/>
-              <a:t>Z</a:t>
-            </a:r>
-            <a:r>
-              <a:rPr lang="ja-JP" altLang="en-US" sz="2400" dirty="0"/>
-              <a:t>キーで弾丸を発射するようにしましょう。</a:t>
+              <a:t>して、動作確認しましょう。</a:t>
             </a:r>
             <a:endParaRPr lang="en-US" altLang="ja-JP" sz="2400" dirty="0"/>
           </a:p>
@@ -4578,10 +4658,10 @@
       </p:sp>
       <p:pic>
         <p:nvPicPr>
-          <p:cNvPr id="7" name="図 6">
-            <a:extLst>
-              <a:ext uri="{FF2B5EF4-FFF2-40B4-BE49-F238E27FC236}">
-                <a16:creationId xmlns:a16="http://schemas.microsoft.com/office/drawing/2014/main" id="{2FCA29D9-6713-4924-B449-DD86B6F57567}"/>
+          <p:cNvPr id="10" name="図 9">
+            <a:extLst>
+              <a:ext uri="{FF2B5EF4-FFF2-40B4-BE49-F238E27FC236}">
+                <a16:creationId xmlns:a16="http://schemas.microsoft.com/office/drawing/2014/main" id="{2D4E479B-7120-48BB-8CD6-B398F0901E6F}"/>
               </a:ext>
             </a:extLst>
           </p:cNvPr>
@@ -4598,8 +4678,8 @@
         </p:blipFill>
         <p:spPr>
           <a:xfrm>
-            <a:off x="567542" y="1817794"/>
-            <a:ext cx="8526065" cy="4467849"/>
+            <a:off x="567542" y="2187127"/>
+            <a:ext cx="8923591" cy="3805292"/>
           </a:xfrm>
           <a:prstGeom prst="rect">
             <a:avLst/>
@@ -4608,10 +4688,10 @@
       </p:pic>
       <p:sp>
         <p:nvSpPr>
-          <p:cNvPr id="9" name="正方形/長方形 8">
-            <a:extLst>
-              <a:ext uri="{FF2B5EF4-FFF2-40B4-BE49-F238E27FC236}">
-                <a16:creationId xmlns:a16="http://schemas.microsoft.com/office/drawing/2014/main" id="{3A95A58F-16D8-43D6-A399-786B33F74222}"/>
+          <p:cNvPr id="11" name="矢印: 右 10">
+            <a:extLst>
+              <a:ext uri="{FF2B5EF4-FFF2-40B4-BE49-F238E27FC236}">
+                <a16:creationId xmlns:a16="http://schemas.microsoft.com/office/drawing/2014/main" id="{EFFE8A12-7CDA-4139-A07D-FC2F1886D1CD}"/>
               </a:ext>
             </a:extLst>
           </p:cNvPr>
@@ -4619,17 +4699,19 @@
           <p:nvPr/>
         </p:nvSpPr>
         <p:spPr>
-          <a:xfrm>
-            <a:off x="2489200" y="2379133"/>
-            <a:ext cx="3187434" cy="567267"/>
-          </a:xfrm>
-          <a:prstGeom prst="rect">
-            <a:avLst/>
-          </a:prstGeom>
-          <a:noFill/>
-          <a:ln w="38100">
+          <a:xfrm rot="13245323">
+            <a:off x="6578186" y="2547838"/>
+            <a:ext cx="660400" cy="502574"/>
+          </a:xfrm>
+          <a:prstGeom prst="rightArrow">
+            <a:avLst/>
+          </a:prstGeom>
+          <a:solidFill>
+            <a:srgbClr val="FF0000"/>
+          </a:solidFill>
+          <a:ln>
             <a:solidFill>
-              <a:srgbClr val="FF0000"/>
+              <a:schemeClr val="tx1"/>
             </a:solidFill>
           </a:ln>
         </p:spPr>
@@ -4660,10 +4742,10 @@
       </p:sp>
       <p:sp>
         <p:nvSpPr>
-          <p:cNvPr id="10" name="テキスト ボックス 9">
-            <a:extLst>
-              <a:ext uri="{FF2B5EF4-FFF2-40B4-BE49-F238E27FC236}">
-                <a16:creationId xmlns:a16="http://schemas.microsoft.com/office/drawing/2014/main" id="{065CE1EC-2582-4B4E-8D22-E8C723E9807D}"/>
+          <p:cNvPr id="12" name="テキスト ボックス 11">
+            <a:extLst>
+              <a:ext uri="{FF2B5EF4-FFF2-40B4-BE49-F238E27FC236}">
+                <a16:creationId xmlns:a16="http://schemas.microsoft.com/office/drawing/2014/main" id="{78F93749-84E8-45DA-8993-541ACF3C8D3E}"/>
               </a:ext>
             </a:extLst>
           </p:cNvPr>
@@ -4672,8 +4754,8 @@
         </p:nvSpPr>
         <p:spPr>
           <a:xfrm>
-            <a:off x="5676633" y="2515518"/>
-            <a:ext cx="3877985" cy="461665"/>
+            <a:off x="567542" y="6132120"/>
+            <a:ext cx="4932761" cy="461665"/>
           </a:xfrm>
           <a:prstGeom prst="rect">
             <a:avLst/>
@@ -4687,121 +4769,25 @@
           <a:lstStyle/>
           <a:p>
             <a:r>
-              <a:rPr lang="ja-JP" altLang="en-US" sz="2400" b="1" dirty="0">
-                <a:solidFill>
-                  <a:srgbClr val="7030A0"/>
-                </a:solidFill>
-              </a:rPr>
-              <a:t>カッコの中を書き換えてね</a:t>
-            </a:r>
-            <a:endParaRPr lang="en-US" altLang="ja-JP" sz="2400" b="1" dirty="0">
-              <a:solidFill>
-                <a:srgbClr val="7030A0"/>
-              </a:solidFill>
-            </a:endParaRPr>
-          </a:p>
-        </p:txBody>
-      </p:sp>
-      <p:sp>
-        <p:nvSpPr>
-          <p:cNvPr id="11" name="正方形/長方形 10">
-            <a:extLst>
-              <a:ext uri="{FF2B5EF4-FFF2-40B4-BE49-F238E27FC236}">
-                <a16:creationId xmlns:a16="http://schemas.microsoft.com/office/drawing/2014/main" id="{A73313C0-10C7-4F45-9244-DA76370A59B2}"/>
-              </a:ext>
-            </a:extLst>
-          </p:cNvPr>
-          <p:cNvSpPr/>
-          <p:nvPr/>
-        </p:nvSpPr>
-        <p:spPr>
-          <a:xfrm>
-            <a:off x="3327399" y="4033362"/>
-            <a:ext cx="5766207" cy="674105"/>
-          </a:xfrm>
-          <a:prstGeom prst="rect">
-            <a:avLst/>
-          </a:prstGeom>
-          <a:noFill/>
-          <a:ln w="38100">
-            <a:solidFill>
-              <a:srgbClr val="FF0000"/>
-            </a:solidFill>
-          </a:ln>
-        </p:spPr>
-        <p:style>
-          <a:lnRef idx="2">
-            <a:schemeClr val="accent1">
-              <a:shade val="50000"/>
-            </a:schemeClr>
-          </a:lnRef>
-          <a:fillRef idx="1">
-            <a:schemeClr val="accent1"/>
-          </a:fillRef>
-          <a:effectRef idx="0">
-            <a:schemeClr val="accent1"/>
-          </a:effectRef>
-          <a:fontRef idx="minor">
-            <a:schemeClr val="lt1"/>
-          </a:fontRef>
-        </p:style>
-        <p:txBody>
-          <a:bodyPr rtlCol="0" anchor="ctr"/>
-          <a:lstStyle/>
-          <a:p>
-            <a:pPr algn="ctr"/>
-            <a:endParaRPr kumimoji="1" lang="ja-JP" altLang="en-US"/>
-          </a:p>
-        </p:txBody>
-      </p:sp>
-      <p:sp>
-        <p:nvSpPr>
-          <p:cNvPr id="12" name="テキスト ボックス 11">
-            <a:extLst>
-              <a:ext uri="{FF2B5EF4-FFF2-40B4-BE49-F238E27FC236}">
-                <a16:creationId xmlns:a16="http://schemas.microsoft.com/office/drawing/2014/main" id="{DC461318-83DA-4191-91CB-44E40524FBF7}"/>
-              </a:ext>
-            </a:extLst>
-          </p:cNvPr>
-          <p:cNvSpPr txBox="1"/>
-          <p:nvPr/>
-        </p:nvSpPr>
-        <p:spPr>
-          <a:xfrm>
-            <a:off x="509663" y="6352067"/>
-            <a:ext cx="7263527" cy="461665"/>
-          </a:xfrm>
-          <a:prstGeom prst="rect">
-            <a:avLst/>
-          </a:prstGeom>
-          <a:noFill/>
-        </p:spPr>
-        <p:txBody>
-          <a:bodyPr wrap="none" rtlCol="0">
-            <a:spAutoFit/>
-          </a:bodyPr>
-          <a:lstStyle/>
-          <a:p>
-            <a:r>
-              <a:rPr lang="ja-JP" altLang="en-US" sz="2400" b="1" dirty="0">
-                <a:solidFill>
-                  <a:srgbClr val="FF0000"/>
-                </a:solidFill>
-              </a:rPr>
-              <a:t>書き終わったら、保存して動作確認しましょう！！</a:t>
-            </a:r>
-            <a:endParaRPr lang="en-US" altLang="ja-JP" sz="2400" b="1" dirty="0">
-              <a:solidFill>
-                <a:srgbClr val="FF0000"/>
-              </a:solidFill>
-            </a:endParaRPr>
+              <a:rPr lang="ja-JP" altLang="en-US" sz="2400" dirty="0"/>
+              <a:t>上下左右に移動できれば</a:t>
+            </a:r>
+            <a:r>
+              <a:rPr lang="en-US" altLang="ja-JP" sz="2400" dirty="0"/>
+              <a:t>OK</a:t>
+            </a:r>
+            <a:r>
+              <a:rPr lang="ja-JP" altLang="en-US" sz="2400" dirty="0"/>
+              <a:t>です！</a:t>
+            </a:r>
+            <a:endParaRPr lang="en-US" altLang="ja-JP" sz="2400" dirty="0"/>
           </a:p>
         </p:txBody>
       </p:sp>
     </p:spTree>
     <p:extLst>
       <p:ext uri="{BB962C8B-B14F-4D97-AF65-F5344CB8AC3E}">
-        <p14:creationId xmlns:p14="http://schemas.microsoft.com/office/powerpoint/2010/main" val="2353136013"/>
+        <p14:creationId xmlns:p14="http://schemas.microsoft.com/office/powerpoint/2010/main" val="2730967313"/>
       </p:ext>
     </p:extLst>
   </p:cSld>
@@ -4878,7 +4864,7 @@
         <p:spPr>
           <a:xfrm>
             <a:off x="567542" y="1216429"/>
-            <a:ext cx="11699036" cy="830997"/>
+            <a:ext cx="6838732" cy="461665"/>
           </a:xfrm>
           <a:prstGeom prst="rect">
             <a:avLst/>
@@ -4893,26 +4879,15 @@
           <a:p>
             <a:r>
               <a:rPr lang="ja-JP" altLang="en-US" sz="2400" dirty="0"/>
-              <a:t>まだ弾丸が敵に当たりません。</a:t>
-            </a:r>
-            <a:endParaRPr lang="en-US" altLang="ja-JP" sz="2400" dirty="0"/>
-          </a:p>
-          <a:p>
+              <a:t>次に</a:t>
+            </a:r>
+            <a:r>
+              <a:rPr lang="en-US" altLang="ja-JP" sz="2400" dirty="0"/>
+              <a:t>Z</a:t>
+            </a:r>
             <a:r>
               <a:rPr lang="ja-JP" altLang="en-US" sz="2400" dirty="0"/>
-              <a:t>敵のプログラムである</a:t>
-            </a:r>
-            <a:r>
-              <a:rPr lang="en-US" altLang="ja-JP" sz="2400" b="1" dirty="0" err="1">
-                <a:solidFill>
-                  <a:srgbClr val="FF0000"/>
-                </a:solidFill>
-              </a:rPr>
-              <a:t>EnemyBase</a:t>
-            </a:r>
-            <a:r>
-              <a:rPr lang="ja-JP" altLang="en-US" sz="2400" dirty="0"/>
-              <a:t>を開いて、当たり判定のプログラムを書きます。</a:t>
+              <a:t>キーで弾丸を発射するようにしましょう。</a:t>
             </a:r>
             <a:endParaRPr lang="en-US" altLang="ja-JP" sz="2400" dirty="0"/>
           </a:p>
@@ -4920,10 +4895,10 @@
       </p:sp>
       <p:pic>
         <p:nvPicPr>
-          <p:cNvPr id="3" name="図 2">
-            <a:extLst>
-              <a:ext uri="{FF2B5EF4-FFF2-40B4-BE49-F238E27FC236}">
-                <a16:creationId xmlns:a16="http://schemas.microsoft.com/office/drawing/2014/main" id="{FEDD0D4F-376B-4A16-9787-3AE1A8EF3841}"/>
+          <p:cNvPr id="7" name="図 6">
+            <a:extLst>
+              <a:ext uri="{FF2B5EF4-FFF2-40B4-BE49-F238E27FC236}">
+                <a16:creationId xmlns:a16="http://schemas.microsoft.com/office/drawing/2014/main" id="{2FCA29D9-6713-4924-B449-DD86B6F57567}"/>
               </a:ext>
             </a:extLst>
           </p:cNvPr>
@@ -4940,8 +4915,8 @@
         </p:blipFill>
         <p:spPr>
           <a:xfrm>
-            <a:off x="567542" y="2187126"/>
-            <a:ext cx="4448796" cy="3581900"/>
+            <a:off x="567542" y="1817794"/>
+            <a:ext cx="8526065" cy="4467849"/>
           </a:xfrm>
           <a:prstGeom prst="rect">
             <a:avLst/>
@@ -4950,10 +4925,10 @@
       </p:pic>
       <p:sp>
         <p:nvSpPr>
-          <p:cNvPr id="13" name="矢印: 右 12">
-            <a:extLst>
-              <a:ext uri="{FF2B5EF4-FFF2-40B4-BE49-F238E27FC236}">
-                <a16:creationId xmlns:a16="http://schemas.microsoft.com/office/drawing/2014/main" id="{CB1572C1-3DF8-42EE-8A1B-4EBB7DE73787}"/>
+          <p:cNvPr id="9" name="正方形/長方形 8">
+            <a:extLst>
+              <a:ext uri="{FF2B5EF4-FFF2-40B4-BE49-F238E27FC236}">
+                <a16:creationId xmlns:a16="http://schemas.microsoft.com/office/drawing/2014/main" id="{3A95A58F-16D8-43D6-A399-786B33F74222}"/>
               </a:ext>
             </a:extLst>
           </p:cNvPr>
@@ -4961,19 +4936,17 @@
           <p:nvPr/>
         </p:nvSpPr>
         <p:spPr>
-          <a:xfrm rot="13245323">
-            <a:off x="1540519" y="4132704"/>
-            <a:ext cx="660400" cy="502574"/>
-          </a:xfrm>
-          <a:prstGeom prst="rightArrow">
-            <a:avLst/>
-          </a:prstGeom>
-          <a:solidFill>
-            <a:srgbClr val="FF0000"/>
-          </a:solidFill>
-          <a:ln>
+          <a:xfrm>
+            <a:off x="2489200" y="2379133"/>
+            <a:ext cx="3187434" cy="567267"/>
+          </a:xfrm>
+          <a:prstGeom prst="rect">
+            <a:avLst/>
+          </a:prstGeom>
+          <a:noFill/>
+          <a:ln w="38100">
             <a:solidFill>
-              <a:schemeClr val="tx1"/>
+              <a:srgbClr val="FF0000"/>
             </a:solidFill>
           </a:ln>
         </p:spPr>
@@ -5004,10 +4977,54 @@
       </p:sp>
       <p:sp>
         <p:nvSpPr>
-          <p:cNvPr id="14" name="矢印: 右 13">
-            <a:extLst>
-              <a:ext uri="{FF2B5EF4-FFF2-40B4-BE49-F238E27FC236}">
-                <a16:creationId xmlns:a16="http://schemas.microsoft.com/office/drawing/2014/main" id="{B6419EDD-1330-4B7A-802B-84C6CD715E57}"/>
+          <p:cNvPr id="10" name="テキスト ボックス 9">
+            <a:extLst>
+              <a:ext uri="{FF2B5EF4-FFF2-40B4-BE49-F238E27FC236}">
+                <a16:creationId xmlns:a16="http://schemas.microsoft.com/office/drawing/2014/main" id="{065CE1EC-2582-4B4E-8D22-E8C723E9807D}"/>
+              </a:ext>
+            </a:extLst>
+          </p:cNvPr>
+          <p:cNvSpPr txBox="1"/>
+          <p:nvPr/>
+        </p:nvSpPr>
+        <p:spPr>
+          <a:xfrm>
+            <a:off x="5676633" y="2515518"/>
+            <a:ext cx="3877985" cy="461665"/>
+          </a:xfrm>
+          <a:prstGeom prst="rect">
+            <a:avLst/>
+          </a:prstGeom>
+          <a:noFill/>
+        </p:spPr>
+        <p:txBody>
+          <a:bodyPr wrap="none" rtlCol="0">
+            <a:spAutoFit/>
+          </a:bodyPr>
+          <a:lstStyle/>
+          <a:p>
+            <a:r>
+              <a:rPr lang="ja-JP" altLang="en-US" sz="2400" b="1" dirty="0">
+                <a:solidFill>
+                  <a:srgbClr val="7030A0"/>
+                </a:solidFill>
+              </a:rPr>
+              <a:t>カッコの中を書き換えてね</a:t>
+            </a:r>
+            <a:endParaRPr lang="en-US" altLang="ja-JP" sz="2400" b="1" dirty="0">
+              <a:solidFill>
+                <a:srgbClr val="7030A0"/>
+              </a:solidFill>
+            </a:endParaRPr>
+          </a:p>
+        </p:txBody>
+      </p:sp>
+      <p:sp>
+        <p:nvSpPr>
+          <p:cNvPr id="11" name="正方形/長方形 10">
+            <a:extLst>
+              <a:ext uri="{FF2B5EF4-FFF2-40B4-BE49-F238E27FC236}">
+                <a16:creationId xmlns:a16="http://schemas.microsoft.com/office/drawing/2014/main" id="{A73313C0-10C7-4F45-9244-DA76370A59B2}"/>
               </a:ext>
             </a:extLst>
           </p:cNvPr>
@@ -5015,19 +5032,17 @@
           <p:nvPr/>
         </p:nvSpPr>
         <p:spPr>
-          <a:xfrm rot="13245323">
-            <a:off x="2996786" y="3700130"/>
-            <a:ext cx="660400" cy="502574"/>
-          </a:xfrm>
-          <a:prstGeom prst="rightArrow">
-            <a:avLst/>
-          </a:prstGeom>
-          <a:solidFill>
-            <a:srgbClr val="FF0000"/>
-          </a:solidFill>
-          <a:ln>
+          <a:xfrm>
+            <a:off x="3327399" y="4033362"/>
+            <a:ext cx="5766207" cy="674105"/>
+          </a:xfrm>
+          <a:prstGeom prst="rect">
+            <a:avLst/>
+          </a:prstGeom>
+          <a:noFill/>
+          <a:ln w="38100">
             <a:solidFill>
-              <a:schemeClr val="tx1"/>
+              <a:srgbClr val="FF0000"/>
             </a:solidFill>
           </a:ln>
         </p:spPr>
@@ -5056,10 +5071,54 @@
           </a:p>
         </p:txBody>
       </p:sp>
+      <p:sp>
+        <p:nvSpPr>
+          <p:cNvPr id="12" name="テキスト ボックス 11">
+            <a:extLst>
+              <a:ext uri="{FF2B5EF4-FFF2-40B4-BE49-F238E27FC236}">
+                <a16:creationId xmlns:a16="http://schemas.microsoft.com/office/drawing/2014/main" id="{DC461318-83DA-4191-91CB-44E40524FBF7}"/>
+              </a:ext>
+            </a:extLst>
+          </p:cNvPr>
+          <p:cNvSpPr txBox="1"/>
+          <p:nvPr/>
+        </p:nvSpPr>
+        <p:spPr>
+          <a:xfrm>
+            <a:off x="509663" y="6352067"/>
+            <a:ext cx="7263527" cy="461665"/>
+          </a:xfrm>
+          <a:prstGeom prst="rect">
+            <a:avLst/>
+          </a:prstGeom>
+          <a:noFill/>
+        </p:spPr>
+        <p:txBody>
+          <a:bodyPr wrap="none" rtlCol="0">
+            <a:spAutoFit/>
+          </a:bodyPr>
+          <a:lstStyle/>
+          <a:p>
+            <a:r>
+              <a:rPr lang="ja-JP" altLang="en-US" sz="2400" b="1" dirty="0">
+                <a:solidFill>
+                  <a:srgbClr val="FF0000"/>
+                </a:solidFill>
+              </a:rPr>
+              <a:t>書き終わったら、保存して動作確認しましょう！！</a:t>
+            </a:r>
+            <a:endParaRPr lang="en-US" altLang="ja-JP" sz="2400" b="1" dirty="0">
+              <a:solidFill>
+                <a:srgbClr val="FF0000"/>
+              </a:solidFill>
+            </a:endParaRPr>
+          </a:p>
+        </p:txBody>
+      </p:sp>
     </p:spTree>
     <p:extLst>
       <p:ext uri="{BB962C8B-B14F-4D97-AF65-F5344CB8AC3E}">
-        <p14:creationId xmlns:p14="http://schemas.microsoft.com/office/powerpoint/2010/main" val="3648102116"/>
+        <p14:creationId xmlns:p14="http://schemas.microsoft.com/office/powerpoint/2010/main" val="2353136013"/>
       </p:ext>
     </p:extLst>
   </p:cSld>
@@ -5136,7 +5195,7 @@
         <p:spPr>
           <a:xfrm>
             <a:off x="567542" y="1216429"/>
-            <a:ext cx="4185761" cy="461665"/>
+            <a:ext cx="11699036" cy="830997"/>
           </a:xfrm>
           <a:prstGeom prst="rect">
             <a:avLst/>
@@ -5151,7 +5210,26 @@
           <a:p>
             <a:r>
               <a:rPr lang="ja-JP" altLang="en-US" sz="2400" dirty="0"/>
-              <a:t>画面を参考に書きましょう。</a:t>
+              <a:t>まだ弾丸が敵に当たりません。</a:t>
+            </a:r>
+            <a:endParaRPr lang="en-US" altLang="ja-JP" sz="2400" dirty="0"/>
+          </a:p>
+          <a:p>
+            <a:r>
+              <a:rPr lang="ja-JP" altLang="en-US" sz="2400" dirty="0"/>
+              <a:t>敵のプログラムである</a:t>
+            </a:r>
+            <a:r>
+              <a:rPr lang="en-US" altLang="ja-JP" sz="2400" b="1" dirty="0" err="1">
+                <a:solidFill>
+                  <a:srgbClr val="FF0000"/>
+                </a:solidFill>
+              </a:rPr>
+              <a:t>EnemyBase</a:t>
+            </a:r>
+            <a:r>
+              <a:rPr lang="ja-JP" altLang="en-US" sz="2400" dirty="0"/>
+              <a:t>を開いて、当たり判定のプログラムを書きます。</a:t>
             </a:r>
             <a:endParaRPr lang="en-US" altLang="ja-JP" sz="2400" dirty="0"/>
           </a:p>
@@ -5159,10 +5237,10 @@
       </p:sp>
       <p:pic>
         <p:nvPicPr>
-          <p:cNvPr id="5" name="図 4">
-            <a:extLst>
-              <a:ext uri="{FF2B5EF4-FFF2-40B4-BE49-F238E27FC236}">
-                <a16:creationId xmlns:a16="http://schemas.microsoft.com/office/drawing/2014/main" id="{0595925F-D2BA-4F2E-A1E9-6C273D87F388}"/>
+          <p:cNvPr id="3" name="図 2">
+            <a:extLst>
+              <a:ext uri="{FF2B5EF4-FFF2-40B4-BE49-F238E27FC236}">
+                <a16:creationId xmlns:a16="http://schemas.microsoft.com/office/drawing/2014/main" id="{FEDD0D4F-376B-4A16-9787-3AE1A8EF3841}"/>
               </a:ext>
             </a:extLst>
           </p:cNvPr>
@@ -5179,8 +5257,8 @@
         </p:blipFill>
         <p:spPr>
           <a:xfrm>
-            <a:off x="567542" y="1817794"/>
-            <a:ext cx="9342051" cy="3719406"/>
+            <a:off x="567542" y="2187126"/>
+            <a:ext cx="4448796" cy="3581900"/>
           </a:xfrm>
           <a:prstGeom prst="rect">
             <a:avLst/>
@@ -5189,52 +5267,116 @@
       </p:pic>
       <p:sp>
         <p:nvSpPr>
-          <p:cNvPr id="9" name="テキスト ボックス 8">
-            <a:extLst>
-              <a:ext uri="{FF2B5EF4-FFF2-40B4-BE49-F238E27FC236}">
-                <a16:creationId xmlns:a16="http://schemas.microsoft.com/office/drawing/2014/main" id="{A7FF3095-F698-4336-8498-0701D1303020}"/>
-              </a:ext>
-            </a:extLst>
-          </p:cNvPr>
-          <p:cNvSpPr txBox="1"/>
-          <p:nvPr/>
-        </p:nvSpPr>
-        <p:spPr>
-          <a:xfrm>
-            <a:off x="567541" y="5780194"/>
-            <a:ext cx="5416868" cy="461665"/>
-          </a:xfrm>
-          <a:prstGeom prst="rect">
-            <a:avLst/>
-          </a:prstGeom>
-          <a:noFill/>
-        </p:spPr>
-        <p:txBody>
-          <a:bodyPr wrap="none" rtlCol="0">
-            <a:spAutoFit/>
-          </a:bodyPr>
-          <a:lstStyle/>
-          <a:p>
-            <a:r>
-              <a:rPr lang="ja-JP" altLang="en-US" sz="2400" b="1" dirty="0">
-                <a:solidFill>
-                  <a:srgbClr val="FF0000"/>
-                </a:solidFill>
-              </a:rPr>
-              <a:t>書き終わったら保存して動作確認！！</a:t>
-            </a:r>
-            <a:endParaRPr lang="en-US" altLang="ja-JP" sz="2400" b="1" dirty="0">
-              <a:solidFill>
-                <a:srgbClr val="FF0000"/>
-              </a:solidFill>
-            </a:endParaRPr>
+          <p:cNvPr id="13" name="矢印: 右 12">
+            <a:extLst>
+              <a:ext uri="{FF2B5EF4-FFF2-40B4-BE49-F238E27FC236}">
+                <a16:creationId xmlns:a16="http://schemas.microsoft.com/office/drawing/2014/main" id="{CB1572C1-3DF8-42EE-8A1B-4EBB7DE73787}"/>
+              </a:ext>
+            </a:extLst>
+          </p:cNvPr>
+          <p:cNvSpPr/>
+          <p:nvPr/>
+        </p:nvSpPr>
+        <p:spPr>
+          <a:xfrm rot="13245323">
+            <a:off x="1540519" y="4132704"/>
+            <a:ext cx="660400" cy="502574"/>
+          </a:xfrm>
+          <a:prstGeom prst="rightArrow">
+            <a:avLst/>
+          </a:prstGeom>
+          <a:solidFill>
+            <a:srgbClr val="FF0000"/>
+          </a:solidFill>
+          <a:ln>
+            <a:solidFill>
+              <a:schemeClr val="tx1"/>
+            </a:solidFill>
+          </a:ln>
+        </p:spPr>
+        <p:style>
+          <a:lnRef idx="2">
+            <a:schemeClr val="accent1">
+              <a:shade val="50000"/>
+            </a:schemeClr>
+          </a:lnRef>
+          <a:fillRef idx="1">
+            <a:schemeClr val="accent1"/>
+          </a:fillRef>
+          <a:effectRef idx="0">
+            <a:schemeClr val="accent1"/>
+          </a:effectRef>
+          <a:fontRef idx="minor">
+            <a:schemeClr val="lt1"/>
+          </a:fontRef>
+        </p:style>
+        <p:txBody>
+          <a:bodyPr rtlCol="0" anchor="ctr"/>
+          <a:lstStyle/>
+          <a:p>
+            <a:pPr algn="ctr"/>
+            <a:endParaRPr kumimoji="1" lang="ja-JP" altLang="en-US"/>
+          </a:p>
+        </p:txBody>
+      </p:sp>
+      <p:sp>
+        <p:nvSpPr>
+          <p:cNvPr id="14" name="矢印: 右 13">
+            <a:extLst>
+              <a:ext uri="{FF2B5EF4-FFF2-40B4-BE49-F238E27FC236}">
+                <a16:creationId xmlns:a16="http://schemas.microsoft.com/office/drawing/2014/main" id="{B6419EDD-1330-4B7A-802B-84C6CD715E57}"/>
+              </a:ext>
+            </a:extLst>
+          </p:cNvPr>
+          <p:cNvSpPr/>
+          <p:nvPr/>
+        </p:nvSpPr>
+        <p:spPr>
+          <a:xfrm rot="13245323">
+            <a:off x="2996786" y="3700130"/>
+            <a:ext cx="660400" cy="502574"/>
+          </a:xfrm>
+          <a:prstGeom prst="rightArrow">
+            <a:avLst/>
+          </a:prstGeom>
+          <a:solidFill>
+            <a:srgbClr val="FF0000"/>
+          </a:solidFill>
+          <a:ln>
+            <a:solidFill>
+              <a:schemeClr val="tx1"/>
+            </a:solidFill>
+          </a:ln>
+        </p:spPr>
+        <p:style>
+          <a:lnRef idx="2">
+            <a:schemeClr val="accent1">
+              <a:shade val="50000"/>
+            </a:schemeClr>
+          </a:lnRef>
+          <a:fillRef idx="1">
+            <a:schemeClr val="accent1"/>
+          </a:fillRef>
+          <a:effectRef idx="0">
+            <a:schemeClr val="accent1"/>
+          </a:effectRef>
+          <a:fontRef idx="minor">
+            <a:schemeClr val="lt1"/>
+          </a:fontRef>
+        </p:style>
+        <p:txBody>
+          <a:bodyPr rtlCol="0" anchor="ctr"/>
+          <a:lstStyle/>
+          <a:p>
+            <a:pPr algn="ctr"/>
+            <a:endParaRPr kumimoji="1" lang="ja-JP" altLang="en-US"/>
           </a:p>
         </p:txBody>
       </p:sp>
     </p:spTree>
     <p:extLst>
       <p:ext uri="{BB962C8B-B14F-4D97-AF65-F5344CB8AC3E}">
-        <p14:creationId xmlns:p14="http://schemas.microsoft.com/office/powerpoint/2010/main" val="1383001495"/>
+        <p14:creationId xmlns:p14="http://schemas.microsoft.com/office/powerpoint/2010/main" val="3648102116"/>
       </p:ext>
     </p:extLst>
   </p:cSld>
@@ -5311,7 +5453,7 @@
         <p:spPr>
           <a:xfrm>
             <a:off x="567542" y="1216429"/>
-            <a:ext cx="6955750" cy="830997"/>
+            <a:ext cx="4185761" cy="461665"/>
           </a:xfrm>
           <a:prstGeom prst="rect">
             <a:avLst/>
@@ -5326,14 +5468,7 @@
           <a:p>
             <a:r>
               <a:rPr lang="ja-JP" altLang="en-US" sz="2400" dirty="0"/>
-              <a:t>移動と攻撃ができて、遊べるようになりました！</a:t>
-            </a:r>
-            <a:endParaRPr lang="en-US" altLang="ja-JP" sz="2400" dirty="0"/>
-          </a:p>
-          <a:p>
-            <a:r>
-              <a:rPr lang="ja-JP" altLang="en-US" sz="2400" dirty="0"/>
-              <a:t>敵をやっつけていきましょう。</a:t>
+              <a:t>画面を参考に書きましょう。</a:t>
             </a:r>
             <a:endParaRPr lang="en-US" altLang="ja-JP" sz="2400" dirty="0"/>
           </a:p>
@@ -5341,10 +5476,10 @@
       </p:sp>
       <p:pic>
         <p:nvPicPr>
-          <p:cNvPr id="3" name="図 2">
-            <a:extLst>
-              <a:ext uri="{FF2B5EF4-FFF2-40B4-BE49-F238E27FC236}">
-                <a16:creationId xmlns:a16="http://schemas.microsoft.com/office/drawing/2014/main" id="{12A60706-9928-4C0E-A741-39CC4721D4CB}"/>
+          <p:cNvPr id="5" name="図 4">
+            <a:extLst>
+              <a:ext uri="{FF2B5EF4-FFF2-40B4-BE49-F238E27FC236}">
+                <a16:creationId xmlns:a16="http://schemas.microsoft.com/office/drawing/2014/main" id="{0595925F-D2BA-4F2E-A1E9-6C273D87F388}"/>
               </a:ext>
             </a:extLst>
           </p:cNvPr>
@@ -5361,8 +5496,8 @@
         </p:blipFill>
         <p:spPr>
           <a:xfrm>
-            <a:off x="567541" y="2187126"/>
-            <a:ext cx="7822925" cy="3886504"/>
+            <a:off x="567542" y="1817794"/>
+            <a:ext cx="9342051" cy="3719406"/>
           </a:xfrm>
           <a:prstGeom prst="rect">
             <a:avLst/>
@@ -5371,10 +5506,10 @@
       </p:pic>
       <p:sp>
         <p:nvSpPr>
-          <p:cNvPr id="13" name="テキスト ボックス 12">
-            <a:extLst>
-              <a:ext uri="{FF2B5EF4-FFF2-40B4-BE49-F238E27FC236}">
-                <a16:creationId xmlns:a16="http://schemas.microsoft.com/office/drawing/2014/main" id="{3F1CEA66-2A4E-470B-B1AE-CB5C7EF76953}"/>
+          <p:cNvPr id="9" name="テキスト ボックス 8">
+            <a:extLst>
+              <a:ext uri="{FF2B5EF4-FFF2-40B4-BE49-F238E27FC236}">
+                <a16:creationId xmlns:a16="http://schemas.microsoft.com/office/drawing/2014/main" id="{A7FF3095-F698-4336-8498-0701D1303020}"/>
               </a:ext>
             </a:extLst>
           </p:cNvPr>
@@ -5383,8 +5518,8 @@
         </p:nvSpPr>
         <p:spPr>
           <a:xfrm>
-            <a:off x="567541" y="6213330"/>
-            <a:ext cx="5109091" cy="461665"/>
+            <a:off x="567541" y="5780194"/>
+            <a:ext cx="5416868" cy="461665"/>
           </a:xfrm>
           <a:prstGeom prst="rect">
             <a:avLst/>
@@ -5398,17 +5533,25 @@
           <a:lstStyle/>
           <a:p>
             <a:r>
-              <a:rPr lang="ja-JP" altLang="en-US" sz="2400" dirty="0"/>
-              <a:t>でも、すこし味気ないですね。。。</a:t>
-            </a:r>
-            <a:endParaRPr lang="en-US" altLang="ja-JP" sz="2400" dirty="0"/>
+              <a:rPr lang="ja-JP" altLang="en-US" sz="2400" b="1" dirty="0">
+                <a:solidFill>
+                  <a:srgbClr val="FF0000"/>
+                </a:solidFill>
+              </a:rPr>
+              <a:t>書き終わったら保存して動作確認！！</a:t>
+            </a:r>
+            <a:endParaRPr lang="en-US" altLang="ja-JP" sz="2400" b="1" dirty="0">
+              <a:solidFill>
+                <a:srgbClr val="FF0000"/>
+              </a:solidFill>
+            </a:endParaRPr>
           </a:p>
         </p:txBody>
       </p:sp>
     </p:spTree>
     <p:extLst>
       <p:ext uri="{BB962C8B-B14F-4D97-AF65-F5344CB8AC3E}">
-        <p14:creationId xmlns:p14="http://schemas.microsoft.com/office/powerpoint/2010/main" val="3375759655"/>
+        <p14:creationId xmlns:p14="http://schemas.microsoft.com/office/powerpoint/2010/main" val="1383001495"/>
       </p:ext>
     </p:extLst>
   </p:cSld>
@@ -5485,7 +5628,7 @@
         <p:spPr>
           <a:xfrm>
             <a:off x="567542" y="1216429"/>
-            <a:ext cx="9725739" cy="1569660"/>
+            <a:ext cx="6955750" cy="830997"/>
           </a:xfrm>
           <a:prstGeom prst="rect">
             <a:avLst/>
@@ -5500,68 +5643,14 @@
           <a:p>
             <a:r>
               <a:rPr lang="ja-JP" altLang="en-US" sz="2400" dirty="0"/>
-              <a:t>ゲームは</a:t>
-            </a:r>
-            <a:r>
-              <a:rPr lang="ja-JP" altLang="en-US" sz="2400" b="1" dirty="0">
-                <a:solidFill>
-                  <a:srgbClr val="FF0000"/>
-                </a:solidFill>
-              </a:rPr>
-              <a:t>オーディオ（音声）</a:t>
-            </a:r>
+              <a:t>移動と攻撃ができて、遊べるようになりました！</a:t>
+            </a:r>
+            <a:endParaRPr lang="en-US" altLang="ja-JP" sz="2400" dirty="0"/>
+          </a:p>
+          <a:p>
             <a:r>
               <a:rPr lang="ja-JP" altLang="en-US" sz="2400" dirty="0"/>
-              <a:t>や</a:t>
-            </a:r>
-            <a:r>
-              <a:rPr lang="ja-JP" altLang="en-US" sz="2400" b="1" dirty="0">
-                <a:solidFill>
-                  <a:srgbClr val="FF0000"/>
-                </a:solidFill>
-              </a:rPr>
-              <a:t>エフェクト（火花など）</a:t>
-            </a:r>
-            <a:r>
-              <a:rPr lang="ja-JP" altLang="en-US" sz="2400" dirty="0"/>
-              <a:t>を使って、</a:t>
-            </a:r>
-            <a:endParaRPr lang="en-US" altLang="ja-JP" sz="2400" dirty="0"/>
-          </a:p>
-          <a:p>
-            <a:r>
-              <a:rPr lang="ja-JP" altLang="en-US" sz="2400" b="1" dirty="0">
-                <a:solidFill>
-                  <a:srgbClr val="FF0000"/>
-                </a:solidFill>
-              </a:rPr>
-              <a:t>見てて楽しくなる</a:t>
-            </a:r>
-            <a:r>
-              <a:rPr lang="ja-JP" altLang="en-US" sz="2400" dirty="0"/>
-              <a:t>ように演出されます。</a:t>
-            </a:r>
-            <a:endParaRPr lang="en-US" altLang="ja-JP" sz="2400" dirty="0"/>
-          </a:p>
-          <a:p>
-            <a:endParaRPr lang="en-US" altLang="ja-JP" sz="2400" dirty="0"/>
-          </a:p>
-          <a:p>
-            <a:r>
-              <a:rPr lang="ja-JP" altLang="en-US" sz="2400" dirty="0"/>
-              <a:t>それらを追加して、</a:t>
-            </a:r>
-            <a:r>
-              <a:rPr lang="ja-JP" altLang="en-US" sz="2400" b="1" dirty="0">
-                <a:solidFill>
-                  <a:srgbClr val="FF0000"/>
-                </a:solidFill>
-              </a:rPr>
-              <a:t>ゲームをもっと派手に</a:t>
-            </a:r>
-            <a:r>
-              <a:rPr lang="ja-JP" altLang="en-US" sz="2400" dirty="0"/>
-              <a:t>していきましょう。</a:t>
+              <a:t>敵をやっつけていきましょう。</a:t>
             </a:r>
             <a:endParaRPr lang="en-US" altLang="ja-JP" sz="2400" dirty="0"/>
           </a:p>
@@ -5569,10 +5658,10 @@
       </p:sp>
       <p:pic>
         <p:nvPicPr>
-          <p:cNvPr id="5" name="図 4">
-            <a:extLst>
-              <a:ext uri="{FF2B5EF4-FFF2-40B4-BE49-F238E27FC236}">
-                <a16:creationId xmlns:a16="http://schemas.microsoft.com/office/drawing/2014/main" id="{73F24358-2136-43D7-B97F-A99EF742591B}"/>
+          <p:cNvPr id="3" name="図 2">
+            <a:extLst>
+              <a:ext uri="{FF2B5EF4-FFF2-40B4-BE49-F238E27FC236}">
+                <a16:creationId xmlns:a16="http://schemas.microsoft.com/office/drawing/2014/main" id="{12A60706-9928-4C0E-A741-39CC4721D4CB}"/>
               </a:ext>
             </a:extLst>
           </p:cNvPr>
@@ -5589,8 +5678,8 @@
         </p:blipFill>
         <p:spPr>
           <a:xfrm>
-            <a:off x="567542" y="2925789"/>
-            <a:ext cx="6006371" cy="2978592"/>
+            <a:off x="567541" y="2187126"/>
+            <a:ext cx="7822925" cy="3886504"/>
           </a:xfrm>
           <a:prstGeom prst="rect">
             <a:avLst/>
@@ -5599,10 +5688,10 @@
       </p:pic>
       <p:sp>
         <p:nvSpPr>
-          <p:cNvPr id="8" name="テキスト ボックス 7">
-            <a:extLst>
-              <a:ext uri="{FF2B5EF4-FFF2-40B4-BE49-F238E27FC236}">
-                <a16:creationId xmlns:a16="http://schemas.microsoft.com/office/drawing/2014/main" id="{D5861E03-C60C-495F-83B9-086CC01BB84E}"/>
+          <p:cNvPr id="13" name="テキスト ボックス 12">
+            <a:extLst>
+              <a:ext uri="{FF2B5EF4-FFF2-40B4-BE49-F238E27FC236}">
+                <a16:creationId xmlns:a16="http://schemas.microsoft.com/office/drawing/2014/main" id="{3F1CEA66-2A4E-470B-B1AE-CB5C7EF76953}"/>
               </a:ext>
             </a:extLst>
           </p:cNvPr>
@@ -5611,8 +5700,8 @@
         </p:nvSpPr>
         <p:spPr>
           <a:xfrm>
-            <a:off x="567542" y="6077060"/>
-            <a:ext cx="5856090" cy="461665"/>
+            <a:off x="567541" y="6213330"/>
+            <a:ext cx="5109091" cy="461665"/>
           </a:xfrm>
           <a:prstGeom prst="rect">
             <a:avLst/>
@@ -5627,15 +5716,7 @@
           <a:p>
             <a:r>
               <a:rPr lang="ja-JP" altLang="en-US" sz="2400" dirty="0"/>
-              <a:t>ここからは</a:t>
-            </a:r>
-            <a:r>
-              <a:rPr lang="en-US" altLang="ja-JP" sz="2400" dirty="0"/>
-              <a:t>Unity</a:t>
-            </a:r>
-            <a:r>
-              <a:rPr lang="ja-JP" altLang="en-US" sz="2400" dirty="0"/>
-              <a:t>側も操作していきます。</a:t>
+              <a:t>でも、すこし味気ないですね。。。</a:t>
             </a:r>
             <a:endParaRPr lang="en-US" altLang="ja-JP" sz="2400" dirty="0"/>
           </a:p>
@@ -5644,7 +5725,7 @@
     </p:spTree>
     <p:extLst>
       <p:ext uri="{BB962C8B-B14F-4D97-AF65-F5344CB8AC3E}">
-        <p14:creationId xmlns:p14="http://schemas.microsoft.com/office/powerpoint/2010/main" val="477914568"/>
+        <p14:creationId xmlns:p14="http://schemas.microsoft.com/office/powerpoint/2010/main" val="3375759655"/>
       </p:ext>
     </p:extLst>
   </p:cSld>
@@ -5721,7 +5802,7 @@
         <p:spPr>
           <a:xfrm>
             <a:off x="567542" y="1216429"/>
-            <a:ext cx="6245621" cy="461665"/>
+            <a:ext cx="9725739" cy="1569660"/>
           </a:xfrm>
           <a:prstGeom prst="rect">
             <a:avLst/>
@@ -5736,19 +5817,68 @@
           <a:p>
             <a:r>
               <a:rPr lang="ja-JP" altLang="en-US" sz="2400" dirty="0"/>
-              <a:t>弾丸のプログラムである</a:t>
-            </a:r>
-            <a:r>
-              <a:rPr lang="en-US" altLang="ja-JP" sz="2400" b="1" dirty="0">
+              <a:t>ゲームは</a:t>
+            </a:r>
+            <a:r>
+              <a:rPr lang="ja-JP" altLang="en-US" sz="2400" b="1" dirty="0">
                 <a:solidFill>
                   <a:srgbClr val="FF0000"/>
                 </a:solidFill>
               </a:rPr>
-              <a:t>Bullet</a:t>
+              <a:t>オーディオ（音声）</a:t>
             </a:r>
             <a:r>
               <a:rPr lang="ja-JP" altLang="en-US" sz="2400" dirty="0"/>
-              <a:t>を開きます。</a:t>
+              <a:t>や</a:t>
+            </a:r>
+            <a:r>
+              <a:rPr lang="ja-JP" altLang="en-US" sz="2400" b="1" dirty="0">
+                <a:solidFill>
+                  <a:srgbClr val="FF0000"/>
+                </a:solidFill>
+              </a:rPr>
+              <a:t>エフェクト（火花など）</a:t>
+            </a:r>
+            <a:r>
+              <a:rPr lang="ja-JP" altLang="en-US" sz="2400" dirty="0"/>
+              <a:t>を使って、</a:t>
+            </a:r>
+            <a:endParaRPr lang="en-US" altLang="ja-JP" sz="2400" dirty="0"/>
+          </a:p>
+          <a:p>
+            <a:r>
+              <a:rPr lang="ja-JP" altLang="en-US" sz="2400" b="1" dirty="0">
+                <a:solidFill>
+                  <a:srgbClr val="FF0000"/>
+                </a:solidFill>
+              </a:rPr>
+              <a:t>見てて楽しくなる</a:t>
+            </a:r>
+            <a:r>
+              <a:rPr lang="ja-JP" altLang="en-US" sz="2400" dirty="0"/>
+              <a:t>ように演出されます。</a:t>
+            </a:r>
+            <a:endParaRPr lang="en-US" altLang="ja-JP" sz="2400" dirty="0"/>
+          </a:p>
+          <a:p>
+            <a:endParaRPr lang="en-US" altLang="ja-JP" sz="2400" dirty="0"/>
+          </a:p>
+          <a:p>
+            <a:r>
+              <a:rPr lang="ja-JP" altLang="en-US" sz="2400" dirty="0"/>
+              <a:t>それらを追加して、</a:t>
+            </a:r>
+            <a:r>
+              <a:rPr lang="ja-JP" altLang="en-US" sz="2400" b="1" dirty="0">
+                <a:solidFill>
+                  <a:srgbClr val="FF0000"/>
+                </a:solidFill>
+              </a:rPr>
+              <a:t>ゲームをもっと派手に</a:t>
+            </a:r>
+            <a:r>
+              <a:rPr lang="ja-JP" altLang="en-US" sz="2400" dirty="0"/>
+              <a:t>していきましょう。</a:t>
             </a:r>
             <a:endParaRPr lang="en-US" altLang="ja-JP" sz="2400" dirty="0"/>
           </a:p>
@@ -5756,10 +5886,10 @@
       </p:sp>
       <p:pic>
         <p:nvPicPr>
-          <p:cNvPr id="3" name="図 2">
-            <a:extLst>
-              <a:ext uri="{FF2B5EF4-FFF2-40B4-BE49-F238E27FC236}">
-                <a16:creationId xmlns:a16="http://schemas.microsoft.com/office/drawing/2014/main" id="{93BDA1D7-38E3-46F9-9503-5BE6FB612C57}"/>
+          <p:cNvPr id="5" name="図 4">
+            <a:extLst>
+              <a:ext uri="{FF2B5EF4-FFF2-40B4-BE49-F238E27FC236}">
+                <a16:creationId xmlns:a16="http://schemas.microsoft.com/office/drawing/2014/main" id="{73F24358-2136-43D7-B97F-A99EF742591B}"/>
               </a:ext>
             </a:extLst>
           </p:cNvPr>
@@ -5776,8 +5906,8 @@
         </p:blipFill>
         <p:spPr>
           <a:xfrm>
-            <a:off x="567542" y="1817794"/>
-            <a:ext cx="3762900" cy="3610479"/>
+            <a:off x="567542" y="2925789"/>
+            <a:ext cx="6006371" cy="2978592"/>
           </a:xfrm>
           <a:prstGeom prst="rect">
             <a:avLst/>
@@ -5786,116 +5916,52 @@
       </p:pic>
       <p:sp>
         <p:nvSpPr>
-          <p:cNvPr id="9" name="矢印: 右 8">
-            <a:extLst>
-              <a:ext uri="{FF2B5EF4-FFF2-40B4-BE49-F238E27FC236}">
-                <a16:creationId xmlns:a16="http://schemas.microsoft.com/office/drawing/2014/main" id="{3CD10183-8420-4F74-A667-D5A6AEBBB0AC}"/>
-              </a:ext>
-            </a:extLst>
-          </p:cNvPr>
-          <p:cNvSpPr/>
-          <p:nvPr/>
-        </p:nvSpPr>
-        <p:spPr>
-          <a:xfrm rot="13245323">
-            <a:off x="1438918" y="4064198"/>
-            <a:ext cx="660400" cy="502574"/>
-          </a:xfrm>
-          <a:prstGeom prst="rightArrow">
-            <a:avLst/>
-          </a:prstGeom>
-          <a:solidFill>
-            <a:srgbClr val="FF0000"/>
-          </a:solidFill>
-          <a:ln>
-            <a:solidFill>
-              <a:schemeClr val="tx1"/>
-            </a:solidFill>
-          </a:ln>
-        </p:spPr>
-        <p:style>
-          <a:lnRef idx="2">
-            <a:schemeClr val="accent1">
-              <a:shade val="50000"/>
-            </a:schemeClr>
-          </a:lnRef>
-          <a:fillRef idx="1">
-            <a:schemeClr val="accent1"/>
-          </a:fillRef>
-          <a:effectRef idx="0">
-            <a:schemeClr val="accent1"/>
-          </a:effectRef>
-          <a:fontRef idx="minor">
-            <a:schemeClr val="lt1"/>
-          </a:fontRef>
-        </p:style>
-        <p:txBody>
-          <a:bodyPr rtlCol="0" anchor="ctr"/>
-          <a:lstStyle/>
-          <a:p>
-            <a:pPr algn="ctr"/>
-            <a:endParaRPr kumimoji="1" lang="ja-JP" altLang="en-US"/>
-          </a:p>
-        </p:txBody>
-      </p:sp>
-      <p:sp>
-        <p:nvSpPr>
-          <p:cNvPr id="10" name="矢印: 右 9">
-            <a:extLst>
-              <a:ext uri="{FF2B5EF4-FFF2-40B4-BE49-F238E27FC236}">
-                <a16:creationId xmlns:a16="http://schemas.microsoft.com/office/drawing/2014/main" id="{1E29D462-5DC7-4221-9823-D722873DADF8}"/>
-              </a:ext>
-            </a:extLst>
-          </p:cNvPr>
-          <p:cNvSpPr/>
-          <p:nvPr/>
-        </p:nvSpPr>
-        <p:spPr>
-          <a:xfrm rot="13245323">
-            <a:off x="3106853" y="3073597"/>
-            <a:ext cx="660400" cy="502574"/>
-          </a:xfrm>
-          <a:prstGeom prst="rightArrow">
-            <a:avLst/>
-          </a:prstGeom>
-          <a:solidFill>
-            <a:srgbClr val="FF0000"/>
-          </a:solidFill>
-          <a:ln>
-            <a:solidFill>
-              <a:schemeClr val="tx1"/>
-            </a:solidFill>
-          </a:ln>
-        </p:spPr>
-        <p:style>
-          <a:lnRef idx="2">
-            <a:schemeClr val="accent1">
-              <a:shade val="50000"/>
-            </a:schemeClr>
-          </a:lnRef>
-          <a:fillRef idx="1">
-            <a:schemeClr val="accent1"/>
-          </a:fillRef>
-          <a:effectRef idx="0">
-            <a:schemeClr val="accent1"/>
-          </a:effectRef>
-          <a:fontRef idx="minor">
-            <a:schemeClr val="lt1"/>
-          </a:fontRef>
-        </p:style>
-        <p:txBody>
-          <a:bodyPr rtlCol="0" anchor="ctr"/>
-          <a:lstStyle/>
-          <a:p>
-            <a:pPr algn="ctr"/>
-            <a:endParaRPr kumimoji="1" lang="ja-JP" altLang="en-US"/>
+          <p:cNvPr id="8" name="テキスト ボックス 7">
+            <a:extLst>
+              <a:ext uri="{FF2B5EF4-FFF2-40B4-BE49-F238E27FC236}">
+                <a16:creationId xmlns:a16="http://schemas.microsoft.com/office/drawing/2014/main" id="{D5861E03-C60C-495F-83B9-086CC01BB84E}"/>
+              </a:ext>
+            </a:extLst>
+          </p:cNvPr>
+          <p:cNvSpPr txBox="1"/>
+          <p:nvPr/>
+        </p:nvSpPr>
+        <p:spPr>
+          <a:xfrm>
+            <a:off x="567542" y="6077060"/>
+            <a:ext cx="5856090" cy="461665"/>
+          </a:xfrm>
+          <a:prstGeom prst="rect">
+            <a:avLst/>
+          </a:prstGeom>
+          <a:noFill/>
+        </p:spPr>
+        <p:txBody>
+          <a:bodyPr wrap="none" rtlCol="0">
+            <a:spAutoFit/>
+          </a:bodyPr>
+          <a:lstStyle/>
+          <a:p>
+            <a:r>
+              <a:rPr lang="ja-JP" altLang="en-US" sz="2400" dirty="0"/>
+              <a:t>ここからは</a:t>
+            </a:r>
+            <a:r>
+              <a:rPr lang="en-US" altLang="ja-JP" sz="2400" dirty="0"/>
+              <a:t>Unity</a:t>
+            </a:r>
+            <a:r>
+              <a:rPr lang="ja-JP" altLang="en-US" sz="2400" dirty="0"/>
+              <a:t>側も操作していきます。</a:t>
+            </a:r>
+            <a:endParaRPr lang="en-US" altLang="ja-JP" sz="2400" dirty="0"/>
           </a:p>
         </p:txBody>
       </p:sp>
     </p:spTree>
     <p:extLst>
       <p:ext uri="{BB962C8B-B14F-4D97-AF65-F5344CB8AC3E}">
-        <p14:creationId xmlns:p14="http://schemas.microsoft.com/office/powerpoint/2010/main" val="1675958367"/>
+        <p14:creationId xmlns:p14="http://schemas.microsoft.com/office/powerpoint/2010/main" val="477914568"/>
       </p:ext>
     </p:extLst>
   </p:cSld>
@@ -5972,7 +6038,7 @@
         <p:spPr>
           <a:xfrm>
             <a:off x="567542" y="1216429"/>
-            <a:ext cx="4185761" cy="461665"/>
+            <a:ext cx="6245621" cy="461665"/>
           </a:xfrm>
           <a:prstGeom prst="rect">
             <a:avLst/>
@@ -5987,7 +6053,19 @@
           <a:p>
             <a:r>
               <a:rPr lang="ja-JP" altLang="en-US" sz="2400" dirty="0"/>
-              <a:t>画面を参考に書きましょう。</a:t>
+              <a:t>弾丸のプログラムである</a:t>
+            </a:r>
+            <a:r>
+              <a:rPr lang="en-US" altLang="ja-JP" sz="2400" b="1" dirty="0">
+                <a:solidFill>
+                  <a:srgbClr val="FF0000"/>
+                </a:solidFill>
+              </a:rPr>
+              <a:t>Bullet</a:t>
+            </a:r>
+            <a:r>
+              <a:rPr lang="ja-JP" altLang="en-US" sz="2400" dirty="0"/>
+              <a:t>を開きます。</a:t>
             </a:r>
             <a:endParaRPr lang="en-US" altLang="ja-JP" sz="2400" dirty="0"/>
           </a:p>
@@ -5995,10 +6073,10 @@
       </p:sp>
       <p:pic>
         <p:nvPicPr>
-          <p:cNvPr id="5" name="図 4">
-            <a:extLst>
-              <a:ext uri="{FF2B5EF4-FFF2-40B4-BE49-F238E27FC236}">
-                <a16:creationId xmlns:a16="http://schemas.microsoft.com/office/drawing/2014/main" id="{DBFCB29F-94CF-4A02-A445-66E5A01E33DA}"/>
+          <p:cNvPr id="3" name="図 2">
+            <a:extLst>
+              <a:ext uri="{FF2B5EF4-FFF2-40B4-BE49-F238E27FC236}">
+                <a16:creationId xmlns:a16="http://schemas.microsoft.com/office/drawing/2014/main" id="{93BDA1D7-38E3-46F9-9503-5BE6FB612C57}"/>
               </a:ext>
             </a:extLst>
           </p:cNvPr>
@@ -6016,7 +6094,7 @@
         <p:spPr>
           <a:xfrm>
             <a:off x="567542" y="1817794"/>
-            <a:ext cx="8992855" cy="2791215"/>
+            <a:ext cx="3762900" cy="3610479"/>
           </a:xfrm>
           <a:prstGeom prst="rect">
             <a:avLst/>
@@ -6025,10 +6103,10 @@
       </p:pic>
       <p:sp>
         <p:nvSpPr>
-          <p:cNvPr id="11" name="正方形/長方形 10">
-            <a:extLst>
-              <a:ext uri="{FF2B5EF4-FFF2-40B4-BE49-F238E27FC236}">
-                <a16:creationId xmlns:a16="http://schemas.microsoft.com/office/drawing/2014/main" id="{B4147ED2-44DE-4468-A18E-AF292D5DA003}"/>
+          <p:cNvPr id="9" name="矢印: 右 8">
+            <a:extLst>
+              <a:ext uri="{FF2B5EF4-FFF2-40B4-BE49-F238E27FC236}">
+                <a16:creationId xmlns:a16="http://schemas.microsoft.com/office/drawing/2014/main" id="{3CD10183-8420-4F74-A667-D5A6AEBBB0AC}"/>
               </a:ext>
             </a:extLst>
           </p:cNvPr>
@@ -6036,17 +6114,19 @@
           <p:nvPr/>
         </p:nvSpPr>
         <p:spPr>
-          <a:xfrm>
-            <a:off x="2480732" y="2331562"/>
-            <a:ext cx="7079665" cy="1258305"/>
-          </a:xfrm>
-          <a:prstGeom prst="rect">
-            <a:avLst/>
-          </a:prstGeom>
-          <a:noFill/>
-          <a:ln w="38100">
+          <a:xfrm rot="13245323">
+            <a:off x="1438918" y="4064198"/>
+            <a:ext cx="660400" cy="502574"/>
+          </a:xfrm>
+          <a:prstGeom prst="rightArrow">
+            <a:avLst/>
+          </a:prstGeom>
+          <a:solidFill>
+            <a:srgbClr val="FF0000"/>
+          </a:solidFill>
+          <a:ln>
             <a:solidFill>
-              <a:srgbClr val="FF0000"/>
+              <a:schemeClr val="tx1"/>
             </a:solidFill>
           </a:ln>
         </p:spPr>
@@ -6077,44 +6157,62 @@
       </p:sp>
       <p:sp>
         <p:nvSpPr>
-          <p:cNvPr id="12" name="テキスト ボックス 11">
-            <a:extLst>
-              <a:ext uri="{FF2B5EF4-FFF2-40B4-BE49-F238E27FC236}">
-                <a16:creationId xmlns:a16="http://schemas.microsoft.com/office/drawing/2014/main" id="{1D4BC239-6E1C-4EA9-A77D-DE45814C7B68}"/>
-              </a:ext>
-            </a:extLst>
-          </p:cNvPr>
-          <p:cNvSpPr txBox="1"/>
-          <p:nvPr/>
-        </p:nvSpPr>
-        <p:spPr>
-          <a:xfrm>
-            <a:off x="567542" y="4891944"/>
-            <a:ext cx="7263527" cy="461665"/>
-          </a:xfrm>
-          <a:prstGeom prst="rect">
-            <a:avLst/>
-          </a:prstGeom>
-          <a:noFill/>
-        </p:spPr>
-        <p:txBody>
-          <a:bodyPr wrap="none" rtlCol="0">
-            <a:spAutoFit/>
-          </a:bodyPr>
-          <a:lstStyle/>
-          <a:p>
-            <a:r>
-              <a:rPr lang="ja-JP" altLang="en-US" sz="2400" dirty="0"/>
-              <a:t>書き終わったら保存しましょう。（まだでません）</a:t>
-            </a:r>
-            <a:endParaRPr lang="en-US" altLang="ja-JP" sz="2400" dirty="0"/>
+          <p:cNvPr id="10" name="矢印: 右 9">
+            <a:extLst>
+              <a:ext uri="{FF2B5EF4-FFF2-40B4-BE49-F238E27FC236}">
+                <a16:creationId xmlns:a16="http://schemas.microsoft.com/office/drawing/2014/main" id="{1E29D462-5DC7-4221-9823-D722873DADF8}"/>
+              </a:ext>
+            </a:extLst>
+          </p:cNvPr>
+          <p:cNvSpPr/>
+          <p:nvPr/>
+        </p:nvSpPr>
+        <p:spPr>
+          <a:xfrm rot="13245323">
+            <a:off x="3106853" y="3073597"/>
+            <a:ext cx="660400" cy="502574"/>
+          </a:xfrm>
+          <a:prstGeom prst="rightArrow">
+            <a:avLst/>
+          </a:prstGeom>
+          <a:solidFill>
+            <a:srgbClr val="FF0000"/>
+          </a:solidFill>
+          <a:ln>
+            <a:solidFill>
+              <a:schemeClr val="tx1"/>
+            </a:solidFill>
+          </a:ln>
+        </p:spPr>
+        <p:style>
+          <a:lnRef idx="2">
+            <a:schemeClr val="accent1">
+              <a:shade val="50000"/>
+            </a:schemeClr>
+          </a:lnRef>
+          <a:fillRef idx="1">
+            <a:schemeClr val="accent1"/>
+          </a:fillRef>
+          <a:effectRef idx="0">
+            <a:schemeClr val="accent1"/>
+          </a:effectRef>
+          <a:fontRef idx="minor">
+            <a:schemeClr val="lt1"/>
+          </a:fontRef>
+        </p:style>
+        <p:txBody>
+          <a:bodyPr rtlCol="0" anchor="ctr"/>
+          <a:lstStyle/>
+          <a:p>
+            <a:pPr algn="ctr"/>
+            <a:endParaRPr kumimoji="1" lang="ja-JP" altLang="en-US"/>
           </a:p>
         </p:txBody>
       </p:sp>
     </p:spTree>
     <p:extLst>
       <p:ext uri="{BB962C8B-B14F-4D97-AF65-F5344CB8AC3E}">
-        <p14:creationId xmlns:p14="http://schemas.microsoft.com/office/powerpoint/2010/main" val="335489719"/>
+        <p14:creationId xmlns:p14="http://schemas.microsoft.com/office/powerpoint/2010/main" val="1675958367"/>
       </p:ext>
     </p:extLst>
   </p:cSld>
@@ -6397,7 +6495,7 @@
         <p:spPr>
           <a:xfrm>
             <a:off x="567542" y="1216429"/>
-            <a:ext cx="8186857" cy="461665"/>
+            <a:ext cx="4185761" cy="461665"/>
           </a:xfrm>
           <a:prstGeom prst="rect">
             <a:avLst/>
@@ -6412,19 +6510,7 @@
           <a:p>
             <a:r>
               <a:rPr lang="ja-JP" altLang="en-US" sz="2400" dirty="0"/>
-              <a:t>次に</a:t>
-            </a:r>
-            <a:r>
-              <a:rPr lang="ja-JP" altLang="en-US" sz="2400" b="1" dirty="0">
-                <a:solidFill>
-                  <a:srgbClr val="FF0000"/>
-                </a:solidFill>
-              </a:rPr>
-              <a:t>弾丸の大元となるデータ（プレハブ）</a:t>
-            </a:r>
-            <a:r>
-              <a:rPr lang="ja-JP" altLang="en-US" sz="2400" dirty="0"/>
-              <a:t>を開きます。</a:t>
+              <a:t>画面を参考に書きましょう。</a:t>
             </a:r>
             <a:endParaRPr lang="en-US" altLang="ja-JP" sz="2400" dirty="0"/>
           </a:p>
@@ -6432,10 +6518,10 @@
       </p:sp>
       <p:pic>
         <p:nvPicPr>
-          <p:cNvPr id="3" name="図 2">
-            <a:extLst>
-              <a:ext uri="{FF2B5EF4-FFF2-40B4-BE49-F238E27FC236}">
-                <a16:creationId xmlns:a16="http://schemas.microsoft.com/office/drawing/2014/main" id="{65BE37D6-AA4D-4B28-A962-F3C548B33CBF}"/>
+          <p:cNvPr id="5" name="図 4">
+            <a:extLst>
+              <a:ext uri="{FF2B5EF4-FFF2-40B4-BE49-F238E27FC236}">
+                <a16:creationId xmlns:a16="http://schemas.microsoft.com/office/drawing/2014/main" id="{DBFCB29F-94CF-4A02-A445-66E5A01E33DA}"/>
               </a:ext>
             </a:extLst>
           </p:cNvPr>
@@ -6453,7 +6539,7 @@
         <p:spPr>
           <a:xfrm>
             <a:off x="567542" y="1817794"/>
-            <a:ext cx="4439270" cy="3600953"/>
+            <a:ext cx="8992855" cy="2791215"/>
           </a:xfrm>
           <a:prstGeom prst="rect">
             <a:avLst/>
@@ -6462,10 +6548,10 @@
       </p:pic>
       <p:sp>
         <p:nvSpPr>
-          <p:cNvPr id="9" name="矢印: 右 8">
-            <a:extLst>
-              <a:ext uri="{FF2B5EF4-FFF2-40B4-BE49-F238E27FC236}">
-                <a16:creationId xmlns:a16="http://schemas.microsoft.com/office/drawing/2014/main" id="{808D124F-4D46-4D8F-8FFA-837AC6410741}"/>
+          <p:cNvPr id="11" name="正方形/長方形 10">
+            <a:extLst>
+              <a:ext uri="{FF2B5EF4-FFF2-40B4-BE49-F238E27FC236}">
+                <a16:creationId xmlns:a16="http://schemas.microsoft.com/office/drawing/2014/main" id="{B4147ED2-44DE-4468-A18E-AF292D5DA003}"/>
               </a:ext>
             </a:extLst>
           </p:cNvPr>
@@ -6473,19 +6559,17 @@
           <p:nvPr/>
         </p:nvSpPr>
         <p:spPr>
-          <a:xfrm rot="13245323">
-            <a:off x="1455852" y="3772899"/>
-            <a:ext cx="660400" cy="502574"/>
-          </a:xfrm>
-          <a:prstGeom prst="rightArrow">
-            <a:avLst/>
-          </a:prstGeom>
-          <a:solidFill>
-            <a:srgbClr val="FF0000"/>
-          </a:solidFill>
-          <a:ln>
+          <a:xfrm>
+            <a:off x="2480732" y="2331562"/>
+            <a:ext cx="7079665" cy="1258305"/>
+          </a:xfrm>
+          <a:prstGeom prst="rect">
+            <a:avLst/>
+          </a:prstGeom>
+          <a:noFill/>
+          <a:ln w="38100">
             <a:solidFill>
-              <a:schemeClr val="tx1"/>
+              <a:srgbClr val="FF0000"/>
             </a:solidFill>
           </a:ln>
         </p:spPr>
@@ -6516,64 +6600,10 @@
       </p:sp>
       <p:sp>
         <p:nvSpPr>
-          <p:cNvPr id="10" name="矢印: 右 9">
-            <a:extLst>
-              <a:ext uri="{FF2B5EF4-FFF2-40B4-BE49-F238E27FC236}">
-                <a16:creationId xmlns:a16="http://schemas.microsoft.com/office/drawing/2014/main" id="{32FEAF0C-C0A1-4E3C-9747-4CC90F8191C8}"/>
-              </a:ext>
-            </a:extLst>
-          </p:cNvPr>
-          <p:cNvSpPr/>
-          <p:nvPr/>
-        </p:nvSpPr>
-        <p:spPr>
-          <a:xfrm rot="13245323">
-            <a:off x="4588518" y="3031265"/>
-            <a:ext cx="660400" cy="502574"/>
-          </a:xfrm>
-          <a:prstGeom prst="rightArrow">
-            <a:avLst/>
-          </a:prstGeom>
-          <a:solidFill>
-            <a:srgbClr val="FF0000"/>
-          </a:solidFill>
-          <a:ln>
-            <a:solidFill>
-              <a:schemeClr val="tx1"/>
-            </a:solidFill>
-          </a:ln>
-        </p:spPr>
-        <p:style>
-          <a:lnRef idx="2">
-            <a:schemeClr val="accent1">
-              <a:shade val="50000"/>
-            </a:schemeClr>
-          </a:lnRef>
-          <a:fillRef idx="1">
-            <a:schemeClr val="accent1"/>
-          </a:fillRef>
-          <a:effectRef idx="0">
-            <a:schemeClr val="accent1"/>
-          </a:effectRef>
-          <a:fontRef idx="minor">
-            <a:schemeClr val="lt1"/>
-          </a:fontRef>
-        </p:style>
-        <p:txBody>
-          <a:bodyPr rtlCol="0" anchor="ctr"/>
-          <a:lstStyle/>
-          <a:p>
-            <a:pPr algn="ctr"/>
-            <a:endParaRPr kumimoji="1" lang="ja-JP" altLang="en-US"/>
-          </a:p>
-        </p:txBody>
-      </p:sp>
-      <p:sp>
-        <p:nvSpPr>
-          <p:cNvPr id="13" name="テキスト ボックス 12">
-            <a:extLst>
-              <a:ext uri="{FF2B5EF4-FFF2-40B4-BE49-F238E27FC236}">
-                <a16:creationId xmlns:a16="http://schemas.microsoft.com/office/drawing/2014/main" id="{BB85EF1F-CF84-48A8-90E6-8188E001D2B9}"/>
+          <p:cNvPr id="12" name="テキスト ボックス 11">
+            <a:extLst>
+              <a:ext uri="{FF2B5EF4-FFF2-40B4-BE49-F238E27FC236}">
+                <a16:creationId xmlns:a16="http://schemas.microsoft.com/office/drawing/2014/main" id="{1D4BC239-6E1C-4EA9-A77D-DE45814C7B68}"/>
               </a:ext>
             </a:extLst>
           </p:cNvPr>
@@ -6582,8 +6612,8 @@
         </p:nvSpPr>
         <p:spPr>
           <a:xfrm>
-            <a:off x="567542" y="5563450"/>
-            <a:ext cx="7571303" cy="461665"/>
+            <a:off x="567542" y="4891944"/>
+            <a:ext cx="7263527" cy="461665"/>
           </a:xfrm>
           <a:prstGeom prst="rect">
             <a:avLst/>
@@ -6597,33 +6627,17 @@
           <a:lstStyle/>
           <a:p>
             <a:r>
-              <a:rPr lang="en-US" altLang="ja-JP" sz="2400" b="1" dirty="0">
-                <a:solidFill>
-                  <a:srgbClr val="00B050"/>
-                </a:solidFill>
-              </a:rPr>
-              <a:t>※</a:t>
-            </a:r>
-            <a:r>
-              <a:rPr lang="ja-JP" altLang="en-US" sz="2400" b="1" dirty="0">
-                <a:solidFill>
-                  <a:srgbClr val="00B050"/>
-                </a:solidFill>
-              </a:rPr>
-              <a:t>プログラムはプレハブの一部分にすぎません。。。</a:t>
-            </a:r>
-            <a:endParaRPr lang="en-US" altLang="ja-JP" sz="2400" b="1" dirty="0">
-              <a:solidFill>
-                <a:srgbClr val="00B050"/>
-              </a:solidFill>
-            </a:endParaRPr>
+              <a:rPr lang="ja-JP" altLang="en-US" sz="2400" dirty="0"/>
+              <a:t>書き終わったら保存しましょう。（まだでません）</a:t>
+            </a:r>
+            <a:endParaRPr lang="en-US" altLang="ja-JP" sz="2400" dirty="0"/>
           </a:p>
         </p:txBody>
       </p:sp>
     </p:spTree>
     <p:extLst>
       <p:ext uri="{BB962C8B-B14F-4D97-AF65-F5344CB8AC3E}">
-        <p14:creationId xmlns:p14="http://schemas.microsoft.com/office/powerpoint/2010/main" val="1844870317"/>
+        <p14:creationId xmlns:p14="http://schemas.microsoft.com/office/powerpoint/2010/main" val="335489719"/>
       </p:ext>
     </p:extLst>
   </p:cSld>
@@ -6700,7 +6714,7 @@
         <p:spPr>
           <a:xfrm>
             <a:off x="567542" y="1216429"/>
-            <a:ext cx="9187130" cy="830997"/>
+            <a:ext cx="8186857" cy="461665"/>
           </a:xfrm>
           <a:prstGeom prst="rect">
             <a:avLst/>
@@ -6715,22 +6729,19 @@
           <a:p>
             <a:r>
               <a:rPr lang="ja-JP" altLang="en-US" sz="2400" dirty="0"/>
-              <a:t>画面右側にエフェクトや効果音（</a:t>
-            </a:r>
-            <a:r>
-              <a:rPr lang="en-US" altLang="ja-JP" sz="2400" dirty="0"/>
-              <a:t>SE</a:t>
+              <a:t>次に</a:t>
+            </a:r>
+            <a:r>
+              <a:rPr lang="ja-JP" altLang="en-US" sz="2400" b="1" dirty="0">
+                <a:solidFill>
+                  <a:srgbClr val="FF0000"/>
+                </a:solidFill>
+              </a:rPr>
+              <a:t>弾丸の大元となるデータ（プレハブ）</a:t>
             </a:r>
             <a:r>
               <a:rPr lang="ja-JP" altLang="en-US" sz="2400" dirty="0"/>
-              <a:t>）を設定する枠があります。</a:t>
-            </a:r>
-            <a:endParaRPr lang="en-US" altLang="ja-JP" sz="2400" dirty="0"/>
-          </a:p>
-          <a:p>
-            <a:r>
-              <a:rPr lang="ja-JP" altLang="en-US" sz="2400" dirty="0"/>
-              <a:t>画面を参考に設定しましょう。</a:t>
+              <a:t>を開きます。</a:t>
             </a:r>
             <a:endParaRPr lang="en-US" altLang="ja-JP" sz="2400" dirty="0"/>
           </a:p>
@@ -6738,10 +6749,10 @@
       </p:sp>
       <p:pic>
         <p:nvPicPr>
-          <p:cNvPr id="5" name="図 4">
-            <a:extLst>
-              <a:ext uri="{FF2B5EF4-FFF2-40B4-BE49-F238E27FC236}">
-                <a16:creationId xmlns:a16="http://schemas.microsoft.com/office/drawing/2014/main" id="{F2723501-3514-4C61-9CD9-A06FFBC161AE}"/>
+          <p:cNvPr id="3" name="図 2">
+            <a:extLst>
+              <a:ext uri="{FF2B5EF4-FFF2-40B4-BE49-F238E27FC236}">
+                <a16:creationId xmlns:a16="http://schemas.microsoft.com/office/drawing/2014/main" id="{65BE37D6-AA4D-4B28-A962-F3C548B33CBF}"/>
               </a:ext>
             </a:extLst>
           </p:cNvPr>
@@ -6758,8 +6769,8 @@
         </p:blipFill>
         <p:spPr>
           <a:xfrm>
-            <a:off x="567543" y="2187127"/>
-            <a:ext cx="3346584" cy="4366074"/>
+            <a:off x="567542" y="1817794"/>
+            <a:ext cx="4439270" cy="3600953"/>
           </a:xfrm>
           <a:prstGeom prst="rect">
             <a:avLst/>
@@ -6768,10 +6779,10 @@
       </p:pic>
       <p:sp>
         <p:nvSpPr>
-          <p:cNvPr id="11" name="正方形/長方形 10">
-            <a:extLst>
-              <a:ext uri="{FF2B5EF4-FFF2-40B4-BE49-F238E27FC236}">
-                <a16:creationId xmlns:a16="http://schemas.microsoft.com/office/drawing/2014/main" id="{629E2FFC-3BEA-43C2-BE26-711068EAAA9E}"/>
+          <p:cNvPr id="9" name="矢印: 右 8">
+            <a:extLst>
+              <a:ext uri="{FF2B5EF4-FFF2-40B4-BE49-F238E27FC236}">
+                <a16:creationId xmlns:a16="http://schemas.microsoft.com/office/drawing/2014/main" id="{808D124F-4D46-4D8F-8FFA-837AC6410741}"/>
               </a:ext>
             </a:extLst>
           </p:cNvPr>
@@ -6779,17 +6790,19 @@
           <p:nvPr/>
         </p:nvSpPr>
         <p:spPr>
-          <a:xfrm>
-            <a:off x="440267" y="5715001"/>
-            <a:ext cx="3547533" cy="507999"/>
-          </a:xfrm>
-          <a:prstGeom prst="rect">
-            <a:avLst/>
-          </a:prstGeom>
-          <a:noFill/>
-          <a:ln w="38100">
+          <a:xfrm rot="13245323">
+            <a:off x="1455852" y="3772899"/>
+            <a:ext cx="660400" cy="502574"/>
+          </a:xfrm>
+          <a:prstGeom prst="rightArrow">
+            <a:avLst/>
+          </a:prstGeom>
+          <a:solidFill>
+            <a:srgbClr val="FF0000"/>
+          </a:solidFill>
+          <a:ln>
             <a:solidFill>
-              <a:srgbClr val="FF0000"/>
+              <a:schemeClr val="tx1"/>
             </a:solidFill>
           </a:ln>
         </p:spPr>
@@ -6818,10 +6831,116 @@
           </a:p>
         </p:txBody>
       </p:sp>
+      <p:sp>
+        <p:nvSpPr>
+          <p:cNvPr id="10" name="矢印: 右 9">
+            <a:extLst>
+              <a:ext uri="{FF2B5EF4-FFF2-40B4-BE49-F238E27FC236}">
+                <a16:creationId xmlns:a16="http://schemas.microsoft.com/office/drawing/2014/main" id="{32FEAF0C-C0A1-4E3C-9747-4CC90F8191C8}"/>
+              </a:ext>
+            </a:extLst>
+          </p:cNvPr>
+          <p:cNvSpPr/>
+          <p:nvPr/>
+        </p:nvSpPr>
+        <p:spPr>
+          <a:xfrm rot="13245323">
+            <a:off x="4588518" y="3031265"/>
+            <a:ext cx="660400" cy="502574"/>
+          </a:xfrm>
+          <a:prstGeom prst="rightArrow">
+            <a:avLst/>
+          </a:prstGeom>
+          <a:solidFill>
+            <a:srgbClr val="FF0000"/>
+          </a:solidFill>
+          <a:ln>
+            <a:solidFill>
+              <a:schemeClr val="tx1"/>
+            </a:solidFill>
+          </a:ln>
+        </p:spPr>
+        <p:style>
+          <a:lnRef idx="2">
+            <a:schemeClr val="accent1">
+              <a:shade val="50000"/>
+            </a:schemeClr>
+          </a:lnRef>
+          <a:fillRef idx="1">
+            <a:schemeClr val="accent1"/>
+          </a:fillRef>
+          <a:effectRef idx="0">
+            <a:schemeClr val="accent1"/>
+          </a:effectRef>
+          <a:fontRef idx="minor">
+            <a:schemeClr val="lt1"/>
+          </a:fontRef>
+        </p:style>
+        <p:txBody>
+          <a:bodyPr rtlCol="0" anchor="ctr"/>
+          <a:lstStyle/>
+          <a:p>
+            <a:pPr algn="ctr"/>
+            <a:endParaRPr kumimoji="1" lang="ja-JP" altLang="en-US"/>
+          </a:p>
+        </p:txBody>
+      </p:sp>
+      <p:sp>
+        <p:nvSpPr>
+          <p:cNvPr id="13" name="テキスト ボックス 12">
+            <a:extLst>
+              <a:ext uri="{FF2B5EF4-FFF2-40B4-BE49-F238E27FC236}">
+                <a16:creationId xmlns:a16="http://schemas.microsoft.com/office/drawing/2014/main" id="{BB85EF1F-CF84-48A8-90E6-8188E001D2B9}"/>
+              </a:ext>
+            </a:extLst>
+          </p:cNvPr>
+          <p:cNvSpPr txBox="1"/>
+          <p:nvPr/>
+        </p:nvSpPr>
+        <p:spPr>
+          <a:xfrm>
+            <a:off x="567542" y="5563450"/>
+            <a:ext cx="7571303" cy="461665"/>
+          </a:xfrm>
+          <a:prstGeom prst="rect">
+            <a:avLst/>
+          </a:prstGeom>
+          <a:noFill/>
+        </p:spPr>
+        <p:txBody>
+          <a:bodyPr wrap="none" rtlCol="0">
+            <a:spAutoFit/>
+          </a:bodyPr>
+          <a:lstStyle/>
+          <a:p>
+            <a:r>
+              <a:rPr lang="en-US" altLang="ja-JP" sz="2400" b="1" dirty="0">
+                <a:solidFill>
+                  <a:srgbClr val="00B050"/>
+                </a:solidFill>
+              </a:rPr>
+              <a:t>※</a:t>
+            </a:r>
+            <a:r>
+              <a:rPr lang="ja-JP" altLang="en-US" sz="2400" b="1" dirty="0">
+                <a:solidFill>
+                  <a:srgbClr val="00B050"/>
+                </a:solidFill>
+              </a:rPr>
+              <a:t>プログラムはプレハブの一部分にすぎません。。。</a:t>
+            </a:r>
+            <a:endParaRPr lang="en-US" altLang="ja-JP" sz="2400" b="1" dirty="0">
+              <a:solidFill>
+                <a:srgbClr val="00B050"/>
+              </a:solidFill>
+            </a:endParaRPr>
+          </a:p>
+        </p:txBody>
+      </p:sp>
     </p:spTree>
     <p:extLst>
       <p:ext uri="{BB962C8B-B14F-4D97-AF65-F5344CB8AC3E}">
-        <p14:creationId xmlns:p14="http://schemas.microsoft.com/office/powerpoint/2010/main" val="1731583993"/>
+        <p14:creationId xmlns:p14="http://schemas.microsoft.com/office/powerpoint/2010/main" val="1844870317"/>
       </p:ext>
     </p:extLst>
   </p:cSld>
@@ -6898,7 +7017,7 @@
         <p:spPr>
           <a:xfrm>
             <a:off x="567542" y="1216429"/>
-            <a:ext cx="5416868" cy="461665"/>
+            <a:ext cx="9187130" cy="830997"/>
           </a:xfrm>
           <a:prstGeom prst="rect">
             <a:avLst/>
@@ -6913,7 +7032,22 @@
           <a:p>
             <a:r>
               <a:rPr lang="ja-JP" altLang="en-US" sz="2400" dirty="0"/>
-              <a:t>敵の弾丸も同様に設定していきます。</a:t>
+              <a:t>画面右側にエフェクトや効果音（</a:t>
+            </a:r>
+            <a:r>
+              <a:rPr lang="en-US" altLang="ja-JP" sz="2400" dirty="0"/>
+              <a:t>SE</a:t>
+            </a:r>
+            <a:r>
+              <a:rPr lang="ja-JP" altLang="en-US" sz="2400" dirty="0"/>
+              <a:t>）を設定する枠があります。</a:t>
+            </a:r>
+            <a:endParaRPr lang="en-US" altLang="ja-JP" sz="2400" dirty="0"/>
+          </a:p>
+          <a:p>
+            <a:r>
+              <a:rPr lang="ja-JP" altLang="en-US" sz="2400" dirty="0"/>
+              <a:t>画面を参考に設定しましょう。</a:t>
             </a:r>
             <a:endParaRPr lang="en-US" altLang="ja-JP" sz="2400" dirty="0"/>
           </a:p>
@@ -6921,10 +7055,10 @@
       </p:sp>
       <p:pic>
         <p:nvPicPr>
-          <p:cNvPr id="3" name="図 2">
-            <a:extLst>
-              <a:ext uri="{FF2B5EF4-FFF2-40B4-BE49-F238E27FC236}">
-                <a16:creationId xmlns:a16="http://schemas.microsoft.com/office/drawing/2014/main" id="{65BE37D6-AA4D-4B28-A962-F3C548B33CBF}"/>
+          <p:cNvPr id="5" name="図 4">
+            <a:extLst>
+              <a:ext uri="{FF2B5EF4-FFF2-40B4-BE49-F238E27FC236}">
+                <a16:creationId xmlns:a16="http://schemas.microsoft.com/office/drawing/2014/main" id="{F2723501-3514-4C61-9CD9-A06FFBC161AE}"/>
               </a:ext>
             </a:extLst>
           </p:cNvPr>
@@ -6941,8 +7075,8 @@
         </p:blipFill>
         <p:spPr>
           <a:xfrm>
-            <a:off x="567542" y="1817794"/>
-            <a:ext cx="4439270" cy="3600953"/>
+            <a:off x="567543" y="2187127"/>
+            <a:ext cx="3346584" cy="4366074"/>
           </a:xfrm>
           <a:prstGeom prst="rect">
             <a:avLst/>
@@ -6951,10 +7085,10 @@
       </p:pic>
       <p:sp>
         <p:nvSpPr>
-          <p:cNvPr id="9" name="矢印: 右 8">
-            <a:extLst>
-              <a:ext uri="{FF2B5EF4-FFF2-40B4-BE49-F238E27FC236}">
-                <a16:creationId xmlns:a16="http://schemas.microsoft.com/office/drawing/2014/main" id="{808D124F-4D46-4D8F-8FFA-837AC6410741}"/>
+          <p:cNvPr id="11" name="正方形/長方形 10">
+            <a:extLst>
+              <a:ext uri="{FF2B5EF4-FFF2-40B4-BE49-F238E27FC236}">
+                <a16:creationId xmlns:a16="http://schemas.microsoft.com/office/drawing/2014/main" id="{629E2FFC-3BEA-43C2-BE26-711068EAAA9E}"/>
               </a:ext>
             </a:extLst>
           </p:cNvPr>
@@ -6962,19 +7096,17 @@
           <p:nvPr/>
         </p:nvSpPr>
         <p:spPr>
-          <a:xfrm rot="13245323">
-            <a:off x="1455852" y="3772899"/>
-            <a:ext cx="660400" cy="502574"/>
-          </a:xfrm>
-          <a:prstGeom prst="rightArrow">
-            <a:avLst/>
-          </a:prstGeom>
-          <a:solidFill>
-            <a:srgbClr val="FF0000"/>
-          </a:solidFill>
-          <a:ln>
+          <a:xfrm>
+            <a:off x="440267" y="5715001"/>
+            <a:ext cx="3547533" cy="507999"/>
+          </a:xfrm>
+          <a:prstGeom prst="rect">
+            <a:avLst/>
+          </a:prstGeom>
+          <a:noFill/>
+          <a:ln w="38100">
             <a:solidFill>
-              <a:schemeClr val="tx1"/>
+              <a:srgbClr val="FF0000"/>
             </a:solidFill>
           </a:ln>
         </p:spPr>
@@ -7003,146 +7135,10 @@
           </a:p>
         </p:txBody>
       </p:sp>
-      <p:sp>
-        <p:nvSpPr>
-          <p:cNvPr id="10" name="矢印: 右 9">
-            <a:extLst>
-              <a:ext uri="{FF2B5EF4-FFF2-40B4-BE49-F238E27FC236}">
-                <a16:creationId xmlns:a16="http://schemas.microsoft.com/office/drawing/2014/main" id="{32FEAF0C-C0A1-4E3C-9747-4CC90F8191C8}"/>
-              </a:ext>
-            </a:extLst>
-          </p:cNvPr>
-          <p:cNvSpPr/>
-          <p:nvPr/>
-        </p:nvSpPr>
-        <p:spPr>
-          <a:xfrm rot="13245323">
-            <a:off x="3005251" y="3268331"/>
-            <a:ext cx="660400" cy="502574"/>
-          </a:xfrm>
-          <a:prstGeom prst="rightArrow">
-            <a:avLst/>
-          </a:prstGeom>
-          <a:solidFill>
-            <a:srgbClr val="FF0000"/>
-          </a:solidFill>
-          <a:ln>
-            <a:solidFill>
-              <a:schemeClr val="tx1"/>
-            </a:solidFill>
-          </a:ln>
-        </p:spPr>
-        <p:style>
-          <a:lnRef idx="2">
-            <a:schemeClr val="accent1">
-              <a:shade val="50000"/>
-            </a:schemeClr>
-          </a:lnRef>
-          <a:fillRef idx="1">
-            <a:schemeClr val="accent1"/>
-          </a:fillRef>
-          <a:effectRef idx="0">
-            <a:schemeClr val="accent1"/>
-          </a:effectRef>
-          <a:fontRef idx="minor">
-            <a:schemeClr val="lt1"/>
-          </a:fontRef>
-        </p:style>
-        <p:txBody>
-          <a:bodyPr rtlCol="0" anchor="ctr"/>
-          <a:lstStyle/>
-          <a:p>
-            <a:pPr algn="ctr"/>
-            <a:endParaRPr kumimoji="1" lang="ja-JP" altLang="en-US"/>
-          </a:p>
-        </p:txBody>
-      </p:sp>
-      <p:pic>
-        <p:nvPicPr>
-          <p:cNvPr id="5" name="図 4">
-            <a:extLst>
-              <a:ext uri="{FF2B5EF4-FFF2-40B4-BE49-F238E27FC236}">
-                <a16:creationId xmlns:a16="http://schemas.microsoft.com/office/drawing/2014/main" id="{7978F481-3327-4AB4-9AD9-C8F0CE6E4A0B}"/>
-              </a:ext>
-            </a:extLst>
-          </p:cNvPr>
-          <p:cNvPicPr>
-            <a:picLocks noChangeAspect="1"/>
-          </p:cNvPicPr>
-          <p:nvPr/>
-        </p:nvPicPr>
-        <p:blipFill>
-          <a:blip r:embed="rId3"/>
-          <a:stretch>
-            <a:fillRect/>
-          </a:stretch>
-        </p:blipFill>
-        <p:spPr>
-          <a:xfrm>
-            <a:off x="5427895" y="1817794"/>
-            <a:ext cx="5407490" cy="3600952"/>
-          </a:xfrm>
-          <a:prstGeom prst="rect">
-            <a:avLst/>
-          </a:prstGeom>
-        </p:spPr>
-      </p:pic>
-      <p:sp>
-        <p:nvSpPr>
-          <p:cNvPr id="11" name="正方形/長方形 10">
-            <a:extLst>
-              <a:ext uri="{FF2B5EF4-FFF2-40B4-BE49-F238E27FC236}">
-                <a16:creationId xmlns:a16="http://schemas.microsoft.com/office/drawing/2014/main" id="{39B29E76-4426-44E7-B483-D06C7CB2071A}"/>
-              </a:ext>
-            </a:extLst>
-          </p:cNvPr>
-          <p:cNvSpPr/>
-          <p:nvPr/>
-        </p:nvSpPr>
-        <p:spPr>
-          <a:xfrm>
-            <a:off x="5427895" y="3302001"/>
-            <a:ext cx="5407490" cy="787400"/>
-          </a:xfrm>
-          <a:prstGeom prst="rect">
-            <a:avLst/>
-          </a:prstGeom>
-          <a:noFill/>
-          <a:ln w="38100">
-            <a:solidFill>
-              <a:srgbClr val="FF0000"/>
-            </a:solidFill>
-          </a:ln>
-        </p:spPr>
-        <p:style>
-          <a:lnRef idx="2">
-            <a:schemeClr val="accent1">
-              <a:shade val="50000"/>
-            </a:schemeClr>
-          </a:lnRef>
-          <a:fillRef idx="1">
-            <a:schemeClr val="accent1"/>
-          </a:fillRef>
-          <a:effectRef idx="0">
-            <a:schemeClr val="accent1"/>
-          </a:effectRef>
-          <a:fontRef idx="minor">
-            <a:schemeClr val="lt1"/>
-          </a:fontRef>
-        </p:style>
-        <p:txBody>
-          <a:bodyPr rtlCol="0" anchor="ctr"/>
-          <a:lstStyle/>
-          <a:p>
-            <a:pPr algn="ctr"/>
-            <a:endParaRPr kumimoji="1" lang="ja-JP" altLang="en-US"/>
-          </a:p>
-        </p:txBody>
-      </p:sp>
     </p:spTree>
     <p:extLst>
       <p:ext uri="{BB962C8B-B14F-4D97-AF65-F5344CB8AC3E}">
-        <p14:creationId xmlns:p14="http://schemas.microsoft.com/office/powerpoint/2010/main" val="776213710"/>
+        <p14:creationId xmlns:p14="http://schemas.microsoft.com/office/powerpoint/2010/main" val="1731583993"/>
       </p:ext>
     </p:extLst>
   </p:cSld>
@@ -7219,7 +7215,7 @@
         <p:spPr>
           <a:xfrm>
             <a:off x="567542" y="1216429"/>
-            <a:ext cx="6647974" cy="830997"/>
+            <a:ext cx="5416868" cy="461665"/>
           </a:xfrm>
           <a:prstGeom prst="rect">
             <a:avLst/>
@@ -7234,14 +7230,7 @@
           <a:p>
             <a:r>
               <a:rPr lang="ja-JP" altLang="en-US" sz="2400" dirty="0"/>
-              <a:t>動作確認してみましょう。</a:t>
-            </a:r>
-            <a:endParaRPr lang="en-US" altLang="ja-JP" sz="2400" dirty="0"/>
-          </a:p>
-          <a:p>
-            <a:r>
-              <a:rPr lang="ja-JP" altLang="en-US" sz="2400" dirty="0"/>
-              <a:t>弾丸に音とエフェクトがついているはずです。</a:t>
+              <a:t>敵の弾丸も同様に設定していきます。</a:t>
             </a:r>
             <a:endParaRPr lang="en-US" altLang="ja-JP" sz="2400" dirty="0"/>
           </a:p>
@@ -7249,10 +7238,10 @@
       </p:sp>
       <p:pic>
         <p:nvPicPr>
-          <p:cNvPr id="12" name="図 11">
-            <a:extLst>
-              <a:ext uri="{FF2B5EF4-FFF2-40B4-BE49-F238E27FC236}">
-                <a16:creationId xmlns:a16="http://schemas.microsoft.com/office/drawing/2014/main" id="{6740F768-1DE8-4E14-9C9F-415E5272A0D6}"/>
+          <p:cNvPr id="3" name="図 2">
+            <a:extLst>
+              <a:ext uri="{FF2B5EF4-FFF2-40B4-BE49-F238E27FC236}">
+                <a16:creationId xmlns:a16="http://schemas.microsoft.com/office/drawing/2014/main" id="{65BE37D6-AA4D-4B28-A962-F3C548B33CBF}"/>
               </a:ext>
             </a:extLst>
           </p:cNvPr>
@@ -7269,18 +7258,208 @@
         </p:blipFill>
         <p:spPr>
           <a:xfrm>
-            <a:off x="567542" y="2187126"/>
-            <a:ext cx="8127725" cy="4368652"/>
+            <a:off x="567542" y="1817794"/>
+            <a:ext cx="4439270" cy="3600953"/>
           </a:xfrm>
           <a:prstGeom prst="rect">
             <a:avLst/>
           </a:prstGeom>
         </p:spPr>
       </p:pic>
+      <p:sp>
+        <p:nvSpPr>
+          <p:cNvPr id="9" name="矢印: 右 8">
+            <a:extLst>
+              <a:ext uri="{FF2B5EF4-FFF2-40B4-BE49-F238E27FC236}">
+                <a16:creationId xmlns:a16="http://schemas.microsoft.com/office/drawing/2014/main" id="{808D124F-4D46-4D8F-8FFA-837AC6410741}"/>
+              </a:ext>
+            </a:extLst>
+          </p:cNvPr>
+          <p:cNvSpPr/>
+          <p:nvPr/>
+        </p:nvSpPr>
+        <p:spPr>
+          <a:xfrm rot="13245323">
+            <a:off x="1455852" y="3772899"/>
+            <a:ext cx="660400" cy="502574"/>
+          </a:xfrm>
+          <a:prstGeom prst="rightArrow">
+            <a:avLst/>
+          </a:prstGeom>
+          <a:solidFill>
+            <a:srgbClr val="FF0000"/>
+          </a:solidFill>
+          <a:ln>
+            <a:solidFill>
+              <a:schemeClr val="tx1"/>
+            </a:solidFill>
+          </a:ln>
+        </p:spPr>
+        <p:style>
+          <a:lnRef idx="2">
+            <a:schemeClr val="accent1">
+              <a:shade val="50000"/>
+            </a:schemeClr>
+          </a:lnRef>
+          <a:fillRef idx="1">
+            <a:schemeClr val="accent1"/>
+          </a:fillRef>
+          <a:effectRef idx="0">
+            <a:schemeClr val="accent1"/>
+          </a:effectRef>
+          <a:fontRef idx="minor">
+            <a:schemeClr val="lt1"/>
+          </a:fontRef>
+        </p:style>
+        <p:txBody>
+          <a:bodyPr rtlCol="0" anchor="ctr"/>
+          <a:lstStyle/>
+          <a:p>
+            <a:pPr algn="ctr"/>
+            <a:endParaRPr kumimoji="1" lang="ja-JP" altLang="en-US"/>
+          </a:p>
+        </p:txBody>
+      </p:sp>
+      <p:sp>
+        <p:nvSpPr>
+          <p:cNvPr id="10" name="矢印: 右 9">
+            <a:extLst>
+              <a:ext uri="{FF2B5EF4-FFF2-40B4-BE49-F238E27FC236}">
+                <a16:creationId xmlns:a16="http://schemas.microsoft.com/office/drawing/2014/main" id="{32FEAF0C-C0A1-4E3C-9747-4CC90F8191C8}"/>
+              </a:ext>
+            </a:extLst>
+          </p:cNvPr>
+          <p:cNvSpPr/>
+          <p:nvPr/>
+        </p:nvSpPr>
+        <p:spPr>
+          <a:xfrm rot="13245323">
+            <a:off x="3005251" y="3268331"/>
+            <a:ext cx="660400" cy="502574"/>
+          </a:xfrm>
+          <a:prstGeom prst="rightArrow">
+            <a:avLst/>
+          </a:prstGeom>
+          <a:solidFill>
+            <a:srgbClr val="FF0000"/>
+          </a:solidFill>
+          <a:ln>
+            <a:solidFill>
+              <a:schemeClr val="tx1"/>
+            </a:solidFill>
+          </a:ln>
+        </p:spPr>
+        <p:style>
+          <a:lnRef idx="2">
+            <a:schemeClr val="accent1">
+              <a:shade val="50000"/>
+            </a:schemeClr>
+          </a:lnRef>
+          <a:fillRef idx="1">
+            <a:schemeClr val="accent1"/>
+          </a:fillRef>
+          <a:effectRef idx="0">
+            <a:schemeClr val="accent1"/>
+          </a:effectRef>
+          <a:fontRef idx="minor">
+            <a:schemeClr val="lt1"/>
+          </a:fontRef>
+        </p:style>
+        <p:txBody>
+          <a:bodyPr rtlCol="0" anchor="ctr"/>
+          <a:lstStyle/>
+          <a:p>
+            <a:pPr algn="ctr"/>
+            <a:endParaRPr kumimoji="1" lang="ja-JP" altLang="en-US"/>
+          </a:p>
+        </p:txBody>
+      </p:sp>
+      <p:pic>
+        <p:nvPicPr>
+          <p:cNvPr id="5" name="図 4">
+            <a:extLst>
+              <a:ext uri="{FF2B5EF4-FFF2-40B4-BE49-F238E27FC236}">
+                <a16:creationId xmlns:a16="http://schemas.microsoft.com/office/drawing/2014/main" id="{7978F481-3327-4AB4-9AD9-C8F0CE6E4A0B}"/>
+              </a:ext>
+            </a:extLst>
+          </p:cNvPr>
+          <p:cNvPicPr>
+            <a:picLocks noChangeAspect="1"/>
+          </p:cNvPicPr>
+          <p:nvPr/>
+        </p:nvPicPr>
+        <p:blipFill>
+          <a:blip r:embed="rId3"/>
+          <a:stretch>
+            <a:fillRect/>
+          </a:stretch>
+        </p:blipFill>
+        <p:spPr>
+          <a:xfrm>
+            <a:off x="5427895" y="1817794"/>
+            <a:ext cx="5407490" cy="3600952"/>
+          </a:xfrm>
+          <a:prstGeom prst="rect">
+            <a:avLst/>
+          </a:prstGeom>
+        </p:spPr>
+      </p:pic>
+      <p:sp>
+        <p:nvSpPr>
+          <p:cNvPr id="11" name="正方形/長方形 10">
+            <a:extLst>
+              <a:ext uri="{FF2B5EF4-FFF2-40B4-BE49-F238E27FC236}">
+                <a16:creationId xmlns:a16="http://schemas.microsoft.com/office/drawing/2014/main" id="{39B29E76-4426-44E7-B483-D06C7CB2071A}"/>
+              </a:ext>
+            </a:extLst>
+          </p:cNvPr>
+          <p:cNvSpPr/>
+          <p:nvPr/>
+        </p:nvSpPr>
+        <p:spPr>
+          <a:xfrm>
+            <a:off x="5427895" y="3302001"/>
+            <a:ext cx="5407490" cy="787400"/>
+          </a:xfrm>
+          <a:prstGeom prst="rect">
+            <a:avLst/>
+          </a:prstGeom>
+          <a:noFill/>
+          <a:ln w="38100">
+            <a:solidFill>
+              <a:srgbClr val="FF0000"/>
+            </a:solidFill>
+          </a:ln>
+        </p:spPr>
+        <p:style>
+          <a:lnRef idx="2">
+            <a:schemeClr val="accent1">
+              <a:shade val="50000"/>
+            </a:schemeClr>
+          </a:lnRef>
+          <a:fillRef idx="1">
+            <a:schemeClr val="accent1"/>
+          </a:fillRef>
+          <a:effectRef idx="0">
+            <a:schemeClr val="accent1"/>
+          </a:effectRef>
+          <a:fontRef idx="minor">
+            <a:schemeClr val="lt1"/>
+          </a:fontRef>
+        </p:style>
+        <p:txBody>
+          <a:bodyPr rtlCol="0" anchor="ctr"/>
+          <a:lstStyle/>
+          <a:p>
+            <a:pPr algn="ctr"/>
+            <a:endParaRPr kumimoji="1" lang="ja-JP" altLang="en-US"/>
+          </a:p>
+        </p:txBody>
+      </p:sp>
     </p:spTree>
     <p:extLst>
       <p:ext uri="{BB962C8B-B14F-4D97-AF65-F5344CB8AC3E}">
-        <p14:creationId xmlns:p14="http://schemas.microsoft.com/office/powerpoint/2010/main" val="1503838686"/>
+        <p14:creationId xmlns:p14="http://schemas.microsoft.com/office/powerpoint/2010/main" val="776213710"/>
       </p:ext>
     </p:extLst>
   </p:cSld>
@@ -7357,7 +7536,7 @@
         <p:spPr>
           <a:xfrm>
             <a:off x="567542" y="1216429"/>
-            <a:ext cx="7789312" cy="830997"/>
+            <a:ext cx="6647974" cy="830997"/>
           </a:xfrm>
           <a:prstGeom prst="rect">
             <a:avLst/>
@@ -7372,22 +7551,14 @@
           <a:p>
             <a:r>
               <a:rPr lang="ja-JP" altLang="en-US" sz="2400" dirty="0"/>
-              <a:t>同様にやっつけた時の音やエフェクトを追加します。</a:t>
+              <a:t>動作確認してみましょう。</a:t>
             </a:r>
             <a:endParaRPr lang="en-US" altLang="ja-JP" sz="2400" dirty="0"/>
           </a:p>
           <a:p>
             <a:r>
-              <a:rPr lang="en-US" altLang="ja-JP" sz="2400" b="1" dirty="0" err="1">
-                <a:solidFill>
-                  <a:srgbClr val="FF0000"/>
-                </a:solidFill>
-              </a:rPr>
-              <a:t>EnemyBase</a:t>
-            </a:r>
-            <a:r>
               <a:rPr lang="ja-JP" altLang="en-US" sz="2400" dirty="0"/>
-              <a:t>を書きましょう。保存を忘れないように。</a:t>
+              <a:t>弾丸に音とエフェクトがついているはずです。</a:t>
             </a:r>
             <a:endParaRPr lang="en-US" altLang="ja-JP" sz="2400" dirty="0"/>
           </a:p>
@@ -7395,10 +7566,10 @@
       </p:sp>
       <p:pic>
         <p:nvPicPr>
-          <p:cNvPr id="3" name="図 2">
-            <a:extLst>
-              <a:ext uri="{FF2B5EF4-FFF2-40B4-BE49-F238E27FC236}">
-                <a16:creationId xmlns:a16="http://schemas.microsoft.com/office/drawing/2014/main" id="{F58A160B-68F8-4D76-9D76-2869AAC9CDB9}"/>
+          <p:cNvPr id="12" name="図 11">
+            <a:extLst>
+              <a:ext uri="{FF2B5EF4-FFF2-40B4-BE49-F238E27FC236}">
+                <a16:creationId xmlns:a16="http://schemas.microsoft.com/office/drawing/2014/main" id="{6740F768-1DE8-4E14-9C9F-415E5272A0D6}"/>
               </a:ext>
             </a:extLst>
           </p:cNvPr>
@@ -7415,124 +7586,18 @@
         </p:blipFill>
         <p:spPr>
           <a:xfrm>
-            <a:off x="567542" y="2187127"/>
-            <a:ext cx="10515325" cy="4184748"/>
+            <a:off x="567542" y="2187126"/>
+            <a:ext cx="8127725" cy="4368652"/>
           </a:xfrm>
           <a:prstGeom prst="rect">
             <a:avLst/>
           </a:prstGeom>
         </p:spPr>
       </p:pic>
-      <p:sp>
-        <p:nvSpPr>
-          <p:cNvPr id="7" name="矢印: 右 6">
-            <a:extLst>
-              <a:ext uri="{FF2B5EF4-FFF2-40B4-BE49-F238E27FC236}">
-                <a16:creationId xmlns:a16="http://schemas.microsoft.com/office/drawing/2014/main" id="{56C6300A-F185-419B-9B2A-5A163B25C9B9}"/>
-              </a:ext>
-            </a:extLst>
-          </p:cNvPr>
-          <p:cNvSpPr/>
-          <p:nvPr/>
-        </p:nvSpPr>
-        <p:spPr>
-          <a:xfrm rot="13245323">
-            <a:off x="4437169" y="2850030"/>
-            <a:ext cx="660400" cy="502574"/>
-          </a:xfrm>
-          <a:prstGeom prst="rightArrow">
-            <a:avLst/>
-          </a:prstGeom>
-          <a:solidFill>
-            <a:srgbClr val="FF0000"/>
-          </a:solidFill>
-          <a:ln>
-            <a:solidFill>
-              <a:schemeClr val="tx1"/>
-            </a:solidFill>
-          </a:ln>
-        </p:spPr>
-        <p:style>
-          <a:lnRef idx="2">
-            <a:schemeClr val="accent1">
-              <a:shade val="50000"/>
-            </a:schemeClr>
-          </a:lnRef>
-          <a:fillRef idx="1">
-            <a:schemeClr val="accent1"/>
-          </a:fillRef>
-          <a:effectRef idx="0">
-            <a:schemeClr val="accent1"/>
-          </a:effectRef>
-          <a:fontRef idx="minor">
-            <a:schemeClr val="lt1"/>
-          </a:fontRef>
-        </p:style>
-        <p:txBody>
-          <a:bodyPr rtlCol="0" anchor="ctr"/>
-          <a:lstStyle/>
-          <a:p>
-            <a:pPr algn="ctr"/>
-            <a:endParaRPr kumimoji="1" lang="ja-JP" altLang="en-US"/>
-          </a:p>
-        </p:txBody>
-      </p:sp>
-      <p:sp>
-        <p:nvSpPr>
-          <p:cNvPr id="8" name="正方形/長方形 7">
-            <a:extLst>
-              <a:ext uri="{FF2B5EF4-FFF2-40B4-BE49-F238E27FC236}">
-                <a16:creationId xmlns:a16="http://schemas.microsoft.com/office/drawing/2014/main" id="{B4E5E8CD-9199-4E0F-9C18-DFBE25862B28}"/>
-              </a:ext>
-            </a:extLst>
-          </p:cNvPr>
-          <p:cNvSpPr/>
-          <p:nvPr/>
-        </p:nvSpPr>
-        <p:spPr>
-          <a:xfrm>
-            <a:off x="5435099" y="3996267"/>
-            <a:ext cx="5647767" cy="872065"/>
-          </a:xfrm>
-          <a:prstGeom prst="rect">
-            <a:avLst/>
-          </a:prstGeom>
-          <a:noFill/>
-          <a:ln w="38100">
-            <a:solidFill>
-              <a:srgbClr val="FF0000"/>
-            </a:solidFill>
-          </a:ln>
-        </p:spPr>
-        <p:style>
-          <a:lnRef idx="2">
-            <a:schemeClr val="accent1">
-              <a:shade val="50000"/>
-            </a:schemeClr>
-          </a:lnRef>
-          <a:fillRef idx="1">
-            <a:schemeClr val="accent1"/>
-          </a:fillRef>
-          <a:effectRef idx="0">
-            <a:schemeClr val="accent1"/>
-          </a:effectRef>
-          <a:fontRef idx="minor">
-            <a:schemeClr val="lt1"/>
-          </a:fontRef>
-        </p:style>
-        <p:txBody>
-          <a:bodyPr rtlCol="0" anchor="ctr"/>
-          <a:lstStyle/>
-          <a:p>
-            <a:pPr algn="ctr"/>
-            <a:endParaRPr kumimoji="1" lang="ja-JP" altLang="en-US"/>
-          </a:p>
-        </p:txBody>
-      </p:sp>
     </p:spTree>
     <p:extLst>
       <p:ext uri="{BB962C8B-B14F-4D97-AF65-F5344CB8AC3E}">
-        <p14:creationId xmlns:p14="http://schemas.microsoft.com/office/powerpoint/2010/main" val="3969628320"/>
+        <p14:creationId xmlns:p14="http://schemas.microsoft.com/office/powerpoint/2010/main" val="1503838686"/>
       </p:ext>
     </p:extLst>
   </p:cSld>
@@ -7609,7 +7674,7 @@
         <p:spPr>
           <a:xfrm>
             <a:off x="567542" y="1216429"/>
-            <a:ext cx="4317207" cy="461665"/>
+            <a:ext cx="7789312" cy="830997"/>
           </a:xfrm>
           <a:prstGeom prst="rect">
             <a:avLst/>
@@ -7623,12 +7688,23 @@
           <a:lstStyle/>
           <a:p>
             <a:r>
-              <a:rPr lang="en-US" altLang="ja-JP" sz="2400" dirty="0"/>
-              <a:t>Unity</a:t>
-            </a:r>
-            <a:r>
               <a:rPr lang="ja-JP" altLang="en-US" sz="2400" dirty="0"/>
-              <a:t>側も同様に設定します。</a:t>
+              <a:t>同様にやっつけた時の音やエフェクトを追加します。</a:t>
+            </a:r>
+            <a:endParaRPr lang="en-US" altLang="ja-JP" sz="2400" dirty="0"/>
+          </a:p>
+          <a:p>
+            <a:r>
+              <a:rPr lang="en-US" altLang="ja-JP" sz="2400" b="1" dirty="0" err="1">
+                <a:solidFill>
+                  <a:srgbClr val="FF0000"/>
+                </a:solidFill>
+              </a:rPr>
+              <a:t>EnemyBase</a:t>
+            </a:r>
+            <a:r>
+              <a:rPr lang="ja-JP" altLang="en-US" sz="2400" dirty="0"/>
+              <a:t>を書きましょう。保存を忘れないように。</a:t>
             </a:r>
             <a:endParaRPr lang="en-US" altLang="ja-JP" sz="2400" dirty="0"/>
           </a:p>
@@ -7636,10 +7712,10 @@
       </p:sp>
       <p:pic>
         <p:nvPicPr>
-          <p:cNvPr id="5" name="図 4">
-            <a:extLst>
-              <a:ext uri="{FF2B5EF4-FFF2-40B4-BE49-F238E27FC236}">
-                <a16:creationId xmlns:a16="http://schemas.microsoft.com/office/drawing/2014/main" id="{7BFDD071-B31A-4E1C-BF8E-F987F1241E4B}"/>
+          <p:cNvPr id="3" name="図 2">
+            <a:extLst>
+              <a:ext uri="{FF2B5EF4-FFF2-40B4-BE49-F238E27FC236}">
+                <a16:creationId xmlns:a16="http://schemas.microsoft.com/office/drawing/2014/main" id="{F58A160B-68F8-4D76-9D76-2869AAC9CDB9}"/>
               </a:ext>
             </a:extLst>
           </p:cNvPr>
@@ -7656,8 +7732,8 @@
         </p:blipFill>
         <p:spPr>
           <a:xfrm>
-            <a:off x="567542" y="1725461"/>
-            <a:ext cx="4458322" cy="2457793"/>
+            <a:off x="567542" y="2187127"/>
+            <a:ext cx="10515325" cy="4184748"/>
           </a:xfrm>
           <a:prstGeom prst="rect">
             <a:avLst/>
@@ -7666,10 +7742,10 @@
       </p:pic>
       <p:sp>
         <p:nvSpPr>
-          <p:cNvPr id="9" name="矢印: 右 8">
-            <a:extLst>
-              <a:ext uri="{FF2B5EF4-FFF2-40B4-BE49-F238E27FC236}">
-                <a16:creationId xmlns:a16="http://schemas.microsoft.com/office/drawing/2014/main" id="{3512D04A-575E-4EFF-8117-697A240D9374}"/>
+          <p:cNvPr id="7" name="矢印: 右 6">
+            <a:extLst>
+              <a:ext uri="{FF2B5EF4-FFF2-40B4-BE49-F238E27FC236}">
+                <a16:creationId xmlns:a16="http://schemas.microsoft.com/office/drawing/2014/main" id="{56C6300A-F185-419B-9B2A-5A163B25C9B9}"/>
               </a:ext>
             </a:extLst>
           </p:cNvPr>
@@ -7678,7 +7754,7 @@
         </p:nvSpPr>
         <p:spPr>
           <a:xfrm rot="13245323">
-            <a:off x="2964329" y="3177712"/>
+            <a:off x="4437169" y="2850030"/>
             <a:ext cx="660400" cy="502574"/>
           </a:xfrm>
           <a:prstGeom prst="rightArrow">
@@ -7718,42 +7794,12 @@
           </a:p>
         </p:txBody>
       </p:sp>
-      <p:pic>
-        <p:nvPicPr>
-          <p:cNvPr id="11" name="図 10">
-            <a:extLst>
-              <a:ext uri="{FF2B5EF4-FFF2-40B4-BE49-F238E27FC236}">
-                <a16:creationId xmlns:a16="http://schemas.microsoft.com/office/drawing/2014/main" id="{8FD7C77C-37A8-4ADC-883D-56EB66479C1B}"/>
-              </a:ext>
-            </a:extLst>
-          </p:cNvPr>
-          <p:cNvPicPr>
-            <a:picLocks noChangeAspect="1"/>
-          </p:cNvPicPr>
-          <p:nvPr/>
-        </p:nvPicPr>
-        <p:blipFill>
-          <a:blip r:embed="rId3"/>
-          <a:stretch>
-            <a:fillRect/>
-          </a:stretch>
-        </p:blipFill>
-        <p:spPr>
-          <a:xfrm>
-            <a:off x="5795798" y="1725461"/>
-            <a:ext cx="3203567" cy="4971540"/>
-          </a:xfrm>
-          <a:prstGeom prst="rect">
-            <a:avLst/>
-          </a:prstGeom>
-        </p:spPr>
-      </p:pic>
-      <p:sp>
-        <p:nvSpPr>
-          <p:cNvPr id="12" name="矢印: 右 11">
-            <a:extLst>
-              <a:ext uri="{FF2B5EF4-FFF2-40B4-BE49-F238E27FC236}">
-                <a16:creationId xmlns:a16="http://schemas.microsoft.com/office/drawing/2014/main" id="{EAEBECA0-5F68-4615-B4DD-9D70511BC221}"/>
+      <p:sp>
+        <p:nvSpPr>
+          <p:cNvPr id="8" name="正方形/長方形 7">
+            <a:extLst>
+              <a:ext uri="{FF2B5EF4-FFF2-40B4-BE49-F238E27FC236}">
+                <a16:creationId xmlns:a16="http://schemas.microsoft.com/office/drawing/2014/main" id="{B4E5E8CD-9199-4E0F-9C18-DFBE25862B28}"/>
               </a:ext>
             </a:extLst>
           </p:cNvPr>
@@ -7761,19 +7807,17 @@
           <p:nvPr/>
         </p:nvSpPr>
         <p:spPr>
-          <a:xfrm rot="13245323">
-            <a:off x="1600836" y="3959943"/>
-            <a:ext cx="660400" cy="502574"/>
-          </a:xfrm>
-          <a:prstGeom prst="rightArrow">
-            <a:avLst/>
-          </a:prstGeom>
-          <a:solidFill>
-            <a:srgbClr val="FF0000"/>
-          </a:solidFill>
-          <a:ln>
+          <a:xfrm>
+            <a:off x="5435099" y="3996267"/>
+            <a:ext cx="5647767" cy="872065"/>
+          </a:xfrm>
+          <a:prstGeom prst="rect">
+            <a:avLst/>
+          </a:prstGeom>
+          <a:noFill/>
+          <a:ln w="38100">
             <a:solidFill>
-              <a:schemeClr val="tx1"/>
+              <a:srgbClr val="FF0000"/>
             </a:solidFill>
           </a:ln>
         </p:spPr>
@@ -7802,62 +7846,10 @@
           </a:p>
         </p:txBody>
       </p:sp>
-      <p:sp>
-        <p:nvSpPr>
-          <p:cNvPr id="13" name="正方形/長方形 12">
-            <a:extLst>
-              <a:ext uri="{FF2B5EF4-FFF2-40B4-BE49-F238E27FC236}">
-                <a16:creationId xmlns:a16="http://schemas.microsoft.com/office/drawing/2014/main" id="{E9F16CEB-40A7-489D-827E-BACA65549C50}"/>
-              </a:ext>
-            </a:extLst>
-          </p:cNvPr>
-          <p:cNvSpPr/>
-          <p:nvPr/>
-        </p:nvSpPr>
-        <p:spPr>
-          <a:xfrm>
-            <a:off x="5795798" y="5139267"/>
-            <a:ext cx="3203568" cy="372533"/>
-          </a:xfrm>
-          <a:prstGeom prst="rect">
-            <a:avLst/>
-          </a:prstGeom>
-          <a:noFill/>
-          <a:ln w="38100">
-            <a:solidFill>
-              <a:srgbClr val="FF0000"/>
-            </a:solidFill>
-          </a:ln>
-        </p:spPr>
-        <p:style>
-          <a:lnRef idx="2">
-            <a:schemeClr val="accent1">
-              <a:shade val="50000"/>
-            </a:schemeClr>
-          </a:lnRef>
-          <a:fillRef idx="1">
-            <a:schemeClr val="accent1"/>
-          </a:fillRef>
-          <a:effectRef idx="0">
-            <a:schemeClr val="accent1"/>
-          </a:effectRef>
-          <a:fontRef idx="minor">
-            <a:schemeClr val="lt1"/>
-          </a:fontRef>
-        </p:style>
-        <p:txBody>
-          <a:bodyPr rtlCol="0" anchor="ctr"/>
-          <a:lstStyle/>
-          <a:p>
-            <a:pPr algn="ctr"/>
-            <a:endParaRPr kumimoji="1" lang="ja-JP" altLang="en-US"/>
-          </a:p>
-        </p:txBody>
-      </p:sp>
     </p:spTree>
     <p:extLst>
       <p:ext uri="{BB962C8B-B14F-4D97-AF65-F5344CB8AC3E}">
-        <p14:creationId xmlns:p14="http://schemas.microsoft.com/office/powerpoint/2010/main" val="967845903"/>
+        <p14:creationId xmlns:p14="http://schemas.microsoft.com/office/powerpoint/2010/main" val="3969628320"/>
       </p:ext>
     </p:extLst>
   </p:cSld>
@@ -7934,7 +7926,7 @@
         <p:spPr>
           <a:xfrm>
             <a:off x="567542" y="1216429"/>
-            <a:ext cx="4185761" cy="461665"/>
+            <a:ext cx="4317207" cy="461665"/>
           </a:xfrm>
           <a:prstGeom prst="rect">
             <a:avLst/>
@@ -7948,8 +7940,12 @@
           <a:lstStyle/>
           <a:p>
             <a:r>
+              <a:rPr lang="en-US" altLang="ja-JP" sz="2400" dirty="0"/>
+              <a:t>Unity</a:t>
+            </a:r>
+            <a:r>
               <a:rPr lang="ja-JP" altLang="en-US" sz="2400" dirty="0"/>
-              <a:t>プレイヤー側も追加します。</a:t>
+              <a:t>側も同様に設定します。</a:t>
             </a:r>
             <a:endParaRPr lang="en-US" altLang="ja-JP" sz="2400" dirty="0"/>
           </a:p>
@@ -7957,10 +7953,10 @@
       </p:sp>
       <p:pic>
         <p:nvPicPr>
-          <p:cNvPr id="3" name="図 2">
-            <a:extLst>
-              <a:ext uri="{FF2B5EF4-FFF2-40B4-BE49-F238E27FC236}">
-                <a16:creationId xmlns:a16="http://schemas.microsoft.com/office/drawing/2014/main" id="{EAC2D327-7B4C-44C0-9DA8-0783BCDAA213}"/>
+          <p:cNvPr id="5" name="図 4">
+            <a:extLst>
+              <a:ext uri="{FF2B5EF4-FFF2-40B4-BE49-F238E27FC236}">
+                <a16:creationId xmlns:a16="http://schemas.microsoft.com/office/drawing/2014/main" id="{7BFDD071-B31A-4E1C-BF8E-F987F1241E4B}"/>
               </a:ext>
             </a:extLst>
           </p:cNvPr>
@@ -7977,8 +7973,8 @@
         </p:blipFill>
         <p:spPr>
           <a:xfrm>
-            <a:off x="567542" y="1817794"/>
-            <a:ext cx="9831172" cy="3429479"/>
+            <a:off x="567542" y="1725461"/>
+            <a:ext cx="4458322" cy="2457793"/>
           </a:xfrm>
           <a:prstGeom prst="rect">
             <a:avLst/>
@@ -7987,10 +7983,10 @@
       </p:pic>
       <p:sp>
         <p:nvSpPr>
-          <p:cNvPr id="14" name="矢印: 右 13">
-            <a:extLst>
-              <a:ext uri="{FF2B5EF4-FFF2-40B4-BE49-F238E27FC236}">
-                <a16:creationId xmlns:a16="http://schemas.microsoft.com/office/drawing/2014/main" id="{BCC2B3AA-1498-4CDE-A984-91BC68245817}"/>
+          <p:cNvPr id="9" name="矢印: 右 8">
+            <a:extLst>
+              <a:ext uri="{FF2B5EF4-FFF2-40B4-BE49-F238E27FC236}">
+                <a16:creationId xmlns:a16="http://schemas.microsoft.com/office/drawing/2014/main" id="{3512D04A-575E-4EFF-8117-697A240D9374}"/>
               </a:ext>
             </a:extLst>
           </p:cNvPr>
@@ -7999,7 +7995,7 @@
         </p:nvSpPr>
         <p:spPr>
           <a:xfrm rot="13245323">
-            <a:off x="3040169" y="1972423"/>
+            <a:off x="2964329" y="3177712"/>
             <a:ext cx="660400" cy="502574"/>
           </a:xfrm>
           <a:prstGeom prst="rightArrow">
@@ -8039,12 +8035,42 @@
           </a:p>
         </p:txBody>
       </p:sp>
-      <p:sp>
-        <p:nvSpPr>
-          <p:cNvPr id="15" name="正方形/長方形 14">
-            <a:extLst>
-              <a:ext uri="{FF2B5EF4-FFF2-40B4-BE49-F238E27FC236}">
-                <a16:creationId xmlns:a16="http://schemas.microsoft.com/office/drawing/2014/main" id="{970F87EE-F181-4E7B-A7A2-121577625E00}"/>
+      <p:pic>
+        <p:nvPicPr>
+          <p:cNvPr id="11" name="図 10">
+            <a:extLst>
+              <a:ext uri="{FF2B5EF4-FFF2-40B4-BE49-F238E27FC236}">
+                <a16:creationId xmlns:a16="http://schemas.microsoft.com/office/drawing/2014/main" id="{8FD7C77C-37A8-4ADC-883D-56EB66479C1B}"/>
+              </a:ext>
+            </a:extLst>
+          </p:cNvPr>
+          <p:cNvPicPr>
+            <a:picLocks noChangeAspect="1"/>
+          </p:cNvPicPr>
+          <p:nvPr/>
+        </p:nvPicPr>
+        <p:blipFill>
+          <a:blip r:embed="rId3"/>
+          <a:stretch>
+            <a:fillRect/>
+          </a:stretch>
+        </p:blipFill>
+        <p:spPr>
+          <a:xfrm>
+            <a:off x="5795798" y="1725461"/>
+            <a:ext cx="3203567" cy="4971540"/>
+          </a:xfrm>
+          <a:prstGeom prst="rect">
+            <a:avLst/>
+          </a:prstGeom>
+        </p:spPr>
+      </p:pic>
+      <p:sp>
+        <p:nvSpPr>
+          <p:cNvPr id="12" name="矢印: 右 11">
+            <a:extLst>
+              <a:ext uri="{FF2B5EF4-FFF2-40B4-BE49-F238E27FC236}">
+                <a16:creationId xmlns:a16="http://schemas.microsoft.com/office/drawing/2014/main" id="{EAEBECA0-5F68-4615-B4DD-9D70511BC221}"/>
               </a:ext>
             </a:extLst>
           </p:cNvPr>
@@ -8052,17 +8078,19 @@
           <p:nvPr/>
         </p:nvSpPr>
         <p:spPr>
-          <a:xfrm>
-            <a:off x="3272116" y="3429000"/>
-            <a:ext cx="7243484" cy="1058333"/>
-          </a:xfrm>
-          <a:prstGeom prst="rect">
-            <a:avLst/>
-          </a:prstGeom>
-          <a:noFill/>
-          <a:ln w="38100">
+          <a:xfrm rot="13245323">
+            <a:off x="1600836" y="3959943"/>
+            <a:ext cx="660400" cy="502574"/>
+          </a:xfrm>
+          <a:prstGeom prst="rightArrow">
+            <a:avLst/>
+          </a:prstGeom>
+          <a:solidFill>
+            <a:srgbClr val="FF0000"/>
+          </a:solidFill>
+          <a:ln>
             <a:solidFill>
-              <a:srgbClr val="FF0000"/>
+              <a:schemeClr val="tx1"/>
             </a:solidFill>
           </a:ln>
         </p:spPr>
@@ -8091,10 +8119,62 @@
           </a:p>
         </p:txBody>
       </p:sp>
+      <p:sp>
+        <p:nvSpPr>
+          <p:cNvPr id="13" name="正方形/長方形 12">
+            <a:extLst>
+              <a:ext uri="{FF2B5EF4-FFF2-40B4-BE49-F238E27FC236}">
+                <a16:creationId xmlns:a16="http://schemas.microsoft.com/office/drawing/2014/main" id="{E9F16CEB-40A7-489D-827E-BACA65549C50}"/>
+              </a:ext>
+            </a:extLst>
+          </p:cNvPr>
+          <p:cNvSpPr/>
+          <p:nvPr/>
+        </p:nvSpPr>
+        <p:spPr>
+          <a:xfrm>
+            <a:off x="5795798" y="5139267"/>
+            <a:ext cx="3203568" cy="372533"/>
+          </a:xfrm>
+          <a:prstGeom prst="rect">
+            <a:avLst/>
+          </a:prstGeom>
+          <a:noFill/>
+          <a:ln w="38100">
+            <a:solidFill>
+              <a:srgbClr val="FF0000"/>
+            </a:solidFill>
+          </a:ln>
+        </p:spPr>
+        <p:style>
+          <a:lnRef idx="2">
+            <a:schemeClr val="accent1">
+              <a:shade val="50000"/>
+            </a:schemeClr>
+          </a:lnRef>
+          <a:fillRef idx="1">
+            <a:schemeClr val="accent1"/>
+          </a:fillRef>
+          <a:effectRef idx="0">
+            <a:schemeClr val="accent1"/>
+          </a:effectRef>
+          <a:fontRef idx="minor">
+            <a:schemeClr val="lt1"/>
+          </a:fontRef>
+        </p:style>
+        <p:txBody>
+          <a:bodyPr rtlCol="0" anchor="ctr"/>
+          <a:lstStyle/>
+          <a:p>
+            <a:pPr algn="ctr"/>
+            <a:endParaRPr kumimoji="1" lang="ja-JP" altLang="en-US"/>
+          </a:p>
+        </p:txBody>
+      </p:sp>
     </p:spTree>
     <p:extLst>
       <p:ext uri="{BB962C8B-B14F-4D97-AF65-F5344CB8AC3E}">
-        <p14:creationId xmlns:p14="http://schemas.microsoft.com/office/powerpoint/2010/main" val="1996967278"/>
+        <p14:creationId xmlns:p14="http://schemas.microsoft.com/office/powerpoint/2010/main" val="967845903"/>
       </p:ext>
     </p:extLst>
   </p:cSld>
@@ -8194,10 +8274,10 @@
       </p:sp>
       <p:pic>
         <p:nvPicPr>
-          <p:cNvPr id="5" name="図 4">
-            <a:extLst>
-              <a:ext uri="{FF2B5EF4-FFF2-40B4-BE49-F238E27FC236}">
-                <a16:creationId xmlns:a16="http://schemas.microsoft.com/office/drawing/2014/main" id="{98592EEF-C902-4DC6-9760-4178EDDFFDDD}"/>
+          <p:cNvPr id="3" name="図 2">
+            <a:extLst>
+              <a:ext uri="{FF2B5EF4-FFF2-40B4-BE49-F238E27FC236}">
+                <a16:creationId xmlns:a16="http://schemas.microsoft.com/office/drawing/2014/main" id="{EAC2D327-7B4C-44C0-9DA8-0783BCDAA213}"/>
               </a:ext>
             </a:extLst>
           </p:cNvPr>
@@ -8215,7 +8295,7 @@
         <p:spPr>
           <a:xfrm>
             <a:off x="567542" y="1817794"/>
-            <a:ext cx="3677163" cy="3600953"/>
+            <a:ext cx="9831172" cy="3429479"/>
           </a:xfrm>
           <a:prstGeom prst="rect">
             <a:avLst/>
@@ -8224,10 +8304,10 @@
       </p:pic>
       <p:sp>
         <p:nvSpPr>
-          <p:cNvPr id="9" name="矢印: 右 8">
-            <a:extLst>
-              <a:ext uri="{FF2B5EF4-FFF2-40B4-BE49-F238E27FC236}">
-                <a16:creationId xmlns:a16="http://schemas.microsoft.com/office/drawing/2014/main" id="{C73AB13C-F79D-4705-942C-9762E6556B64}"/>
+          <p:cNvPr id="14" name="矢印: 右 13">
+            <a:extLst>
+              <a:ext uri="{FF2B5EF4-FFF2-40B4-BE49-F238E27FC236}">
+                <a16:creationId xmlns:a16="http://schemas.microsoft.com/office/drawing/2014/main" id="{BCC2B3AA-1498-4CDE-A984-91BC68245817}"/>
               </a:ext>
             </a:extLst>
           </p:cNvPr>
@@ -8236,7 +8316,7 @@
         </p:nvSpPr>
         <p:spPr>
           <a:xfrm rot="13245323">
-            <a:off x="1355303" y="4216090"/>
+            <a:off x="3040169" y="1972423"/>
             <a:ext cx="660400" cy="502574"/>
           </a:xfrm>
           <a:prstGeom prst="rightArrow">
@@ -8278,10 +8358,10 @@
       </p:sp>
       <p:sp>
         <p:nvSpPr>
-          <p:cNvPr id="10" name="矢印: 右 9">
-            <a:extLst>
-              <a:ext uri="{FF2B5EF4-FFF2-40B4-BE49-F238E27FC236}">
-                <a16:creationId xmlns:a16="http://schemas.microsoft.com/office/drawing/2014/main" id="{BD65A9CE-43E3-46DE-BDC8-5815177E0D1F}"/>
+          <p:cNvPr id="15" name="正方形/長方形 14">
+            <a:extLst>
+              <a:ext uri="{FF2B5EF4-FFF2-40B4-BE49-F238E27FC236}">
+                <a16:creationId xmlns:a16="http://schemas.microsoft.com/office/drawing/2014/main" id="{970F87EE-F181-4E7B-A7A2-121577625E00}"/>
               </a:ext>
             </a:extLst>
           </p:cNvPr>
@@ -8289,19 +8369,17 @@
           <p:nvPr/>
         </p:nvSpPr>
         <p:spPr>
-          <a:xfrm rot="13245323">
-            <a:off x="3014769" y="3259356"/>
-            <a:ext cx="660400" cy="502574"/>
-          </a:xfrm>
-          <a:prstGeom prst="rightArrow">
-            <a:avLst/>
-          </a:prstGeom>
-          <a:solidFill>
-            <a:srgbClr val="FF0000"/>
-          </a:solidFill>
-          <a:ln>
+          <a:xfrm>
+            <a:off x="3272116" y="3429000"/>
+            <a:ext cx="7243484" cy="1058333"/>
+          </a:xfrm>
+          <a:prstGeom prst="rect">
+            <a:avLst/>
+          </a:prstGeom>
+          <a:noFill/>
+          <a:ln w="38100">
             <a:solidFill>
-              <a:schemeClr val="tx1"/>
+              <a:srgbClr val="FF0000"/>
             </a:solidFill>
           </a:ln>
         </p:spPr>
@@ -8330,92 +8408,10 @@
           </a:p>
         </p:txBody>
       </p:sp>
-      <p:pic>
-        <p:nvPicPr>
-          <p:cNvPr id="8" name="図 7">
-            <a:extLst>
-              <a:ext uri="{FF2B5EF4-FFF2-40B4-BE49-F238E27FC236}">
-                <a16:creationId xmlns:a16="http://schemas.microsoft.com/office/drawing/2014/main" id="{047E5C6E-4E08-4DC4-B6BA-68C248408F66}"/>
-              </a:ext>
-            </a:extLst>
-          </p:cNvPr>
-          <p:cNvPicPr>
-            <a:picLocks noChangeAspect="1"/>
-          </p:cNvPicPr>
-          <p:nvPr/>
-        </p:nvPicPr>
-        <p:blipFill>
-          <a:blip r:embed="rId3"/>
-          <a:stretch>
-            <a:fillRect/>
-          </a:stretch>
-        </p:blipFill>
-        <p:spPr>
-          <a:xfrm>
-            <a:off x="4945780" y="1817793"/>
-            <a:ext cx="5473932" cy="3600953"/>
-          </a:xfrm>
-          <a:prstGeom prst="rect">
-            <a:avLst/>
-          </a:prstGeom>
-        </p:spPr>
-      </p:pic>
-      <p:sp>
-        <p:nvSpPr>
-          <p:cNvPr id="13" name="正方形/長方形 12">
-            <a:extLst>
-              <a:ext uri="{FF2B5EF4-FFF2-40B4-BE49-F238E27FC236}">
-                <a16:creationId xmlns:a16="http://schemas.microsoft.com/office/drawing/2014/main" id="{A120A403-9B45-46C4-9961-6DA2E4DF68FA}"/>
-              </a:ext>
-            </a:extLst>
-          </p:cNvPr>
-          <p:cNvSpPr/>
-          <p:nvPr/>
-        </p:nvSpPr>
-        <p:spPr>
-          <a:xfrm>
-            <a:off x="4945780" y="2836334"/>
-            <a:ext cx="5473932" cy="482599"/>
-          </a:xfrm>
-          <a:prstGeom prst="rect">
-            <a:avLst/>
-          </a:prstGeom>
-          <a:noFill/>
-          <a:ln w="38100">
-            <a:solidFill>
-              <a:srgbClr val="FF0000"/>
-            </a:solidFill>
-          </a:ln>
-        </p:spPr>
-        <p:style>
-          <a:lnRef idx="2">
-            <a:schemeClr val="accent1">
-              <a:shade val="50000"/>
-            </a:schemeClr>
-          </a:lnRef>
-          <a:fillRef idx="1">
-            <a:schemeClr val="accent1"/>
-          </a:fillRef>
-          <a:effectRef idx="0">
-            <a:schemeClr val="accent1"/>
-          </a:effectRef>
-          <a:fontRef idx="minor">
-            <a:schemeClr val="lt1"/>
-          </a:fontRef>
-        </p:style>
-        <p:txBody>
-          <a:bodyPr rtlCol="0" anchor="ctr"/>
-          <a:lstStyle/>
-          <a:p>
-            <a:pPr algn="ctr"/>
-            <a:endParaRPr kumimoji="1" lang="ja-JP" altLang="en-US"/>
-          </a:p>
-        </p:txBody>
-      </p:sp>
     </p:spTree>
     <p:extLst>
       <p:ext uri="{BB962C8B-B14F-4D97-AF65-F5344CB8AC3E}">
-        <p14:creationId xmlns:p14="http://schemas.microsoft.com/office/powerpoint/2010/main" val="3726784465"/>
+        <p14:creationId xmlns:p14="http://schemas.microsoft.com/office/powerpoint/2010/main" val="1996967278"/>
       </p:ext>
     </p:extLst>
   </p:cSld>
@@ -8492,7 +8488,7 @@
         <p:spPr>
           <a:xfrm>
             <a:off x="567542" y="1216429"/>
-            <a:ext cx="4899098" cy="461665"/>
+            <a:ext cx="4185761" cy="461665"/>
           </a:xfrm>
           <a:prstGeom prst="rect">
             <a:avLst/>
@@ -8507,15 +8503,7 @@
           <a:p>
             <a:r>
               <a:rPr lang="ja-JP" altLang="en-US" sz="2400" dirty="0"/>
-              <a:t>最後に</a:t>
-            </a:r>
-            <a:r>
-              <a:rPr lang="en-US" altLang="ja-JP" sz="2400" dirty="0"/>
-              <a:t>BGM</a:t>
-            </a:r>
-            <a:r>
-              <a:rPr lang="ja-JP" altLang="en-US" sz="2400" dirty="0"/>
-              <a:t>をかけてみましょう。</a:t>
+              <a:t>プレイヤー側も追加します。</a:t>
             </a:r>
             <a:endParaRPr lang="en-US" altLang="ja-JP" sz="2400" dirty="0"/>
           </a:p>
@@ -8523,10 +8511,10 @@
       </p:sp>
       <p:pic>
         <p:nvPicPr>
-          <p:cNvPr id="3" name="図 2">
-            <a:extLst>
-              <a:ext uri="{FF2B5EF4-FFF2-40B4-BE49-F238E27FC236}">
-                <a16:creationId xmlns:a16="http://schemas.microsoft.com/office/drawing/2014/main" id="{48049460-E13F-43A1-9F7A-3F8C166D4029}"/>
+          <p:cNvPr id="5" name="図 4">
+            <a:extLst>
+              <a:ext uri="{FF2B5EF4-FFF2-40B4-BE49-F238E27FC236}">
+                <a16:creationId xmlns:a16="http://schemas.microsoft.com/office/drawing/2014/main" id="{98592EEF-C902-4DC6-9760-4178EDDFFDDD}"/>
               </a:ext>
             </a:extLst>
           </p:cNvPr>
@@ -8544,7 +8532,7 @@
         <p:spPr>
           <a:xfrm>
             <a:off x="567542" y="1817794"/>
-            <a:ext cx="3677163" cy="3610479"/>
+            <a:ext cx="3677163" cy="3600953"/>
           </a:xfrm>
           <a:prstGeom prst="rect">
             <a:avLst/>
@@ -8553,10 +8541,10 @@
       </p:pic>
       <p:sp>
         <p:nvSpPr>
-          <p:cNvPr id="12" name="矢印: 右 11">
-            <a:extLst>
-              <a:ext uri="{FF2B5EF4-FFF2-40B4-BE49-F238E27FC236}">
-                <a16:creationId xmlns:a16="http://schemas.microsoft.com/office/drawing/2014/main" id="{E19E29BC-FA07-4906-A68E-B57785BA8C95}"/>
+          <p:cNvPr id="9" name="矢印: 右 8">
+            <a:extLst>
+              <a:ext uri="{FF2B5EF4-FFF2-40B4-BE49-F238E27FC236}">
+                <a16:creationId xmlns:a16="http://schemas.microsoft.com/office/drawing/2014/main" id="{C73AB13C-F79D-4705-942C-9762E6556B64}"/>
               </a:ext>
             </a:extLst>
           </p:cNvPr>
@@ -8565,7 +8553,7 @@
         </p:nvSpPr>
         <p:spPr>
           <a:xfrm rot="13245323">
-            <a:off x="1465368" y="3877424"/>
+            <a:off x="1355303" y="4216090"/>
             <a:ext cx="660400" cy="502574"/>
           </a:xfrm>
           <a:prstGeom prst="rightArrow">
@@ -8607,10 +8595,10 @@
       </p:sp>
       <p:sp>
         <p:nvSpPr>
-          <p:cNvPr id="14" name="矢印: 右 13">
-            <a:extLst>
-              <a:ext uri="{FF2B5EF4-FFF2-40B4-BE49-F238E27FC236}">
-                <a16:creationId xmlns:a16="http://schemas.microsoft.com/office/drawing/2014/main" id="{DD2D04DE-045E-43FA-8230-6EDEC167CA6A}"/>
+          <p:cNvPr id="10" name="矢印: 右 9">
+            <a:extLst>
+              <a:ext uri="{FF2B5EF4-FFF2-40B4-BE49-F238E27FC236}">
+                <a16:creationId xmlns:a16="http://schemas.microsoft.com/office/drawing/2014/main" id="{BD65A9CE-43E3-46DE-BDC8-5815177E0D1F}"/>
               </a:ext>
             </a:extLst>
           </p:cNvPr>
@@ -8619,7 +8607,7 @@
         </p:nvSpPr>
         <p:spPr>
           <a:xfrm rot="13245323">
-            <a:off x="2897024" y="3284756"/>
+            <a:off x="3014769" y="3259356"/>
             <a:ext cx="660400" cy="502574"/>
           </a:xfrm>
           <a:prstGeom prst="rightArrow">
@@ -8661,10 +8649,10 @@
       </p:sp>
       <p:pic>
         <p:nvPicPr>
-          <p:cNvPr id="15" name="図 14">
-            <a:extLst>
-              <a:ext uri="{FF2B5EF4-FFF2-40B4-BE49-F238E27FC236}">
-                <a16:creationId xmlns:a16="http://schemas.microsoft.com/office/drawing/2014/main" id="{C9AE49EC-4899-47F3-898E-AF193DBF8960}"/>
+          <p:cNvPr id="8" name="図 7">
+            <a:extLst>
+              <a:ext uri="{FF2B5EF4-FFF2-40B4-BE49-F238E27FC236}">
+                <a16:creationId xmlns:a16="http://schemas.microsoft.com/office/drawing/2014/main" id="{047E5C6E-4E08-4DC4-B6BA-68C248408F66}"/>
               </a:ext>
             </a:extLst>
           </p:cNvPr>
@@ -8681,8 +8669,8 @@
         </p:blipFill>
         <p:spPr>
           <a:xfrm>
-            <a:off x="4848009" y="1817794"/>
-            <a:ext cx="6163535" cy="1724266"/>
+            <a:off x="4945780" y="1817793"/>
+            <a:ext cx="5473932" cy="3600953"/>
           </a:xfrm>
           <a:prstGeom prst="rect">
             <a:avLst/>
@@ -8691,10 +8679,10 @@
       </p:pic>
       <p:sp>
         <p:nvSpPr>
-          <p:cNvPr id="16" name="正方形/長方形 15">
-            <a:extLst>
-              <a:ext uri="{FF2B5EF4-FFF2-40B4-BE49-F238E27FC236}">
-                <a16:creationId xmlns:a16="http://schemas.microsoft.com/office/drawing/2014/main" id="{EC17D831-ABBD-4F78-80A0-2C7C9B335BD7}"/>
+          <p:cNvPr id="13" name="正方形/長方形 12">
+            <a:extLst>
+              <a:ext uri="{FF2B5EF4-FFF2-40B4-BE49-F238E27FC236}">
+                <a16:creationId xmlns:a16="http://schemas.microsoft.com/office/drawing/2014/main" id="{A120A403-9B45-46C4-9961-6DA2E4DF68FA}"/>
               </a:ext>
             </a:extLst>
           </p:cNvPr>
@@ -8703,8 +8691,8 @@
         </p:nvSpPr>
         <p:spPr>
           <a:xfrm>
-            <a:off x="6838436" y="2201334"/>
-            <a:ext cx="4173108" cy="990599"/>
+            <a:off x="4945780" y="2836334"/>
+            <a:ext cx="5473932" cy="482599"/>
           </a:xfrm>
           <a:prstGeom prst="rect">
             <a:avLst/>
@@ -8744,7 +8732,7 @@
     </p:spTree>
     <p:extLst>
       <p:ext uri="{BB962C8B-B14F-4D97-AF65-F5344CB8AC3E}">
-        <p14:creationId xmlns:p14="http://schemas.microsoft.com/office/powerpoint/2010/main" val="2546647691"/>
+        <p14:creationId xmlns:p14="http://schemas.microsoft.com/office/powerpoint/2010/main" val="3726784465"/>
       </p:ext>
     </p:extLst>
   </p:cSld>
@@ -8821,7 +8809,7 @@
         <p:spPr>
           <a:xfrm>
             <a:off x="567542" y="1216429"/>
-            <a:ext cx="8494633" cy="2308324"/>
+            <a:ext cx="4899098" cy="461665"/>
           </a:xfrm>
           <a:prstGeom prst="rect">
             <a:avLst/>
@@ -8836,83 +8824,244 @@
           <a:p>
             <a:r>
               <a:rPr lang="ja-JP" altLang="en-US" sz="2400" dirty="0"/>
-              <a:t>今回のように</a:t>
-            </a:r>
-            <a:r>
-              <a:rPr lang="ja-JP" altLang="en-US" sz="2400" b="1" dirty="0">
-                <a:solidFill>
-                  <a:srgbClr val="0070C0"/>
-                </a:solidFill>
-              </a:rPr>
-              <a:t>プログラマーの作業は地道なもの</a:t>
+              <a:t>最後に</a:t>
+            </a:r>
+            <a:r>
+              <a:rPr lang="en-US" altLang="ja-JP" sz="2400" dirty="0"/>
+              <a:t>BGM</a:t>
             </a:r>
             <a:r>
               <a:rPr lang="ja-JP" altLang="en-US" sz="2400" dirty="0"/>
-              <a:t>になります。</a:t>
+              <a:t>をかけてみましょう。</a:t>
             </a:r>
             <a:endParaRPr lang="en-US" altLang="ja-JP" sz="2400" dirty="0"/>
           </a:p>
-          <a:p>
-            <a:endParaRPr lang="en-US" altLang="ja-JP" sz="2400" dirty="0"/>
-          </a:p>
-          <a:p>
-            <a:r>
-              <a:rPr lang="ja-JP" altLang="en-US" sz="2400" dirty="0"/>
-              <a:t>ただし、</a:t>
-            </a:r>
-            <a:endParaRPr lang="en-US" altLang="ja-JP" sz="2400" dirty="0"/>
-          </a:p>
-          <a:p>
-            <a:r>
-              <a:rPr lang="ja-JP" altLang="en-US" sz="2400" b="1" dirty="0">
-                <a:solidFill>
-                  <a:srgbClr val="FF0000"/>
-                </a:solidFill>
-              </a:rPr>
-              <a:t>作れば作るほどゲームは良くなっていきます！</a:t>
-            </a:r>
-            <a:endParaRPr lang="en-US" altLang="ja-JP" sz="2400" b="1" dirty="0">
-              <a:solidFill>
-                <a:srgbClr val="FF0000"/>
-              </a:solidFill>
-            </a:endParaRPr>
-          </a:p>
-          <a:p>
-            <a:r>
-              <a:rPr lang="ja-JP" altLang="en-US" sz="2400" b="1" dirty="0">
-                <a:solidFill>
-                  <a:srgbClr val="FF0000"/>
-                </a:solidFill>
-              </a:rPr>
-              <a:t>このことが楽しいと思える方は、</a:t>
-            </a:r>
-            <a:endParaRPr lang="en-US" altLang="ja-JP" sz="2400" b="1" dirty="0">
-              <a:solidFill>
-                <a:srgbClr val="FF0000"/>
-              </a:solidFill>
-            </a:endParaRPr>
-          </a:p>
-          <a:p>
-            <a:r>
-              <a:rPr lang="ja-JP" altLang="en-US" sz="2400" b="1" dirty="0">
-                <a:solidFill>
-                  <a:srgbClr val="FF0000"/>
-                </a:solidFill>
-              </a:rPr>
-              <a:t>ぜひゲームプログラマーを目指してみてください！</a:t>
-            </a:r>
-            <a:endParaRPr lang="en-US" altLang="ja-JP" sz="2400" b="1" dirty="0">
-              <a:solidFill>
-                <a:srgbClr val="FF0000"/>
-              </a:solidFill>
-            </a:endParaRPr>
+        </p:txBody>
+      </p:sp>
+      <p:pic>
+        <p:nvPicPr>
+          <p:cNvPr id="3" name="図 2">
+            <a:extLst>
+              <a:ext uri="{FF2B5EF4-FFF2-40B4-BE49-F238E27FC236}">
+                <a16:creationId xmlns:a16="http://schemas.microsoft.com/office/drawing/2014/main" id="{48049460-E13F-43A1-9F7A-3F8C166D4029}"/>
+              </a:ext>
+            </a:extLst>
+          </p:cNvPr>
+          <p:cNvPicPr>
+            <a:picLocks noChangeAspect="1"/>
+          </p:cNvPicPr>
+          <p:nvPr/>
+        </p:nvPicPr>
+        <p:blipFill>
+          <a:blip r:embed="rId2"/>
+          <a:stretch>
+            <a:fillRect/>
+          </a:stretch>
+        </p:blipFill>
+        <p:spPr>
+          <a:xfrm>
+            <a:off x="567542" y="1817794"/>
+            <a:ext cx="3677163" cy="3610479"/>
+          </a:xfrm>
+          <a:prstGeom prst="rect">
+            <a:avLst/>
+          </a:prstGeom>
+        </p:spPr>
+      </p:pic>
+      <p:sp>
+        <p:nvSpPr>
+          <p:cNvPr id="12" name="矢印: 右 11">
+            <a:extLst>
+              <a:ext uri="{FF2B5EF4-FFF2-40B4-BE49-F238E27FC236}">
+                <a16:creationId xmlns:a16="http://schemas.microsoft.com/office/drawing/2014/main" id="{E19E29BC-FA07-4906-A68E-B57785BA8C95}"/>
+              </a:ext>
+            </a:extLst>
+          </p:cNvPr>
+          <p:cNvSpPr/>
+          <p:nvPr/>
+        </p:nvSpPr>
+        <p:spPr>
+          <a:xfrm rot="13245323">
+            <a:off x="1465368" y="3877424"/>
+            <a:ext cx="660400" cy="502574"/>
+          </a:xfrm>
+          <a:prstGeom prst="rightArrow">
+            <a:avLst/>
+          </a:prstGeom>
+          <a:solidFill>
+            <a:srgbClr val="FF0000"/>
+          </a:solidFill>
+          <a:ln>
+            <a:solidFill>
+              <a:schemeClr val="tx1"/>
+            </a:solidFill>
+          </a:ln>
+        </p:spPr>
+        <p:style>
+          <a:lnRef idx="2">
+            <a:schemeClr val="accent1">
+              <a:shade val="50000"/>
+            </a:schemeClr>
+          </a:lnRef>
+          <a:fillRef idx="1">
+            <a:schemeClr val="accent1"/>
+          </a:fillRef>
+          <a:effectRef idx="0">
+            <a:schemeClr val="accent1"/>
+          </a:effectRef>
+          <a:fontRef idx="minor">
+            <a:schemeClr val="lt1"/>
+          </a:fontRef>
+        </p:style>
+        <p:txBody>
+          <a:bodyPr rtlCol="0" anchor="ctr"/>
+          <a:lstStyle/>
+          <a:p>
+            <a:pPr algn="ctr"/>
+            <a:endParaRPr kumimoji="1" lang="ja-JP" altLang="en-US"/>
+          </a:p>
+        </p:txBody>
+      </p:sp>
+      <p:sp>
+        <p:nvSpPr>
+          <p:cNvPr id="14" name="矢印: 右 13">
+            <a:extLst>
+              <a:ext uri="{FF2B5EF4-FFF2-40B4-BE49-F238E27FC236}">
+                <a16:creationId xmlns:a16="http://schemas.microsoft.com/office/drawing/2014/main" id="{DD2D04DE-045E-43FA-8230-6EDEC167CA6A}"/>
+              </a:ext>
+            </a:extLst>
+          </p:cNvPr>
+          <p:cNvSpPr/>
+          <p:nvPr/>
+        </p:nvSpPr>
+        <p:spPr>
+          <a:xfrm rot="13245323">
+            <a:off x="2897024" y="3284756"/>
+            <a:ext cx="660400" cy="502574"/>
+          </a:xfrm>
+          <a:prstGeom prst="rightArrow">
+            <a:avLst/>
+          </a:prstGeom>
+          <a:solidFill>
+            <a:srgbClr val="FF0000"/>
+          </a:solidFill>
+          <a:ln>
+            <a:solidFill>
+              <a:schemeClr val="tx1"/>
+            </a:solidFill>
+          </a:ln>
+        </p:spPr>
+        <p:style>
+          <a:lnRef idx="2">
+            <a:schemeClr val="accent1">
+              <a:shade val="50000"/>
+            </a:schemeClr>
+          </a:lnRef>
+          <a:fillRef idx="1">
+            <a:schemeClr val="accent1"/>
+          </a:fillRef>
+          <a:effectRef idx="0">
+            <a:schemeClr val="accent1"/>
+          </a:effectRef>
+          <a:fontRef idx="minor">
+            <a:schemeClr val="lt1"/>
+          </a:fontRef>
+        </p:style>
+        <p:txBody>
+          <a:bodyPr rtlCol="0" anchor="ctr"/>
+          <a:lstStyle/>
+          <a:p>
+            <a:pPr algn="ctr"/>
+            <a:endParaRPr kumimoji="1" lang="ja-JP" altLang="en-US"/>
+          </a:p>
+        </p:txBody>
+      </p:sp>
+      <p:pic>
+        <p:nvPicPr>
+          <p:cNvPr id="15" name="図 14">
+            <a:extLst>
+              <a:ext uri="{FF2B5EF4-FFF2-40B4-BE49-F238E27FC236}">
+                <a16:creationId xmlns:a16="http://schemas.microsoft.com/office/drawing/2014/main" id="{C9AE49EC-4899-47F3-898E-AF193DBF8960}"/>
+              </a:ext>
+            </a:extLst>
+          </p:cNvPr>
+          <p:cNvPicPr>
+            <a:picLocks noChangeAspect="1"/>
+          </p:cNvPicPr>
+          <p:nvPr/>
+        </p:nvPicPr>
+        <p:blipFill>
+          <a:blip r:embed="rId3"/>
+          <a:stretch>
+            <a:fillRect/>
+          </a:stretch>
+        </p:blipFill>
+        <p:spPr>
+          <a:xfrm>
+            <a:off x="4848009" y="1817794"/>
+            <a:ext cx="6163535" cy="1724266"/>
+          </a:xfrm>
+          <a:prstGeom prst="rect">
+            <a:avLst/>
+          </a:prstGeom>
+        </p:spPr>
+      </p:pic>
+      <p:sp>
+        <p:nvSpPr>
+          <p:cNvPr id="16" name="正方形/長方形 15">
+            <a:extLst>
+              <a:ext uri="{FF2B5EF4-FFF2-40B4-BE49-F238E27FC236}">
+                <a16:creationId xmlns:a16="http://schemas.microsoft.com/office/drawing/2014/main" id="{EC17D831-ABBD-4F78-80A0-2C7C9B335BD7}"/>
+              </a:ext>
+            </a:extLst>
+          </p:cNvPr>
+          <p:cNvSpPr/>
+          <p:nvPr/>
+        </p:nvSpPr>
+        <p:spPr>
+          <a:xfrm>
+            <a:off x="6838436" y="2201334"/>
+            <a:ext cx="4173108" cy="990599"/>
+          </a:xfrm>
+          <a:prstGeom prst="rect">
+            <a:avLst/>
+          </a:prstGeom>
+          <a:noFill/>
+          <a:ln w="38100">
+            <a:solidFill>
+              <a:srgbClr val="FF0000"/>
+            </a:solidFill>
+          </a:ln>
+        </p:spPr>
+        <p:style>
+          <a:lnRef idx="2">
+            <a:schemeClr val="accent1">
+              <a:shade val="50000"/>
+            </a:schemeClr>
+          </a:lnRef>
+          <a:fillRef idx="1">
+            <a:schemeClr val="accent1"/>
+          </a:fillRef>
+          <a:effectRef idx="0">
+            <a:schemeClr val="accent1"/>
+          </a:effectRef>
+          <a:fontRef idx="minor">
+            <a:schemeClr val="lt1"/>
+          </a:fontRef>
+        </p:style>
+        <p:txBody>
+          <a:bodyPr rtlCol="0" anchor="ctr"/>
+          <a:lstStyle/>
+          <a:p>
+            <a:pPr algn="ctr"/>
+            <a:endParaRPr kumimoji="1" lang="ja-JP" altLang="en-US"/>
           </a:p>
         </p:txBody>
       </p:sp>
     </p:spTree>
     <p:extLst>
       <p:ext uri="{BB962C8B-B14F-4D97-AF65-F5344CB8AC3E}">
-        <p14:creationId xmlns:p14="http://schemas.microsoft.com/office/powerpoint/2010/main" val="1275272774"/>
+        <p14:creationId xmlns:p14="http://schemas.microsoft.com/office/powerpoint/2010/main" val="2546647691"/>
       </p:ext>
     </p:extLst>
   </p:cSld>
@@ -8989,7 +9138,7 @@
         <p:spPr>
           <a:xfrm>
             <a:off x="567542" y="1216429"/>
-            <a:ext cx="5724644" cy="830997"/>
+            <a:ext cx="7563289" cy="461665"/>
           </a:xfrm>
           <a:prstGeom prst="rect">
             <a:avLst/>
@@ -9004,26 +9153,15 @@
           <a:p>
             <a:r>
               <a:rPr kumimoji="1" lang="ja-JP" altLang="en-US" sz="2400" dirty="0"/>
-              <a:t>ゲームは</a:t>
-            </a:r>
-            <a:r>
-              <a:rPr kumimoji="1" lang="ja-JP" altLang="en-US" sz="2400" b="1" dirty="0">
-                <a:solidFill>
-                  <a:srgbClr val="FF0000"/>
-                </a:solidFill>
-              </a:rPr>
-              <a:t>再生ボタン</a:t>
+              <a:t>まずはゲーム画面となる</a:t>
+            </a:r>
+            <a:r>
+              <a:rPr kumimoji="1" lang="en-US" altLang="ja-JP" sz="2400" dirty="0"/>
+              <a:t>Play</a:t>
             </a:r>
             <a:r>
               <a:rPr kumimoji="1" lang="ja-JP" altLang="en-US" sz="2400" dirty="0"/>
-              <a:t>から実行できます。</a:t>
-            </a:r>
-            <a:endParaRPr kumimoji="1" lang="en-US" altLang="ja-JP" sz="2400" dirty="0"/>
-          </a:p>
-          <a:p>
-            <a:r>
-              <a:rPr lang="ja-JP" altLang="en-US" sz="2400" dirty="0"/>
-              <a:t>早速押してみましょう。</a:t>
+              <a:t>シーンを開きましょう。</a:t>
             </a:r>
             <a:endParaRPr kumimoji="1" lang="en-US" altLang="ja-JP" sz="2400" dirty="0"/>
           </a:p>
@@ -9031,10 +9169,10 @@
       </p:sp>
       <p:pic>
         <p:nvPicPr>
-          <p:cNvPr id="3" name="図 2">
-            <a:extLst>
-              <a:ext uri="{FF2B5EF4-FFF2-40B4-BE49-F238E27FC236}">
-                <a16:creationId xmlns:a16="http://schemas.microsoft.com/office/drawing/2014/main" id="{BA6720F8-6483-4B2B-AD9B-D1FA007F28D9}"/>
+          <p:cNvPr id="5" name="図 4">
+            <a:extLst>
+              <a:ext uri="{FF2B5EF4-FFF2-40B4-BE49-F238E27FC236}">
+                <a16:creationId xmlns:a16="http://schemas.microsoft.com/office/drawing/2014/main" id="{F83BB2B1-4256-4289-97CA-B5F51D325E90}"/>
               </a:ext>
             </a:extLst>
           </p:cNvPr>
@@ -9051,8 +9189,8 @@
         </p:blipFill>
         <p:spPr>
           <a:xfrm>
-            <a:off x="567542" y="2187127"/>
-            <a:ext cx="8923591" cy="3805292"/>
+            <a:off x="567542" y="1817794"/>
+            <a:ext cx="4853818" cy="4413673"/>
           </a:xfrm>
           <a:prstGeom prst="rect">
             <a:avLst/>
@@ -9061,10 +9199,10 @@
       </p:pic>
       <p:sp>
         <p:nvSpPr>
-          <p:cNvPr id="5" name="矢印: 右 4">
-            <a:extLst>
-              <a:ext uri="{FF2B5EF4-FFF2-40B4-BE49-F238E27FC236}">
-                <a16:creationId xmlns:a16="http://schemas.microsoft.com/office/drawing/2014/main" id="{B07C60AA-3025-4C8A-A72D-583968D264EC}"/>
+          <p:cNvPr id="8" name="矢印: 右 7">
+            <a:extLst>
+              <a:ext uri="{FF2B5EF4-FFF2-40B4-BE49-F238E27FC236}">
+                <a16:creationId xmlns:a16="http://schemas.microsoft.com/office/drawing/2014/main" id="{6FE17F47-E365-426E-B3EE-BB0A8A4D6425}"/>
               </a:ext>
             </a:extLst>
           </p:cNvPr>
@@ -9073,7 +9211,7 @@
         </p:nvSpPr>
         <p:spPr>
           <a:xfrm rot="13245323">
-            <a:off x="6578186" y="2547838"/>
+            <a:off x="1650586" y="4884638"/>
             <a:ext cx="660400" cy="502574"/>
           </a:xfrm>
           <a:prstGeom prst="rightArrow">
@@ -9113,10 +9251,64 @@
           </a:p>
         </p:txBody>
       </p:sp>
+      <p:sp>
+        <p:nvSpPr>
+          <p:cNvPr id="9" name="矢印: 右 8">
+            <a:extLst>
+              <a:ext uri="{FF2B5EF4-FFF2-40B4-BE49-F238E27FC236}">
+                <a16:creationId xmlns:a16="http://schemas.microsoft.com/office/drawing/2014/main" id="{912FB47B-AE0B-47EA-B583-17D68E68A169}"/>
+              </a:ext>
+            </a:extLst>
+          </p:cNvPr>
+          <p:cNvSpPr/>
+          <p:nvPr/>
+        </p:nvSpPr>
+        <p:spPr>
+          <a:xfrm rot="13245323">
+            <a:off x="3775718" y="3453772"/>
+            <a:ext cx="660400" cy="502574"/>
+          </a:xfrm>
+          <a:prstGeom prst="rightArrow">
+            <a:avLst/>
+          </a:prstGeom>
+          <a:solidFill>
+            <a:srgbClr val="FF0000"/>
+          </a:solidFill>
+          <a:ln>
+            <a:solidFill>
+              <a:schemeClr val="tx1"/>
+            </a:solidFill>
+          </a:ln>
+        </p:spPr>
+        <p:style>
+          <a:lnRef idx="2">
+            <a:schemeClr val="accent1">
+              <a:shade val="50000"/>
+            </a:schemeClr>
+          </a:lnRef>
+          <a:fillRef idx="1">
+            <a:schemeClr val="accent1"/>
+          </a:fillRef>
+          <a:effectRef idx="0">
+            <a:schemeClr val="accent1"/>
+          </a:effectRef>
+          <a:fontRef idx="minor">
+            <a:schemeClr val="lt1"/>
+          </a:fontRef>
+        </p:style>
+        <p:txBody>
+          <a:bodyPr rtlCol="0" anchor="ctr"/>
+          <a:lstStyle/>
+          <a:p>
+            <a:pPr algn="ctr"/>
+            <a:endParaRPr kumimoji="1" lang="ja-JP" altLang="en-US"/>
+          </a:p>
+        </p:txBody>
+      </p:sp>
     </p:spTree>
     <p:extLst>
       <p:ext uri="{BB962C8B-B14F-4D97-AF65-F5344CB8AC3E}">
-        <p14:creationId xmlns:p14="http://schemas.microsoft.com/office/powerpoint/2010/main" val="1343421994"/>
+        <p14:creationId xmlns:p14="http://schemas.microsoft.com/office/powerpoint/2010/main" val="3622667561"/>
       </p:ext>
     </p:extLst>
   </p:cSld>
@@ -9127,6 +9319,174 @@
 </file>
 
 <file path=ppt/slides/slide30.xml><?xml version="1.0" encoding="utf-8"?>
+<p:sld xmlns:a="http://schemas.openxmlformats.org/drawingml/2006/main" xmlns:r="http://schemas.openxmlformats.org/officeDocument/2006/relationships" xmlns:p="http://schemas.openxmlformats.org/presentationml/2006/main">
+  <p:cSld>
+    <p:spTree>
+      <p:nvGrpSpPr>
+        <p:cNvPr id="1" name=""/>
+        <p:cNvGrpSpPr/>
+        <p:nvPr/>
+      </p:nvGrpSpPr>
+      <p:grpSpPr>
+        <a:xfrm>
+          <a:off x="0" y="0"/>
+          <a:ext cx="0" cy="0"/>
+          <a:chOff x="0" y="0"/>
+          <a:chExt cx="0" cy="0"/>
+        </a:xfrm>
+      </p:grpSpPr>
+      <p:sp>
+        <p:nvSpPr>
+          <p:cNvPr id="4" name="テキスト ボックス 3">
+            <a:extLst>
+              <a:ext uri="{FF2B5EF4-FFF2-40B4-BE49-F238E27FC236}">
+                <a16:creationId xmlns:a16="http://schemas.microsoft.com/office/drawing/2014/main" id="{5A13BF46-B8C5-48AA-8308-C9ECFF431A18}"/>
+              </a:ext>
+            </a:extLst>
+          </p:cNvPr>
+          <p:cNvSpPr txBox="1"/>
+          <p:nvPr/>
+        </p:nvSpPr>
+        <p:spPr>
+          <a:xfrm>
+            <a:off x="567542" y="491954"/>
+            <a:ext cx="5109091" cy="584775"/>
+          </a:xfrm>
+          <a:prstGeom prst="rect">
+            <a:avLst/>
+          </a:prstGeom>
+          <a:noFill/>
+        </p:spPr>
+        <p:txBody>
+          <a:bodyPr wrap="none" rtlCol="0">
+            <a:spAutoFit/>
+          </a:bodyPr>
+          <a:lstStyle/>
+          <a:p>
+            <a:r>
+              <a:rPr kumimoji="1" lang="ja-JP" altLang="en-US" sz="3200" b="1" u="sng" dirty="0"/>
+              <a:t>シューティングゲーム制作</a:t>
+            </a:r>
+          </a:p>
+        </p:txBody>
+      </p:sp>
+      <p:sp>
+        <p:nvSpPr>
+          <p:cNvPr id="6" name="テキスト ボックス 5">
+            <a:extLst>
+              <a:ext uri="{FF2B5EF4-FFF2-40B4-BE49-F238E27FC236}">
+                <a16:creationId xmlns:a16="http://schemas.microsoft.com/office/drawing/2014/main" id="{55830AD6-028B-4C4E-80BF-B70DFC1C3A46}"/>
+              </a:ext>
+            </a:extLst>
+          </p:cNvPr>
+          <p:cNvSpPr txBox="1"/>
+          <p:nvPr/>
+        </p:nvSpPr>
+        <p:spPr>
+          <a:xfrm>
+            <a:off x="567542" y="1216429"/>
+            <a:ext cx="8494633" cy="2308324"/>
+          </a:xfrm>
+          <a:prstGeom prst="rect">
+            <a:avLst/>
+          </a:prstGeom>
+          <a:noFill/>
+        </p:spPr>
+        <p:txBody>
+          <a:bodyPr wrap="none" rtlCol="0">
+            <a:spAutoFit/>
+          </a:bodyPr>
+          <a:lstStyle/>
+          <a:p>
+            <a:r>
+              <a:rPr lang="ja-JP" altLang="en-US" sz="2400" dirty="0"/>
+              <a:t>今回のように</a:t>
+            </a:r>
+            <a:r>
+              <a:rPr lang="ja-JP" altLang="en-US" sz="2400" b="1" dirty="0">
+                <a:solidFill>
+                  <a:srgbClr val="0070C0"/>
+                </a:solidFill>
+              </a:rPr>
+              <a:t>プログラマーの作業は地道なもの</a:t>
+            </a:r>
+            <a:r>
+              <a:rPr lang="ja-JP" altLang="en-US" sz="2400" dirty="0"/>
+              <a:t>になります。</a:t>
+            </a:r>
+            <a:endParaRPr lang="en-US" altLang="ja-JP" sz="2400" dirty="0"/>
+          </a:p>
+          <a:p>
+            <a:endParaRPr lang="en-US" altLang="ja-JP" sz="2400" dirty="0"/>
+          </a:p>
+          <a:p>
+            <a:r>
+              <a:rPr lang="ja-JP" altLang="en-US" sz="2400" dirty="0"/>
+              <a:t>ただし、</a:t>
+            </a:r>
+            <a:endParaRPr lang="en-US" altLang="ja-JP" sz="2400" dirty="0"/>
+          </a:p>
+          <a:p>
+            <a:r>
+              <a:rPr lang="ja-JP" altLang="en-US" sz="2400" b="1" dirty="0">
+                <a:solidFill>
+                  <a:srgbClr val="FF0000"/>
+                </a:solidFill>
+              </a:rPr>
+              <a:t>作れば作るほどゲームは良くなっていきます！</a:t>
+            </a:r>
+            <a:endParaRPr lang="en-US" altLang="ja-JP" sz="2400" b="1" dirty="0">
+              <a:solidFill>
+                <a:srgbClr val="FF0000"/>
+              </a:solidFill>
+            </a:endParaRPr>
+          </a:p>
+          <a:p>
+            <a:r>
+              <a:rPr lang="ja-JP" altLang="en-US" sz="2400" b="1" dirty="0">
+                <a:solidFill>
+                  <a:srgbClr val="FF0000"/>
+                </a:solidFill>
+              </a:rPr>
+              <a:t>このことが楽しいと思える方は、</a:t>
+            </a:r>
+            <a:endParaRPr lang="en-US" altLang="ja-JP" sz="2400" b="1" dirty="0">
+              <a:solidFill>
+                <a:srgbClr val="FF0000"/>
+              </a:solidFill>
+            </a:endParaRPr>
+          </a:p>
+          <a:p>
+            <a:r>
+              <a:rPr lang="ja-JP" altLang="en-US" sz="2400" b="1" dirty="0">
+                <a:solidFill>
+                  <a:srgbClr val="FF0000"/>
+                </a:solidFill>
+              </a:rPr>
+              <a:t>ぜひゲームプログラマーを目指してみてください！</a:t>
+            </a:r>
+            <a:endParaRPr lang="en-US" altLang="ja-JP" sz="2400" b="1" dirty="0">
+              <a:solidFill>
+                <a:srgbClr val="FF0000"/>
+              </a:solidFill>
+            </a:endParaRPr>
+          </a:p>
+        </p:txBody>
+      </p:sp>
+    </p:spTree>
+    <p:extLst>
+      <p:ext uri="{BB962C8B-B14F-4D97-AF65-F5344CB8AC3E}">
+        <p14:creationId xmlns:p14="http://schemas.microsoft.com/office/powerpoint/2010/main" val="1275272774"/>
+      </p:ext>
+    </p:extLst>
+  </p:cSld>
+  <p:clrMapOvr>
+    <a:masterClrMapping/>
+  </p:clrMapOvr>
+</p:sld>
+</file>
+
+<file path=ppt/slides/slide31.xml><?xml version="1.0" encoding="utf-8"?>
 <p:sld xmlns:a="http://schemas.openxmlformats.org/drawingml/2006/main" xmlns:r="http://schemas.openxmlformats.org/officeDocument/2006/relationships" xmlns:p="http://schemas.openxmlformats.org/presentationml/2006/main">
   <p:cSld>
     <p:spTree>
@@ -9595,7 +9955,7 @@
         <p:spPr>
           <a:xfrm>
             <a:off x="567542" y="1216429"/>
-            <a:ext cx="6955750" cy="830997"/>
+            <a:ext cx="5724644" cy="830997"/>
           </a:xfrm>
           <a:prstGeom prst="rect">
             <a:avLst/>
@@ -9610,26 +9970,26 @@
           <a:p>
             <a:r>
               <a:rPr kumimoji="1" lang="ja-JP" altLang="en-US" sz="2400" dirty="0"/>
-              <a:t>ボタンを押しても反応しません。</a:t>
-            </a:r>
-            <a:endParaRPr kumimoji="1" lang="en-US" altLang="ja-JP" sz="2400" dirty="0"/>
-          </a:p>
-          <a:p>
-            <a:r>
-              <a:rPr lang="ja-JP" altLang="en-US" sz="2400" dirty="0"/>
-              <a:t>まずは</a:t>
-            </a:r>
-            <a:r>
-              <a:rPr lang="ja-JP" altLang="en-US" sz="2400" b="1" dirty="0">
+              <a:t>ゲームは</a:t>
+            </a:r>
+            <a:r>
+              <a:rPr kumimoji="1" lang="ja-JP" altLang="en-US" sz="2400" b="1" dirty="0">
                 <a:solidFill>
                   <a:srgbClr val="FF0000"/>
                 </a:solidFill>
               </a:rPr>
-              <a:t>基本操作のプログラム</a:t>
-            </a:r>
+              <a:t>再生ボタン</a:t>
+            </a:r>
+            <a:r>
+              <a:rPr kumimoji="1" lang="ja-JP" altLang="en-US" sz="2400" dirty="0"/>
+              <a:t>から実行できます。</a:t>
+            </a:r>
+            <a:endParaRPr kumimoji="1" lang="en-US" altLang="ja-JP" sz="2400" dirty="0"/>
+          </a:p>
+          <a:p>
             <a:r>
               <a:rPr lang="ja-JP" altLang="en-US" sz="2400" dirty="0"/>
-              <a:t>から作りましょう。</a:t>
+              <a:t>早速押してみましょう。</a:t>
             </a:r>
             <a:endParaRPr kumimoji="1" lang="en-US" altLang="ja-JP" sz="2400" dirty="0"/>
           </a:p>
@@ -9640,7 +10000,7 @@
           <p:cNvPr id="3" name="図 2">
             <a:extLst>
               <a:ext uri="{FF2B5EF4-FFF2-40B4-BE49-F238E27FC236}">
-                <a16:creationId xmlns:a16="http://schemas.microsoft.com/office/drawing/2014/main" id="{5405CCC1-4F02-4425-81EE-EC947F443CA5}"/>
+                <a16:creationId xmlns:a16="http://schemas.microsoft.com/office/drawing/2014/main" id="{BA6720F8-6483-4B2B-AD9B-D1FA007F28D9}"/>
               </a:ext>
             </a:extLst>
           </p:cNvPr>
@@ -9657,8 +10017,8 @@
         </p:blipFill>
         <p:spPr>
           <a:xfrm>
-            <a:off x="567542" y="2187126"/>
-            <a:ext cx="7907591" cy="4015291"/>
+            <a:off x="567542" y="2187127"/>
+            <a:ext cx="8923591" cy="3805292"/>
           </a:xfrm>
           <a:prstGeom prst="rect">
             <a:avLst/>
@@ -9667,26 +10027,26 @@
       </p:pic>
       <p:sp>
         <p:nvSpPr>
-          <p:cNvPr id="7" name="テキスト ボックス 6">
-            <a:extLst>
-              <a:ext uri="{FF2B5EF4-FFF2-40B4-BE49-F238E27FC236}">
-                <a16:creationId xmlns:a16="http://schemas.microsoft.com/office/drawing/2014/main" id="{4A016238-AAE7-405C-BD98-37C4D9CE8C8F}"/>
-              </a:ext>
-            </a:extLst>
-          </p:cNvPr>
-          <p:cNvSpPr txBox="1"/>
-          <p:nvPr/>
-        </p:nvSpPr>
-        <p:spPr>
-          <a:xfrm>
-            <a:off x="1016276" y="3358495"/>
-            <a:ext cx="2339102" cy="461665"/>
-          </a:xfrm>
-          <a:prstGeom prst="rect">
+          <p:cNvPr id="5" name="矢印: 右 4">
+            <a:extLst>
+              <a:ext uri="{FF2B5EF4-FFF2-40B4-BE49-F238E27FC236}">
+                <a16:creationId xmlns:a16="http://schemas.microsoft.com/office/drawing/2014/main" id="{B07C60AA-3025-4C8A-A72D-583968D264EC}"/>
+              </a:ext>
+            </a:extLst>
+          </p:cNvPr>
+          <p:cNvSpPr/>
+          <p:nvPr/>
+        </p:nvSpPr>
+        <p:spPr>
+          <a:xfrm rot="13245323">
+            <a:off x="6578186" y="2547838"/>
+            <a:ext cx="660400" cy="502574"/>
+          </a:xfrm>
+          <a:prstGeom prst="rightArrow">
             <a:avLst/>
           </a:prstGeom>
           <a:solidFill>
-            <a:schemeClr val="bg1"/>
+            <a:srgbClr val="FF0000"/>
           </a:solidFill>
           <a:ln>
             <a:solidFill>
@@ -9694,68 +10054,35 @@
             </a:solidFill>
           </a:ln>
         </p:spPr>
-        <p:txBody>
-          <a:bodyPr wrap="none" rtlCol="0">
-            <a:spAutoFit/>
-          </a:bodyPr>
-          <a:lstStyle/>
-          <a:p>
-            <a:r>
-              <a:rPr kumimoji="1" lang="ja-JP" altLang="en-US" sz="2400" b="1" dirty="0">
-                <a:solidFill>
-                  <a:srgbClr val="FF0000"/>
-                </a:solidFill>
-              </a:rPr>
-              <a:t>動かない。。。</a:t>
-            </a:r>
-            <a:endParaRPr kumimoji="1" lang="en-US" altLang="ja-JP" sz="2400" b="1" dirty="0">
-              <a:solidFill>
-                <a:srgbClr val="FF0000"/>
-              </a:solidFill>
-            </a:endParaRPr>
-          </a:p>
-        </p:txBody>
-      </p:sp>
-      <p:sp>
-        <p:nvSpPr>
-          <p:cNvPr id="8" name="テキスト ボックス 7">
-            <a:extLst>
-              <a:ext uri="{FF2B5EF4-FFF2-40B4-BE49-F238E27FC236}">
-                <a16:creationId xmlns:a16="http://schemas.microsoft.com/office/drawing/2014/main" id="{BCE08318-5728-4918-8709-79788E3BC59E}"/>
-              </a:ext>
-            </a:extLst>
-          </p:cNvPr>
-          <p:cNvSpPr txBox="1"/>
-          <p:nvPr/>
-        </p:nvSpPr>
-        <p:spPr>
-          <a:xfrm>
-            <a:off x="567542" y="6342117"/>
-            <a:ext cx="8494633" cy="461665"/>
-          </a:xfrm>
-          <a:prstGeom prst="rect">
-            <a:avLst/>
-          </a:prstGeom>
-          <a:noFill/>
-        </p:spPr>
-        <p:txBody>
-          <a:bodyPr wrap="none" rtlCol="0">
-            <a:spAutoFit/>
-          </a:bodyPr>
-          <a:lstStyle/>
-          <a:p>
-            <a:r>
-              <a:rPr kumimoji="1" lang="ja-JP" altLang="en-US" sz="2400" dirty="0"/>
-              <a:t>再生ボタン隣の停止ボタンで、ゲームを停止してください。</a:t>
-            </a:r>
-            <a:endParaRPr kumimoji="1" lang="en-US" altLang="ja-JP" sz="2400" dirty="0"/>
+        <p:style>
+          <a:lnRef idx="2">
+            <a:schemeClr val="accent1">
+              <a:shade val="50000"/>
+            </a:schemeClr>
+          </a:lnRef>
+          <a:fillRef idx="1">
+            <a:schemeClr val="accent1"/>
+          </a:fillRef>
+          <a:effectRef idx="0">
+            <a:schemeClr val="accent1"/>
+          </a:effectRef>
+          <a:fontRef idx="minor">
+            <a:schemeClr val="lt1"/>
+          </a:fontRef>
+        </p:style>
+        <p:txBody>
+          <a:bodyPr rtlCol="0" anchor="ctr"/>
+          <a:lstStyle/>
+          <a:p>
+            <a:pPr algn="ctr"/>
+            <a:endParaRPr kumimoji="1" lang="ja-JP" altLang="en-US"/>
           </a:p>
         </p:txBody>
       </p:sp>
     </p:spTree>
     <p:extLst>
       <p:ext uri="{BB962C8B-B14F-4D97-AF65-F5344CB8AC3E}">
-        <p14:creationId xmlns:p14="http://schemas.microsoft.com/office/powerpoint/2010/main" val="2835286072"/>
+        <p14:creationId xmlns:p14="http://schemas.microsoft.com/office/powerpoint/2010/main" val="1343421994"/>
       </p:ext>
     </p:extLst>
   </p:cSld>
@@ -9832,7 +10159,7 @@
         <p:spPr>
           <a:xfrm>
             <a:off x="567542" y="1216429"/>
-            <a:ext cx="10164962" cy="830997"/>
+            <a:ext cx="6955750" cy="830997"/>
           </a:xfrm>
           <a:prstGeom prst="rect">
             <a:avLst/>
@@ -9847,54 +10174,26 @@
           <a:p>
             <a:r>
               <a:rPr kumimoji="1" lang="ja-JP" altLang="en-US" sz="2400" dirty="0"/>
-              <a:t>プログラムのファイルを開きます。</a:t>
-            </a:r>
+              <a:t>ボタンを押しても反応しません。</a:t>
+            </a:r>
+            <a:endParaRPr kumimoji="1" lang="en-US" altLang="ja-JP" sz="2400" dirty="0"/>
+          </a:p>
+          <a:p>
             <a:r>
               <a:rPr lang="ja-JP" altLang="en-US" sz="2400" dirty="0"/>
-              <a:t>左下のフォルダがある画面から、</a:t>
-            </a:r>
-            <a:endParaRPr lang="en-US" altLang="ja-JP" sz="2400" dirty="0"/>
-          </a:p>
-          <a:p>
-            <a:r>
-              <a:rPr kumimoji="1" lang="ja-JP" altLang="en-US" sz="2400" dirty="0"/>
-              <a:t>「</a:t>
-            </a:r>
-            <a:r>
-              <a:rPr kumimoji="1" lang="en-US" altLang="ja-JP" sz="2400" b="1" dirty="0" err="1">
+              <a:t>まずは</a:t>
+            </a:r>
+            <a:r>
+              <a:rPr lang="ja-JP" altLang="en-US" sz="2400" b="1" dirty="0">
                 <a:solidFill>
                   <a:srgbClr val="FF0000"/>
                 </a:solidFill>
               </a:rPr>
-              <a:t>MyProject</a:t>
-            </a:r>
-            <a:r>
-              <a:rPr kumimoji="1" lang="en-US" altLang="ja-JP" sz="2400" b="1" dirty="0">
-                <a:solidFill>
-                  <a:srgbClr val="FF0000"/>
-                </a:solidFill>
-              </a:rPr>
-              <a:t> &gt; </a:t>
-            </a:r>
-            <a:r>
-              <a:rPr kumimoji="1" lang="en-US" altLang="ja-JP" sz="2400" b="1" dirty="0" err="1">
-                <a:solidFill>
-                  <a:srgbClr val="FF0000"/>
-                </a:solidFill>
-              </a:rPr>
-              <a:t>Scropts</a:t>
-            </a:r>
-            <a:r>
-              <a:rPr kumimoji="1" lang="en-US" altLang="ja-JP" sz="2400" b="1" dirty="0">
-                <a:solidFill>
-                  <a:srgbClr val="FF0000"/>
-                </a:solidFill>
-              </a:rPr>
-              <a:t> &gt; Player</a:t>
-            </a:r>
-            <a:r>
-              <a:rPr kumimoji="1" lang="ja-JP" altLang="en-US" sz="2400" dirty="0"/>
-              <a:t>」のフォルダをクリックしましょう。</a:t>
+              <a:t>基本操作のプログラム</a:t>
+            </a:r>
+            <a:r>
+              <a:rPr lang="ja-JP" altLang="en-US" sz="2400" dirty="0"/>
+              <a:t>から作りましょう。</a:t>
             </a:r>
             <a:endParaRPr kumimoji="1" lang="en-US" altLang="ja-JP" sz="2400" dirty="0"/>
           </a:p>
@@ -9902,10 +10201,10 @@
       </p:sp>
       <p:pic>
         <p:nvPicPr>
-          <p:cNvPr id="5" name="図 4">
-            <a:extLst>
-              <a:ext uri="{FF2B5EF4-FFF2-40B4-BE49-F238E27FC236}">
-                <a16:creationId xmlns:a16="http://schemas.microsoft.com/office/drawing/2014/main" id="{48FD94EF-B3F8-49FC-AB16-EA1900800416}"/>
+          <p:cNvPr id="3" name="図 2">
+            <a:extLst>
+              <a:ext uri="{FF2B5EF4-FFF2-40B4-BE49-F238E27FC236}">
+                <a16:creationId xmlns:a16="http://schemas.microsoft.com/office/drawing/2014/main" id="{5405CCC1-4F02-4425-81EE-EC947F443CA5}"/>
               </a:ext>
             </a:extLst>
           </p:cNvPr>
@@ -9922,8 +10221,8 @@
         </p:blipFill>
         <p:spPr>
           <a:xfrm>
-            <a:off x="567541" y="2187126"/>
-            <a:ext cx="5265991" cy="4264553"/>
+            <a:off x="567542" y="2187126"/>
+            <a:ext cx="7907591" cy="4015291"/>
           </a:xfrm>
           <a:prstGeom prst="rect">
             <a:avLst/>
@@ -9932,64 +10231,10 @@
       </p:pic>
       <p:sp>
         <p:nvSpPr>
-          <p:cNvPr id="9" name="矢印: 右 8">
-            <a:extLst>
-              <a:ext uri="{FF2B5EF4-FFF2-40B4-BE49-F238E27FC236}">
-                <a16:creationId xmlns:a16="http://schemas.microsoft.com/office/drawing/2014/main" id="{6F17F18A-0EEE-43CA-9602-0E2BFD1204C5}"/>
-              </a:ext>
-            </a:extLst>
-          </p:cNvPr>
-          <p:cNvSpPr/>
-          <p:nvPr/>
-        </p:nvSpPr>
-        <p:spPr>
-          <a:xfrm rot="13245323">
-            <a:off x="1684452" y="5390284"/>
-            <a:ext cx="660400" cy="502574"/>
-          </a:xfrm>
-          <a:prstGeom prst="rightArrow">
-            <a:avLst/>
-          </a:prstGeom>
-          <a:solidFill>
-            <a:srgbClr val="FF0000"/>
-          </a:solidFill>
-          <a:ln>
-            <a:solidFill>
-              <a:schemeClr val="tx1"/>
-            </a:solidFill>
-          </a:ln>
-        </p:spPr>
-        <p:style>
-          <a:lnRef idx="2">
-            <a:schemeClr val="accent1">
-              <a:shade val="50000"/>
-            </a:schemeClr>
-          </a:lnRef>
-          <a:fillRef idx="1">
-            <a:schemeClr val="accent1"/>
-          </a:fillRef>
-          <a:effectRef idx="0">
-            <a:schemeClr val="accent1"/>
-          </a:effectRef>
-          <a:fontRef idx="minor">
-            <a:schemeClr val="lt1"/>
-          </a:fontRef>
-        </p:style>
-        <p:txBody>
-          <a:bodyPr rtlCol="0" anchor="ctr"/>
-          <a:lstStyle/>
-          <a:p>
-            <a:pPr algn="ctr"/>
-            <a:endParaRPr kumimoji="1" lang="ja-JP" altLang="en-US"/>
-          </a:p>
-        </p:txBody>
-      </p:sp>
-      <p:sp>
-        <p:nvSpPr>
-          <p:cNvPr id="10" name="テキスト ボックス 9">
-            <a:extLst>
-              <a:ext uri="{FF2B5EF4-FFF2-40B4-BE49-F238E27FC236}">
-                <a16:creationId xmlns:a16="http://schemas.microsoft.com/office/drawing/2014/main" id="{3A4877D0-303A-4840-AC1E-4A49B684FFFE}"/>
+          <p:cNvPr id="7" name="テキスト ボックス 6">
+            <a:extLst>
+              <a:ext uri="{FF2B5EF4-FFF2-40B4-BE49-F238E27FC236}">
+                <a16:creationId xmlns:a16="http://schemas.microsoft.com/office/drawing/2014/main" id="{4A016238-AAE7-405C-BD98-37C4D9CE8C8F}"/>
               </a:ext>
             </a:extLst>
           </p:cNvPr>
@@ -9998,8 +10243,8 @@
         </p:nvSpPr>
         <p:spPr>
           <a:xfrm>
-            <a:off x="3364141" y="4088569"/>
-            <a:ext cx="4624984" cy="461665"/>
+            <a:off x="1016276" y="3358495"/>
+            <a:ext cx="2339102" cy="461665"/>
           </a:xfrm>
           <a:prstGeom prst="rect">
             <a:avLst/>
@@ -10020,20 +10265,61 @@
           <a:lstStyle/>
           <a:p>
             <a:r>
+              <a:rPr kumimoji="1" lang="ja-JP" altLang="en-US" sz="2400" b="1" dirty="0">
+                <a:solidFill>
+                  <a:srgbClr val="FF0000"/>
+                </a:solidFill>
+              </a:rPr>
+              <a:t>動かない。。。</a:t>
+            </a:r>
+            <a:endParaRPr kumimoji="1" lang="en-US" altLang="ja-JP" sz="2400" b="1" dirty="0">
+              <a:solidFill>
+                <a:srgbClr val="FF0000"/>
+              </a:solidFill>
+            </a:endParaRPr>
+          </a:p>
+        </p:txBody>
+      </p:sp>
+      <p:sp>
+        <p:nvSpPr>
+          <p:cNvPr id="8" name="テキスト ボックス 7">
+            <a:extLst>
+              <a:ext uri="{FF2B5EF4-FFF2-40B4-BE49-F238E27FC236}">
+                <a16:creationId xmlns:a16="http://schemas.microsoft.com/office/drawing/2014/main" id="{BCE08318-5728-4918-8709-79788E3BC59E}"/>
+              </a:ext>
+            </a:extLst>
+          </p:cNvPr>
+          <p:cNvSpPr txBox="1"/>
+          <p:nvPr/>
+        </p:nvSpPr>
+        <p:spPr>
+          <a:xfrm>
+            <a:off x="567542" y="6342117"/>
+            <a:ext cx="8494633" cy="461665"/>
+          </a:xfrm>
+          <a:prstGeom prst="rect">
+            <a:avLst/>
+          </a:prstGeom>
+          <a:noFill/>
+        </p:spPr>
+        <p:txBody>
+          <a:bodyPr wrap="none" rtlCol="0">
+            <a:spAutoFit/>
+          </a:bodyPr>
+          <a:lstStyle/>
+          <a:p>
+            <a:r>
               <a:rPr kumimoji="1" lang="ja-JP" altLang="en-US" sz="2400" dirty="0"/>
-              <a:t>この２つのファイルがでれば</a:t>
-            </a:r>
-            <a:r>
-              <a:rPr kumimoji="1" lang="en-US" altLang="ja-JP" sz="2400" dirty="0"/>
-              <a:t>OK</a:t>
-            </a:r>
+              <a:t>再生ボタン隣の停止ボタンで、ゲームを停止してください。</a:t>
+            </a:r>
+            <a:endParaRPr kumimoji="1" lang="en-US" altLang="ja-JP" sz="2400" dirty="0"/>
           </a:p>
         </p:txBody>
       </p:sp>
     </p:spTree>
     <p:extLst>
       <p:ext uri="{BB962C8B-B14F-4D97-AF65-F5344CB8AC3E}">
-        <p14:creationId xmlns:p14="http://schemas.microsoft.com/office/powerpoint/2010/main" val="2693296730"/>
+        <p14:creationId xmlns:p14="http://schemas.microsoft.com/office/powerpoint/2010/main" val="2835286072"/>
       </p:ext>
     </p:extLst>
   </p:cSld>
@@ -10110,7 +10396,7 @@
         <p:spPr>
           <a:xfrm>
             <a:off x="567542" y="1216429"/>
-            <a:ext cx="6978192" cy="461665"/>
+            <a:ext cx="10164962" cy="830997"/>
           </a:xfrm>
           <a:prstGeom prst="rect">
             <a:avLst/>
@@ -10125,7 +10411,26 @@
           <a:p>
             <a:r>
               <a:rPr kumimoji="1" lang="ja-JP" altLang="en-US" sz="2400" dirty="0"/>
-              <a:t>表示された</a:t>
+              <a:t>プログラムのファイルを開きます。</a:t>
+            </a:r>
+            <a:r>
+              <a:rPr lang="ja-JP" altLang="en-US" sz="2400" dirty="0"/>
+              <a:t>左下のフォルダがある画面から、</a:t>
+            </a:r>
+            <a:endParaRPr lang="en-US" altLang="ja-JP" sz="2400" dirty="0"/>
+          </a:p>
+          <a:p>
+            <a:r>
+              <a:rPr kumimoji="1" lang="ja-JP" altLang="en-US" sz="2400" dirty="0"/>
+              <a:t>「</a:t>
+            </a:r>
+            <a:r>
+              <a:rPr kumimoji="1" lang="en-US" altLang="ja-JP" sz="2400" b="1" dirty="0" err="1">
+                <a:solidFill>
+                  <a:srgbClr val="FF0000"/>
+                </a:solidFill>
+              </a:rPr>
+              <a:t>MyProject</a:t>
             </a:r>
             <a:r>
               <a:rPr kumimoji="1" lang="en-US" altLang="ja-JP" sz="2400" b="1" dirty="0">
@@ -10133,21 +10438,29 @@
                   <a:srgbClr val="FF0000"/>
                 </a:solidFill>
               </a:rPr>
-              <a:t>Player</a:t>
-            </a:r>
-            <a:r>
-              <a:rPr kumimoji="1" lang="ja-JP" altLang="en-US" sz="2400" b="1" dirty="0">
+              <a:t> &gt; </a:t>
+            </a:r>
+            <a:r>
+              <a:rPr kumimoji="1" lang="en-US" altLang="ja-JP" sz="2400" b="1" dirty="0" err="1">
                 <a:solidFill>
                   <a:srgbClr val="FF0000"/>
                 </a:solidFill>
               </a:rPr>
-              <a:t>をダブルクリック</a:t>
+              <a:t>Scropts</a:t>
+            </a:r>
+            <a:r>
+              <a:rPr kumimoji="1" lang="en-US" altLang="ja-JP" sz="2400" b="1" dirty="0">
+                <a:solidFill>
+                  <a:srgbClr val="FF0000"/>
+                </a:solidFill>
+              </a:rPr>
+              <a:t> &gt; Player</a:t>
             </a:r>
             <a:r>
               <a:rPr kumimoji="1" lang="ja-JP" altLang="en-US" sz="2400" dirty="0"/>
-              <a:t>しましょう。</a:t>
-            </a:r>
-            <a:endParaRPr lang="en-US" altLang="ja-JP" sz="2400" dirty="0"/>
+              <a:t>」のフォルダをクリックしましょう。</a:t>
+            </a:r>
+            <a:endParaRPr kumimoji="1" lang="en-US" altLang="ja-JP" sz="2400" dirty="0"/>
           </a:p>
         </p:txBody>
       </p:sp>
@@ -10195,7 +10508,7 @@
         </p:nvSpPr>
         <p:spPr>
           <a:xfrm rot="13245323">
-            <a:off x="3538651" y="3656503"/>
+            <a:off x="1684452" y="5390284"/>
             <a:ext cx="660400" cy="502574"/>
           </a:xfrm>
           <a:prstGeom prst="rightArrow">
@@ -10235,10 +10548,56 @@
           </a:p>
         </p:txBody>
       </p:sp>
+      <p:sp>
+        <p:nvSpPr>
+          <p:cNvPr id="10" name="テキスト ボックス 9">
+            <a:extLst>
+              <a:ext uri="{FF2B5EF4-FFF2-40B4-BE49-F238E27FC236}">
+                <a16:creationId xmlns:a16="http://schemas.microsoft.com/office/drawing/2014/main" id="{3A4877D0-303A-4840-AC1E-4A49B684FFFE}"/>
+              </a:ext>
+            </a:extLst>
+          </p:cNvPr>
+          <p:cNvSpPr txBox="1"/>
+          <p:nvPr/>
+        </p:nvSpPr>
+        <p:spPr>
+          <a:xfrm>
+            <a:off x="3364141" y="4088569"/>
+            <a:ext cx="4624984" cy="461665"/>
+          </a:xfrm>
+          <a:prstGeom prst="rect">
+            <a:avLst/>
+          </a:prstGeom>
+          <a:solidFill>
+            <a:schemeClr val="bg1"/>
+          </a:solidFill>
+          <a:ln>
+            <a:solidFill>
+              <a:schemeClr val="tx1"/>
+            </a:solidFill>
+          </a:ln>
+        </p:spPr>
+        <p:txBody>
+          <a:bodyPr wrap="none" rtlCol="0">
+            <a:spAutoFit/>
+          </a:bodyPr>
+          <a:lstStyle/>
+          <a:p>
+            <a:r>
+              <a:rPr kumimoji="1" lang="ja-JP" altLang="en-US" sz="2400" dirty="0"/>
+              <a:t>この２つのファイルがでれば</a:t>
+            </a:r>
+            <a:r>
+              <a:rPr kumimoji="1" lang="en-US" altLang="ja-JP" sz="2400" dirty="0"/>
+              <a:t>OK</a:t>
+            </a:r>
+          </a:p>
+        </p:txBody>
+      </p:sp>
     </p:spTree>
     <p:extLst>
       <p:ext uri="{BB962C8B-B14F-4D97-AF65-F5344CB8AC3E}">
-        <p14:creationId xmlns:p14="http://schemas.microsoft.com/office/powerpoint/2010/main" val="1447245248"/>
+        <p14:creationId xmlns:p14="http://schemas.microsoft.com/office/powerpoint/2010/main" val="2693296730"/>
       </p:ext>
     </p:extLst>
   </p:cSld>
@@ -10315,7 +10674,7 @@
         <p:spPr>
           <a:xfrm>
             <a:off x="567542" y="1216429"/>
-            <a:ext cx="10145726" cy="461665"/>
+            <a:ext cx="6978192" cy="461665"/>
           </a:xfrm>
           <a:prstGeom prst="rect">
             <a:avLst/>
@@ -10329,16 +10688,28 @@
           <a:lstStyle/>
           <a:p>
             <a:r>
+              <a:rPr kumimoji="1" lang="ja-JP" altLang="en-US" sz="2400" dirty="0"/>
+              <a:t>表示された</a:t>
+            </a:r>
+            <a:r>
               <a:rPr kumimoji="1" lang="en-US" altLang="ja-JP" sz="2400" b="1" dirty="0">
                 <a:solidFill>
-                  <a:srgbClr val="7030A0"/>
+                  <a:srgbClr val="FF0000"/>
                 </a:solidFill>
               </a:rPr>
-              <a:t>Visual Studio</a:t>
+              <a:t>Player</a:t>
+            </a:r>
+            <a:r>
+              <a:rPr kumimoji="1" lang="ja-JP" altLang="en-US" sz="2400" b="1" dirty="0">
+                <a:solidFill>
+                  <a:srgbClr val="FF0000"/>
+                </a:solidFill>
+              </a:rPr>
+              <a:t>をダブルクリック</a:t>
             </a:r>
             <a:r>
               <a:rPr kumimoji="1" lang="ja-JP" altLang="en-US" sz="2400" dirty="0"/>
-              <a:t>という、プログラムを書くアプリケーションが開きます。</a:t>
+              <a:t>しましょう。</a:t>
             </a:r>
             <a:endParaRPr lang="en-US" altLang="ja-JP" sz="2400" dirty="0"/>
           </a:p>
@@ -10346,10 +10717,10 @@
       </p:sp>
       <p:pic>
         <p:nvPicPr>
-          <p:cNvPr id="3" name="図 2">
-            <a:extLst>
-              <a:ext uri="{FF2B5EF4-FFF2-40B4-BE49-F238E27FC236}">
-                <a16:creationId xmlns:a16="http://schemas.microsoft.com/office/drawing/2014/main" id="{DE7CF18C-E8FD-4D8D-8472-76BDA43909DD}"/>
+          <p:cNvPr id="5" name="図 4">
+            <a:extLst>
+              <a:ext uri="{FF2B5EF4-FFF2-40B4-BE49-F238E27FC236}">
+                <a16:creationId xmlns:a16="http://schemas.microsoft.com/office/drawing/2014/main" id="{48FD94EF-B3F8-49FC-AB16-EA1900800416}"/>
               </a:ext>
             </a:extLst>
           </p:cNvPr>
@@ -10366,8 +10737,8 @@
         </p:blipFill>
         <p:spPr>
           <a:xfrm>
-            <a:off x="567543" y="1817794"/>
-            <a:ext cx="7313624" cy="3931073"/>
+            <a:off x="567541" y="2187126"/>
+            <a:ext cx="5265991" cy="4264553"/>
           </a:xfrm>
           <a:prstGeom prst="rect">
             <a:avLst/>
@@ -10376,44 +10747,62 @@
       </p:pic>
       <p:sp>
         <p:nvSpPr>
-          <p:cNvPr id="8" name="テキスト ボックス 7">
-            <a:extLst>
-              <a:ext uri="{FF2B5EF4-FFF2-40B4-BE49-F238E27FC236}">
-                <a16:creationId xmlns:a16="http://schemas.microsoft.com/office/drawing/2014/main" id="{BF42C2C2-5D6D-4E11-B818-76BB99060A08}"/>
-              </a:ext>
-            </a:extLst>
-          </p:cNvPr>
-          <p:cNvSpPr txBox="1"/>
-          <p:nvPr/>
-        </p:nvSpPr>
-        <p:spPr>
-          <a:xfrm>
-            <a:off x="567542" y="5904381"/>
-            <a:ext cx="7571303" cy="461665"/>
-          </a:xfrm>
-          <a:prstGeom prst="rect">
-            <a:avLst/>
-          </a:prstGeom>
-          <a:noFill/>
-        </p:spPr>
-        <p:txBody>
-          <a:bodyPr wrap="none" rtlCol="0">
-            <a:spAutoFit/>
-          </a:bodyPr>
-          <a:lstStyle/>
-          <a:p>
-            <a:r>
-              <a:rPr lang="ja-JP" altLang="en-US" sz="2400" dirty="0"/>
-              <a:t>それでは、基本操作のプログラムを書いていきます。</a:t>
-            </a:r>
-            <a:endParaRPr lang="en-US" altLang="ja-JP" sz="2400" dirty="0"/>
+          <p:cNvPr id="9" name="矢印: 右 8">
+            <a:extLst>
+              <a:ext uri="{FF2B5EF4-FFF2-40B4-BE49-F238E27FC236}">
+                <a16:creationId xmlns:a16="http://schemas.microsoft.com/office/drawing/2014/main" id="{6F17F18A-0EEE-43CA-9602-0E2BFD1204C5}"/>
+              </a:ext>
+            </a:extLst>
+          </p:cNvPr>
+          <p:cNvSpPr/>
+          <p:nvPr/>
+        </p:nvSpPr>
+        <p:spPr>
+          <a:xfrm rot="13245323">
+            <a:off x="3538651" y="3656503"/>
+            <a:ext cx="660400" cy="502574"/>
+          </a:xfrm>
+          <a:prstGeom prst="rightArrow">
+            <a:avLst/>
+          </a:prstGeom>
+          <a:solidFill>
+            <a:srgbClr val="FF0000"/>
+          </a:solidFill>
+          <a:ln>
+            <a:solidFill>
+              <a:schemeClr val="tx1"/>
+            </a:solidFill>
+          </a:ln>
+        </p:spPr>
+        <p:style>
+          <a:lnRef idx="2">
+            <a:schemeClr val="accent1">
+              <a:shade val="50000"/>
+            </a:schemeClr>
+          </a:lnRef>
+          <a:fillRef idx="1">
+            <a:schemeClr val="accent1"/>
+          </a:fillRef>
+          <a:effectRef idx="0">
+            <a:schemeClr val="accent1"/>
+          </a:effectRef>
+          <a:fontRef idx="minor">
+            <a:schemeClr val="lt1"/>
+          </a:fontRef>
+        </p:style>
+        <p:txBody>
+          <a:bodyPr rtlCol="0" anchor="ctr"/>
+          <a:lstStyle/>
+          <a:p>
+            <a:pPr algn="ctr"/>
+            <a:endParaRPr kumimoji="1" lang="ja-JP" altLang="en-US"/>
           </a:p>
         </p:txBody>
       </p:sp>
     </p:spTree>
     <p:extLst>
       <p:ext uri="{BB962C8B-B14F-4D97-AF65-F5344CB8AC3E}">
-        <p14:creationId xmlns:p14="http://schemas.microsoft.com/office/powerpoint/2010/main" val="1443641099"/>
+        <p14:creationId xmlns:p14="http://schemas.microsoft.com/office/powerpoint/2010/main" val="1447245248"/>
       </p:ext>
     </p:extLst>
   </p:cSld>
@@ -10490,7 +10879,7 @@
         <p:spPr>
           <a:xfrm>
             <a:off x="567542" y="1216429"/>
-            <a:ext cx="6067687" cy="461665"/>
+            <a:ext cx="10145726" cy="461665"/>
           </a:xfrm>
           <a:prstGeom prst="rect">
             <a:avLst/>
@@ -10504,12 +10893,16 @@
           <a:lstStyle/>
           <a:p>
             <a:r>
-              <a:rPr lang="en-US" altLang="ja-JP" sz="2400" dirty="0"/>
-              <a:t>70</a:t>
-            </a:r>
-            <a:r>
-              <a:rPr lang="ja-JP" altLang="en-US" sz="2400" dirty="0"/>
-              <a:t>行目辺りにこのような場所があります。</a:t>
+              <a:rPr kumimoji="1" lang="en-US" altLang="ja-JP" sz="2400" b="1" dirty="0">
+                <a:solidFill>
+                  <a:srgbClr val="7030A0"/>
+                </a:solidFill>
+              </a:rPr>
+              <a:t>Visual Studio</a:t>
+            </a:r>
+            <a:r>
+              <a:rPr kumimoji="1" lang="ja-JP" altLang="en-US" sz="2400" dirty="0"/>
+              <a:t>という、プログラムを書くアプリケーションが開きます。</a:t>
             </a:r>
             <a:endParaRPr lang="en-US" altLang="ja-JP" sz="2400" dirty="0"/>
           </a:p>
@@ -10517,10 +10910,10 @@
       </p:sp>
       <p:pic>
         <p:nvPicPr>
-          <p:cNvPr id="5" name="図 4">
-            <a:extLst>
-              <a:ext uri="{FF2B5EF4-FFF2-40B4-BE49-F238E27FC236}">
-                <a16:creationId xmlns:a16="http://schemas.microsoft.com/office/drawing/2014/main" id="{E28773AB-4EAA-428E-AC60-2F5917AF9F3E}"/>
+          <p:cNvPr id="3" name="図 2">
+            <a:extLst>
+              <a:ext uri="{FF2B5EF4-FFF2-40B4-BE49-F238E27FC236}">
+                <a16:creationId xmlns:a16="http://schemas.microsoft.com/office/drawing/2014/main" id="{DE7CF18C-E8FD-4D8D-8472-76BDA43909DD}"/>
               </a:ext>
             </a:extLst>
           </p:cNvPr>
@@ -10537,18 +10930,54 @@
         </p:blipFill>
         <p:spPr>
           <a:xfrm>
-            <a:off x="567541" y="1817794"/>
-            <a:ext cx="7812937" cy="3473873"/>
+            <a:off x="567543" y="1817794"/>
+            <a:ext cx="7313624" cy="3931073"/>
           </a:xfrm>
           <a:prstGeom prst="rect">
             <a:avLst/>
           </a:prstGeom>
         </p:spPr>
       </p:pic>
+      <p:sp>
+        <p:nvSpPr>
+          <p:cNvPr id="8" name="テキスト ボックス 7">
+            <a:extLst>
+              <a:ext uri="{FF2B5EF4-FFF2-40B4-BE49-F238E27FC236}">
+                <a16:creationId xmlns:a16="http://schemas.microsoft.com/office/drawing/2014/main" id="{BF42C2C2-5D6D-4E11-B818-76BB99060A08}"/>
+              </a:ext>
+            </a:extLst>
+          </p:cNvPr>
+          <p:cNvSpPr txBox="1"/>
+          <p:nvPr/>
+        </p:nvSpPr>
+        <p:spPr>
+          <a:xfrm>
+            <a:off x="567542" y="5904381"/>
+            <a:ext cx="7571303" cy="461665"/>
+          </a:xfrm>
+          <a:prstGeom prst="rect">
+            <a:avLst/>
+          </a:prstGeom>
+          <a:noFill/>
+        </p:spPr>
+        <p:txBody>
+          <a:bodyPr wrap="none" rtlCol="0">
+            <a:spAutoFit/>
+          </a:bodyPr>
+          <a:lstStyle/>
+          <a:p>
+            <a:r>
+              <a:rPr lang="ja-JP" altLang="en-US" sz="2400" dirty="0"/>
+              <a:t>それでは、基本操作のプログラムを書いていきます。</a:t>
+            </a:r>
+            <a:endParaRPr lang="en-US" altLang="ja-JP" sz="2400" dirty="0"/>
+          </a:p>
+        </p:txBody>
+      </p:sp>
     </p:spTree>
     <p:extLst>
       <p:ext uri="{BB962C8B-B14F-4D97-AF65-F5344CB8AC3E}">
-        <p14:creationId xmlns:p14="http://schemas.microsoft.com/office/powerpoint/2010/main" val="3737446416"/>
+        <p14:creationId xmlns:p14="http://schemas.microsoft.com/office/powerpoint/2010/main" val="1443641099"/>
       </p:ext>
     </p:extLst>
   </p:cSld>
@@ -10625,7 +11054,7 @@
         <p:spPr>
           <a:xfrm>
             <a:off x="567542" y="1216429"/>
-            <a:ext cx="6032421" cy="461665"/>
+            <a:ext cx="6067687" cy="461665"/>
           </a:xfrm>
           <a:prstGeom prst="rect">
             <a:avLst/>
@@ -10639,8 +11068,12 @@
           <a:lstStyle/>
           <a:p>
             <a:r>
+              <a:rPr lang="en-US" altLang="ja-JP" sz="2400" dirty="0"/>
+              <a:t>70</a:t>
+            </a:r>
+            <a:r>
               <a:rPr lang="ja-JP" altLang="en-US" sz="2400" dirty="0"/>
-              <a:t>画面を参考にプログラムを書きましょう。</a:t>
+              <a:t>行目辺りにこのような場所があります。</a:t>
             </a:r>
             <a:endParaRPr lang="en-US" altLang="ja-JP" sz="2400" dirty="0"/>
           </a:p>
@@ -10648,10 +11081,10 @@
       </p:sp>
       <p:pic>
         <p:nvPicPr>
-          <p:cNvPr id="3" name="図 2">
-            <a:extLst>
-              <a:ext uri="{FF2B5EF4-FFF2-40B4-BE49-F238E27FC236}">
-                <a16:creationId xmlns:a16="http://schemas.microsoft.com/office/drawing/2014/main" id="{5B247A15-19C1-4C4A-B3DA-5A8A8F4A9867}"/>
+          <p:cNvPr id="5" name="図 4">
+            <a:extLst>
+              <a:ext uri="{FF2B5EF4-FFF2-40B4-BE49-F238E27FC236}">
+                <a16:creationId xmlns:a16="http://schemas.microsoft.com/office/drawing/2014/main" id="{E28773AB-4EAA-428E-AC60-2F5917AF9F3E}"/>
               </a:ext>
             </a:extLst>
           </p:cNvPr>
@@ -10668,203 +11101,18 @@
         </p:blipFill>
         <p:spPr>
           <a:xfrm>
-            <a:off x="567542" y="1817794"/>
-            <a:ext cx="6908525" cy="1606085"/>
+            <a:off x="567541" y="1817794"/>
+            <a:ext cx="7812937" cy="3473873"/>
           </a:xfrm>
           <a:prstGeom prst="rect">
             <a:avLst/>
           </a:prstGeom>
         </p:spPr>
       </p:pic>
-      <p:sp>
-        <p:nvSpPr>
-          <p:cNvPr id="7" name="テキスト ボックス 6">
-            <a:extLst>
-              <a:ext uri="{FF2B5EF4-FFF2-40B4-BE49-F238E27FC236}">
-                <a16:creationId xmlns:a16="http://schemas.microsoft.com/office/drawing/2014/main" id="{C0E3D302-38B9-4EF7-BA41-5E832C6C0CF6}"/>
-              </a:ext>
-            </a:extLst>
-          </p:cNvPr>
-          <p:cNvSpPr txBox="1"/>
-          <p:nvPr/>
-        </p:nvSpPr>
-        <p:spPr>
-          <a:xfrm>
-            <a:off x="8255275" y="1979137"/>
-            <a:ext cx="3570208" cy="461665"/>
-          </a:xfrm>
-          <a:prstGeom prst="rect">
-            <a:avLst/>
-          </a:prstGeom>
-          <a:noFill/>
-        </p:spPr>
-        <p:txBody>
-          <a:bodyPr wrap="none" rtlCol="0">
-            <a:spAutoFit/>
-          </a:bodyPr>
-          <a:lstStyle/>
-          <a:p>
-            <a:r>
-              <a:rPr lang="ja-JP" altLang="en-US" sz="2400" b="1" dirty="0">
-                <a:solidFill>
-                  <a:srgbClr val="7030A0"/>
-                </a:solidFill>
-              </a:rPr>
-              <a:t>もしも上矢印を押したら</a:t>
-            </a:r>
-            <a:endParaRPr lang="en-US" altLang="ja-JP" sz="2400" b="1" dirty="0">
-              <a:solidFill>
-                <a:srgbClr val="7030A0"/>
-              </a:solidFill>
-            </a:endParaRPr>
-          </a:p>
-        </p:txBody>
-      </p:sp>
-      <p:sp>
-        <p:nvSpPr>
-          <p:cNvPr id="8" name="テキスト ボックス 7">
-            <a:extLst>
-              <a:ext uri="{FF2B5EF4-FFF2-40B4-BE49-F238E27FC236}">
-                <a16:creationId xmlns:a16="http://schemas.microsoft.com/office/drawing/2014/main" id="{E0E0CB4D-1DDB-46A5-9F28-363AB8BD0C44}"/>
-              </a:ext>
-            </a:extLst>
-          </p:cNvPr>
-          <p:cNvSpPr txBox="1"/>
-          <p:nvPr/>
-        </p:nvSpPr>
-        <p:spPr>
-          <a:xfrm>
-            <a:off x="8303365" y="2440802"/>
-            <a:ext cx="3474028" cy="461665"/>
-          </a:xfrm>
-          <a:prstGeom prst="rect">
-            <a:avLst/>
-          </a:prstGeom>
-          <a:noFill/>
-        </p:spPr>
-        <p:txBody>
-          <a:bodyPr wrap="none" rtlCol="0">
-            <a:spAutoFit/>
-          </a:bodyPr>
-          <a:lstStyle/>
-          <a:p>
-            <a:r>
-              <a:rPr lang="en-US" altLang="ja-JP" sz="2400" b="1" dirty="0">
-                <a:solidFill>
-                  <a:srgbClr val="7030A0"/>
-                </a:solidFill>
-              </a:rPr>
-              <a:t>Y</a:t>
-            </a:r>
-            <a:r>
-              <a:rPr lang="ja-JP" altLang="en-US" sz="2400" b="1" dirty="0">
-                <a:solidFill>
-                  <a:srgbClr val="7030A0"/>
-                </a:solidFill>
-              </a:rPr>
-              <a:t>軸（縦軸）に移動する</a:t>
-            </a:r>
-            <a:endParaRPr lang="en-US" altLang="ja-JP" sz="2400" b="1" dirty="0">
-              <a:solidFill>
-                <a:srgbClr val="7030A0"/>
-              </a:solidFill>
-            </a:endParaRPr>
-          </a:p>
-        </p:txBody>
-      </p:sp>
-      <p:sp>
-        <p:nvSpPr>
-          <p:cNvPr id="9" name="テキスト ボックス 8">
-            <a:extLst>
-              <a:ext uri="{FF2B5EF4-FFF2-40B4-BE49-F238E27FC236}">
-                <a16:creationId xmlns:a16="http://schemas.microsoft.com/office/drawing/2014/main" id="{C6B4C171-AA5F-4E9C-A45B-52BDC18F6A4B}"/>
-              </a:ext>
-            </a:extLst>
-          </p:cNvPr>
-          <p:cNvSpPr txBox="1"/>
-          <p:nvPr/>
-        </p:nvSpPr>
-        <p:spPr>
-          <a:xfrm>
-            <a:off x="567542" y="3775245"/>
-            <a:ext cx="7471917" cy="1569660"/>
-          </a:xfrm>
-          <a:prstGeom prst="rect">
-            <a:avLst/>
-          </a:prstGeom>
-          <a:noFill/>
-        </p:spPr>
-        <p:txBody>
-          <a:bodyPr wrap="none" rtlCol="0">
-            <a:spAutoFit/>
-          </a:bodyPr>
-          <a:lstStyle/>
-          <a:p>
-            <a:r>
-              <a:rPr lang="ja-JP" altLang="en-US" sz="2400" dirty="0"/>
-              <a:t>このようにプログラミングとは、</a:t>
-            </a:r>
-            <a:endParaRPr lang="en-US" altLang="ja-JP" sz="2400" dirty="0"/>
-          </a:p>
-          <a:p>
-            <a:r>
-              <a:rPr lang="ja-JP" altLang="en-US" sz="2400" b="1" dirty="0">
-                <a:solidFill>
-                  <a:srgbClr val="FF0000"/>
-                </a:solidFill>
-              </a:rPr>
-              <a:t>やりたいことをルールに則って書いていきます。</a:t>
-            </a:r>
-            <a:endParaRPr lang="en-US" altLang="ja-JP" sz="2400" b="1" dirty="0">
-              <a:solidFill>
-                <a:srgbClr val="FF0000"/>
-              </a:solidFill>
-            </a:endParaRPr>
-          </a:p>
-          <a:p>
-            <a:endParaRPr lang="en-US" altLang="ja-JP" sz="2400" b="1" dirty="0">
-              <a:solidFill>
-                <a:srgbClr val="FF0000"/>
-              </a:solidFill>
-            </a:endParaRPr>
-          </a:p>
-          <a:p>
-            <a:r>
-              <a:rPr lang="ja-JP" altLang="en-US" sz="2400" dirty="0"/>
-              <a:t>書き終わったら、</a:t>
-            </a:r>
-            <a:r>
-              <a:rPr lang="en-US" altLang="ja-JP" sz="2400" b="1" dirty="0">
-                <a:solidFill>
-                  <a:srgbClr val="FF0000"/>
-                </a:solidFill>
-              </a:rPr>
-              <a:t>CTRL + S</a:t>
-            </a:r>
-            <a:r>
-              <a:rPr lang="ja-JP" altLang="en-US" sz="2400" b="1" dirty="0">
-                <a:solidFill>
-                  <a:srgbClr val="FF0000"/>
-                </a:solidFill>
-              </a:rPr>
-              <a:t>キーで保存</a:t>
-            </a:r>
-            <a:r>
-              <a:rPr lang="ja-JP" altLang="en-US" sz="2400" dirty="0"/>
-              <a:t>しましょう。</a:t>
-            </a:r>
-            <a:endParaRPr lang="en-US" altLang="ja-JP" sz="2400" b="1" dirty="0">
-              <a:solidFill>
-                <a:srgbClr val="FF0000"/>
-              </a:solidFill>
-            </a:endParaRPr>
-          </a:p>
-        </p:txBody>
-      </p:sp>
     </p:spTree>
     <p:extLst>
       <p:ext uri="{BB962C8B-B14F-4D97-AF65-F5344CB8AC3E}">
-        <p14:creationId xmlns:p14="http://schemas.microsoft.com/office/powerpoint/2010/main" val="3616531251"/>
+        <p14:creationId xmlns:p14="http://schemas.microsoft.com/office/powerpoint/2010/main" val="3737446416"/>
       </p:ext>
     </p:extLst>
   </p:cSld>
